--- a/docs/presentations/部長会資料_上方修正を再現可能な成長モデルへ.pptx
+++ b/docs/presentations/部長会資料_上方修正を再現可能な成長モデルへ.pptx
@@ -151,11 +151,11 @@
               <a:lstStyle/>
               <a:p>
                 <a:pPr>
-                  <a:defRPr b="1" i="0" strike="noStrike" sz="1200" u="none">
+                  <a:defRPr b="1" i="0" strike="noStrike" sz="1150" u="none">
                     <a:solidFill>
-                      <a:srgbClr val="1B2A4A"/>
+                      <a:srgbClr val="262630"/>
                     </a:solidFill>
-                    <a:latin typeface="Meiryo"/>
+                    <a:latin typeface="Yu Gothic"/>
                   </a:defRPr>
                 </a:pPr>
               </a:p>
@@ -185,7 +185,7 @@
             <c:bubble3D val="0"/>
             <c:spPr>
               <a:solidFill>
-                <a:srgbClr val="1B2A4A"/>
+                <a:srgbClr val="3A106E"/>
               </a:solidFill>
               <a:effectLst/>
             </c:spPr>
@@ -196,7 +196,7 @@
             <c:bubble3D val="0"/>
             <c:spPr>
               <a:solidFill>
-                <a:srgbClr val="1B2A4A"/>
+                <a:srgbClr val="3A106E"/>
               </a:solidFill>
               <a:effectLst/>
             </c:spPr>
@@ -207,7 +207,7 @@
             <c:bubble3D val="0"/>
             <c:spPr>
               <a:solidFill>
-                <a:srgbClr val="C8102E"/>
+                <a:srgbClr val="7823DC"/>
               </a:solidFill>
               <a:effectLst/>
             </c:spPr>
@@ -263,11 +263,11 @@
             <a:lstStyle/>
             <a:p>
               <a:pPr>
-                <a:defRPr b="1" i="0" strike="noStrike" sz="1200" u="none">
+                <a:defRPr b="1" i="0" strike="noStrike" sz="1150" u="none">
                   <a:solidFill>
-                    <a:srgbClr val="1B2A4A"/>
+                    <a:srgbClr val="262630"/>
                   </a:solidFill>
-                  <a:latin typeface="Meiryo"/>
+                  <a:latin typeface="Yu Gothic"/>
                 </a:defRPr>
               </a:pPr>
             </a:p>
@@ -311,11 +311,11 @@
           <a:lstStyle/>
           <a:p>
             <a:pPr>
-              <a:defRPr sz="1050" b="0" i="0" u="none" strike="noStrike">
+              <a:defRPr sz="1000" b="0" i="0" u="none" strike="noStrike">
                 <a:solidFill>
-                  <a:srgbClr val="5A6472"/>
+                  <a:srgbClr val="5F5F6E"/>
                 </a:solidFill>
-                <a:latin typeface="Meiryo"/>
+                <a:latin typeface="Yu Gothic"/>
               </a:defRPr>
             </a:pPr>
             <a:endParaRPr lang="en-US"/>
@@ -1493,7 +1493,7 @@
     <p:bg>
       <p:bgPr>
         <a:solidFill>
-          <a:srgbClr val="1B2A4A"/>
+          <a:srgbClr val="FFFFFF"/>
         </a:solidFill>
       </p:bgPr>
     </p:bg>
@@ -1513,14 +1513,54 @@
       </p:grpSpPr>
       <p:sp>
         <p:nvSpPr>
-          <p:cNvPr id="2" name="Text 0"/>
-          <p:cNvSpPr/>
-          <p:nvPr/>
-        </p:nvSpPr>
-        <p:spPr>
-          <a:xfrm>
-            <a:off x="640080" y="502920"/>
-            <a:ext cx="10972800" cy="365760"/>
+          <p:cNvPr id="2" name="Shape 0"/>
+          <p:cNvSpPr/>
+          <p:nvPr/>
+        </p:nvSpPr>
+        <p:spPr>
+          <a:xfrm>
+            <a:off x="0" y="0"/>
+            <a:ext cx="146304" cy="6858000"/>
+          </a:xfrm>
+          <a:prstGeom prst="rect">
+            <a:avLst/>
+          </a:prstGeom>
+          <a:solidFill>
+            <a:srgbClr val="7823DC"/>
+          </a:solidFill>
+          <a:ln/>
+        </p:spPr>
+      </p:sp>
+      <p:sp>
+        <p:nvSpPr>
+          <p:cNvPr id="3" name="Shape 1"/>
+          <p:cNvSpPr/>
+          <p:nvPr/>
+        </p:nvSpPr>
+        <p:spPr>
+          <a:xfrm>
+            <a:off x="822960" y="960120"/>
+            <a:ext cx="2011680" cy="45720"/>
+          </a:xfrm>
+          <a:prstGeom prst="rect">
+            <a:avLst/>
+          </a:prstGeom>
+          <a:solidFill>
+            <a:srgbClr val="7823DC"/>
+          </a:solidFill>
+          <a:ln/>
+        </p:spPr>
+      </p:sp>
+      <p:sp>
+        <p:nvSpPr>
+          <p:cNvPr id="4" name="Text 2"/>
+          <p:cNvSpPr/>
+          <p:nvPr/>
+        </p:nvSpPr>
+        <p:spPr>
+          <a:xfrm>
+            <a:off x="822960" y="1188720"/>
+            <a:ext cx="10789920" cy="365760"/>
           </a:xfrm>
           <a:prstGeom prst="rect">
             <a:avLst/>
@@ -1536,30 +1576,30 @@
               <a:buNone/>
             </a:pPr>
             <a:r>
-              <a:rPr lang="en-US" sz="1200" dirty="0">
+              <a:rPr lang="en-US" sz="1300" b="1" dirty="0">
                 <a:solidFill>
-                  <a:srgbClr val="AFC6E9"/>
+                  <a:srgbClr val="5F5F6E"/>
                 </a:solidFill>
-                <a:latin typeface="Meiryo" pitchFamily="34" charset="0"/>
-                <a:ea typeface="Meiryo" pitchFamily="34" charset="-122"/>
-                <a:cs typeface="Meiryo" pitchFamily="34" charset="-120"/>
+                <a:latin typeface="Yu Gothic" pitchFamily="34" charset="0"/>
+                <a:ea typeface="Yu Gothic" pitchFamily="34" charset="-122"/>
+                <a:cs typeface="Yu Gothic" pitchFamily="34" charset="-120"/>
               </a:rPr>
-              <a:t>部長会資料｜2026年7月　円谷フィールズホールディングス／円谷プロダクション</a:t>
-            </a:r>
-            <a:endParaRPr lang="en-US" sz="1200" dirty="0"/>
+              <a:t>部長会（2026年7月）｜円谷フィールズホールディングス／円谷プロダクション</a:t>
+            </a:r>
+            <a:endParaRPr lang="en-US" sz="1300" dirty="0"/>
           </a:p>
         </p:txBody>
       </p:sp>
       <p:sp>
         <p:nvSpPr>
-          <p:cNvPr id="3" name="Text 1"/>
-          <p:cNvSpPr/>
-          <p:nvPr/>
-        </p:nvSpPr>
-        <p:spPr>
-          <a:xfrm>
-            <a:off x="640080" y="1417320"/>
-            <a:ext cx="10972800" cy="1920240"/>
+          <p:cNvPr id="5" name="Text 3"/>
+          <p:cNvSpPr/>
+          <p:nvPr/>
+        </p:nvSpPr>
+        <p:spPr>
+          <a:xfrm>
+            <a:off x="822960" y="1828800"/>
+            <a:ext cx="10789920" cy="1691640"/>
           </a:xfrm>
           <a:prstGeom prst="rect">
             <a:avLst/>
@@ -1573,55 +1613,55 @@
           <a:p>
             <a:pPr indent="0" marL="0">
               <a:lnSpc>
-                <a:spcPct val="115000"/>
+                <a:spcPct val="120000"/>
               </a:lnSpc>
               <a:buNone/>
             </a:pPr>
             <a:r>
-              <a:rPr lang="en-US" sz="4000" b="1" dirty="0">
+              <a:rPr lang="en-US" sz="3400" b="1" dirty="0">
                 <a:solidFill>
-                  <a:srgbClr val="FFFFFF"/>
+                  <a:srgbClr val="262630"/>
                 </a:solidFill>
-                <a:latin typeface="Meiryo" pitchFamily="34" charset="0"/>
-                <a:ea typeface="Meiryo" pitchFamily="34" charset="-122"/>
-                <a:cs typeface="Meiryo" pitchFamily="34" charset="-120"/>
+                <a:latin typeface="Yu Gothic" pitchFamily="34" charset="0"/>
+                <a:ea typeface="Yu Gothic" pitchFamily="34" charset="-122"/>
+                <a:cs typeface="Yu Gothic" pitchFamily="34" charset="-120"/>
               </a:rPr>
               <a:t>今回の上方修正を、</a:t>
             </a:r>
-            <a:endParaRPr lang="en-US" sz="4000" dirty="0"/>
+            <a:endParaRPr lang="en-US" sz="3400" dirty="0"/>
           </a:p>
           <a:p>
             <a:pPr indent="0" marL="0">
               <a:lnSpc>
-                <a:spcPct val="115000"/>
+                <a:spcPct val="120000"/>
               </a:lnSpc>
               <a:buNone/>
             </a:pPr>
             <a:r>
-              <a:rPr lang="en-US" sz="4000" b="1" dirty="0">
+              <a:rPr lang="en-US" sz="3400" b="1" dirty="0">
                 <a:solidFill>
-                  <a:srgbClr val="FFFFFF"/>
+                  <a:srgbClr val="262630"/>
                 </a:solidFill>
-                <a:latin typeface="Meiryo" pitchFamily="34" charset="0"/>
-                <a:ea typeface="Meiryo" pitchFamily="34" charset="-122"/>
-                <a:cs typeface="Meiryo" pitchFamily="34" charset="-120"/>
+                <a:latin typeface="Yu Gothic" pitchFamily="34" charset="0"/>
+                <a:ea typeface="Yu Gothic" pitchFamily="34" charset="-122"/>
+                <a:cs typeface="Yu Gothic" pitchFamily="34" charset="-120"/>
               </a:rPr>
               <a:t>再現可能な成長モデルへ変える</a:t>
             </a:r>
-            <a:endParaRPr lang="en-US" sz="4000" dirty="0"/>
+            <a:endParaRPr lang="en-US" sz="3400" dirty="0"/>
           </a:p>
         </p:txBody>
       </p:sp>
       <p:sp>
         <p:nvSpPr>
-          <p:cNvPr id="4" name="Text 2"/>
-          <p:cNvSpPr/>
-          <p:nvPr/>
-        </p:nvSpPr>
-        <p:spPr>
-          <a:xfrm>
-            <a:off x="640080" y="3429000"/>
-            <a:ext cx="10972800" cy="457200"/>
+          <p:cNvPr id="6" name="Text 4"/>
+          <p:cNvSpPr/>
+          <p:nvPr/>
+        </p:nvSpPr>
+        <p:spPr>
+          <a:xfrm>
+            <a:off x="822960" y="3611880"/>
+            <a:ext cx="10789920" cy="411480"/>
           </a:xfrm>
           <a:prstGeom prst="rect">
             <a:avLst/>
@@ -1637,15 +1677,15 @@
               <a:buNone/>
             </a:pPr>
             <a:r>
-              <a:rPr lang="en-US" sz="1700" dirty="0">
+              <a:rPr lang="en-US" sz="1700" b="1" dirty="0">
                 <a:solidFill>
-                  <a:srgbClr val="AFC6E9"/>
+                  <a:srgbClr val="7823DC"/>
                 </a:solidFill>
-                <a:latin typeface="Meiryo" pitchFamily="34" charset="0"/>
-                <a:ea typeface="Meiryo" pitchFamily="34" charset="-122"/>
-                <a:cs typeface="Meiryo" pitchFamily="34" charset="-120"/>
+                <a:latin typeface="Yu Gothic" pitchFamily="34" charset="0"/>
+                <a:ea typeface="Yu Gothic" pitchFamily="34" charset="-122"/>
+                <a:cs typeface="Yu Gothic" pitchFamily="34" charset="-120"/>
               </a:rPr>
-              <a:t>― なぜ「今」が極めて重要なのか／部長陣に求める実行責任 ―</a:t>
+              <a:t>――なぜ「今」が極めて重要なのか／部長陣に求める実行責任</a:t>
             </a:r>
             <a:endParaRPr lang="en-US" sz="1700" dirty="0"/>
           </a:p>
@@ -1653,36 +1693,14 @@
       </p:sp>
       <p:sp>
         <p:nvSpPr>
-          <p:cNvPr id="5" name="Shape 3"/>
-          <p:cNvSpPr/>
-          <p:nvPr/>
-        </p:nvSpPr>
-        <p:spPr>
-          <a:xfrm>
-            <a:off x="640080" y="4343400"/>
-            <a:ext cx="10908792" cy="1783080"/>
-          </a:xfrm>
-          <a:prstGeom prst="roundRect">
-            <a:avLst>
-              <a:gd name="adj" fmla="val 4103"/>
-            </a:avLst>
-          </a:prstGeom>
-          <a:solidFill>
-            <a:srgbClr val="263A63"/>
-          </a:solidFill>
-          <a:ln/>
-        </p:spPr>
-      </p:sp>
-      <p:sp>
-        <p:nvSpPr>
-          <p:cNvPr id="6" name="Text 4"/>
-          <p:cNvSpPr/>
-          <p:nvPr/>
-        </p:nvSpPr>
-        <p:spPr>
-          <a:xfrm>
-            <a:off x="960120" y="4572000"/>
-            <a:ext cx="10241280" cy="320040"/>
+          <p:cNvPr id="7" name="Text 5"/>
+          <p:cNvSpPr/>
+          <p:nvPr/>
+        </p:nvSpPr>
+        <p:spPr>
+          <a:xfrm>
+            <a:off x="822960" y="4114800"/>
+            <a:ext cx="10789920" cy="365760"/>
           </a:xfrm>
           <a:prstGeom prst="rect">
             <a:avLst/>
@@ -1698,72 +1716,30 @@
               <a:buNone/>
             </a:pPr>
             <a:r>
-              <a:rPr lang="en-US" sz="1300" b="1" dirty="0">
+              <a:rPr lang="en-US" sz="1350" b="1" dirty="0">
                 <a:solidFill>
-                  <a:srgbClr val="FF7A85"/>
+                  <a:srgbClr val="262630"/>
                 </a:solidFill>
-                <a:latin typeface="Meiryo" pitchFamily="34" charset="0"/>
-                <a:ea typeface="Meiryo" pitchFamily="34" charset="-122"/>
-                <a:cs typeface="Meiryo" pitchFamily="34" charset="-120"/>
+                <a:latin typeface="Yu Gothic" pitchFamily="34" charset="0"/>
+                <a:ea typeface="Yu Gothic" pitchFamily="34" charset="-122"/>
+                <a:cs typeface="Yu Gothic" pitchFamily="34" charset="-120"/>
               </a:rPr>
-              <a:t>この資料の結論</a:t>
-            </a:r>
-            <a:endParaRPr lang="en-US" sz="1300" dirty="0"/>
+              <a:t>この資料の結論：上方修正は「改革が完了した証明」ではない。市場に対し、改革成果を数字として約束した瞬間である</a:t>
+            </a:r>
+            <a:endParaRPr lang="en-US" sz="1350" dirty="0"/>
           </a:p>
         </p:txBody>
       </p:sp>
       <p:sp>
         <p:nvSpPr>
-          <p:cNvPr id="7" name="Text 5"/>
-          <p:cNvSpPr/>
-          <p:nvPr/>
-        </p:nvSpPr>
-        <p:spPr>
-          <a:xfrm>
-            <a:off x="960120" y="4937760"/>
-            <a:ext cx="10287000" cy="1005840"/>
-          </a:xfrm>
-          <a:prstGeom prst="rect">
-            <a:avLst/>
-          </a:prstGeom>
-          <a:noFill/>
-          <a:ln/>
-        </p:spPr>
-        <p:txBody>
-          <a:bodyPr wrap="square" lIns="0" tIns="0" rIns="0" bIns="0" rtlCol="0" anchor="t"/>
-          <a:lstStyle/>
-          <a:p>
-            <a:pPr indent="0" marL="0">
-              <a:lnSpc>
-                <a:spcPct val="130000"/>
-              </a:lnSpc>
-              <a:buNone/>
-            </a:pPr>
-            <a:r>
-              <a:rPr lang="en-US" sz="1400" dirty="0">
-                <a:solidFill>
-                  <a:srgbClr val="FFFFFF"/>
-                </a:solidFill>
-                <a:latin typeface="Meiryo" pitchFamily="34" charset="0"/>
-                <a:ea typeface="Meiryo" pitchFamily="34" charset="-122"/>
-                <a:cs typeface="Meiryo" pitchFamily="34" charset="-120"/>
-              </a:rPr>
-              <a:t>今回の上方修正は「改革が完了した証明」ではない。市場に対し、改革成果を数字として約束した瞬間である。ここから各部門が、45億円→55億円→65億円の継続利益を案件・KPI・実行速度で証明できるかが、企業価値を決める。</a:t>
-            </a:r>
-            <a:endParaRPr lang="en-US" sz="1400" dirty="0"/>
-          </a:p>
-        </p:txBody>
-      </p:sp>
-      <p:sp>
-        <p:nvSpPr>
           <p:cNvPr id="8" name="Text 6"/>
           <p:cNvSpPr/>
           <p:nvPr/>
         </p:nvSpPr>
         <p:spPr>
           <a:xfrm>
-            <a:off x="640080" y="6355080"/>
-            <a:ext cx="10972800" cy="320040"/>
+            <a:off x="822960" y="5349240"/>
+            <a:ext cx="10789920" cy="365760"/>
           </a:xfrm>
           <a:prstGeom prst="rect">
             <a:avLst/>
@@ -1779,17 +1755,56 @@
               <a:buNone/>
             </a:pPr>
             <a:r>
-              <a:rPr lang="en-US" sz="1050" dirty="0">
+              <a:rPr lang="en-US" sz="1300" b="1" dirty="0">
                 <a:solidFill>
-                  <a:srgbClr val="8FA3C8"/>
+                  <a:srgbClr val="262630"/>
                 </a:solidFill>
-                <a:latin typeface="Meiryo" pitchFamily="34" charset="0"/>
-                <a:ea typeface="Meiryo" pitchFamily="34" charset="-122"/>
-                <a:cs typeface="Meiryo" pitchFamily="34" charset="-120"/>
+                <a:latin typeface="Yu Gothic" pitchFamily="34" charset="0"/>
+                <a:ea typeface="Yu Gothic" pitchFamily="34" charset="-122"/>
+                <a:cs typeface="Yu Gothic" pitchFamily="34" charset="-120"/>
               </a:rPr>
-              <a:t>基礎資料：2027年3月期 第1四半期決算短信・決算説明資料・中期経営計画修正・決算説明会質疑</a:t>
-            </a:r>
-            <a:endParaRPr lang="en-US" sz="1050" dirty="0"/>
+              <a:t>ここから各部門が、45億円→55億円→65億円の継続利益を、案件・KPI・実行速度で証明できるかが企業価値を決めます</a:t>
+            </a:r>
+            <a:endParaRPr lang="en-US" sz="1300" dirty="0"/>
+          </a:p>
+        </p:txBody>
+      </p:sp>
+      <p:sp>
+        <p:nvSpPr>
+          <p:cNvPr id="9" name="Text 7"/>
+          <p:cNvSpPr/>
+          <p:nvPr/>
+        </p:nvSpPr>
+        <p:spPr>
+          <a:xfrm>
+            <a:off x="822960" y="5760720"/>
+            <a:ext cx="10789920" cy="365760"/>
+          </a:xfrm>
+          <a:prstGeom prst="rect">
+            <a:avLst/>
+          </a:prstGeom>
+          <a:noFill/>
+          <a:ln/>
+        </p:spPr>
+        <p:txBody>
+          <a:bodyPr wrap="square" lIns="0" tIns="0" rIns="0" bIns="0" rtlCol="0" anchor="ctr"/>
+          <a:lstStyle/>
+          <a:p>
+            <a:pPr indent="0" marL="0">
+              <a:buNone/>
+            </a:pPr>
+            <a:r>
+              <a:rPr lang="en-US" sz="1100" dirty="0">
+                <a:solidFill>
+                  <a:srgbClr val="5F5F6E"/>
+                </a:solidFill>
+                <a:latin typeface="Yu Gothic" pitchFamily="34" charset="0"/>
+                <a:ea typeface="Yu Gothic" pitchFamily="34" charset="-122"/>
+                <a:cs typeface="Yu Gothic" pitchFamily="34" charset="-120"/>
+              </a:rPr>
+              <a:t>基礎資料：2027年3月期 第1四半期決算短信・決算説明資料・中期経営計画修正・決算説明会質疑（2026年7月27日〜28日開示）</a:t>
+            </a:r>
+            <a:endParaRPr lang="en-US" sz="1100" dirty="0"/>
           </a:p>
         </p:txBody>
       </p:sp>
@@ -1833,8 +1848,8 @@
         </p:nvSpPr>
         <p:spPr>
           <a:xfrm>
-            <a:off x="457200" y="320040"/>
-            <a:ext cx="8686800" cy="548640"/>
+            <a:off x="502920" y="274320"/>
+            <a:ext cx="11155680" cy="292608"/>
           </a:xfrm>
           <a:prstGeom prst="rect">
             <a:avLst/>
@@ -1850,17 +1865,17 @@
               <a:buNone/>
             </a:pPr>
             <a:r>
-              <a:rPr lang="en-US" sz="2600" b="1" dirty="0">
+              <a:rPr lang="en-US" sz="1150" b="1" dirty="0">
                 <a:solidFill>
-                  <a:srgbClr val="1B2A4A"/>
+                  <a:srgbClr val="7823DC"/>
                 </a:solidFill>
-                <a:latin typeface="Meiryo" pitchFamily="34" charset="0"/>
-                <a:ea typeface="Meiryo" pitchFamily="34" charset="-122"/>
-                <a:cs typeface="Meiryo" pitchFamily="34" charset="-120"/>
+                <a:latin typeface="Yu Gothic" pitchFamily="34" charset="0"/>
+                <a:ea typeface="Yu Gothic" pitchFamily="34" charset="-122"/>
+                <a:cs typeface="Yu Gothic" pitchFamily="34" charset="-120"/>
               </a:rPr>
-              <a:t>1｜決算発表で確定したファクト</a:t>
-            </a:r>
-            <a:endParaRPr lang="en-US" sz="2600" dirty="0"/>
+              <a:t>ファクト｜2026年7月27日発表</a:t>
+            </a:r>
+            <a:endParaRPr lang="en-US" sz="1150" dirty="0"/>
           </a:p>
         </p:txBody>
       </p:sp>
@@ -1872,8 +1887,74 @@
         </p:nvSpPr>
         <p:spPr>
           <a:xfrm>
-            <a:off x="457200" y="868680"/>
-            <a:ext cx="10972800" cy="320040"/>
+            <a:off x="502920" y="566928"/>
+            <a:ext cx="11155680" cy="502920"/>
+          </a:xfrm>
+          <a:prstGeom prst="rect">
+            <a:avLst/>
+          </a:prstGeom>
+          <a:noFill/>
+          <a:ln/>
+        </p:spPr>
+        <p:txBody>
+          <a:bodyPr wrap="square" lIns="0" tIns="0" rIns="0" bIns="0" rtlCol="0" anchor="t"/>
+          <a:lstStyle/>
+          <a:p>
+            <a:pPr indent="0" marL="0">
+              <a:buNone/>
+            </a:pPr>
+            <a:r>
+              <a:rPr lang="en-US" sz="2200" b="1" dirty="0">
+                <a:solidFill>
+                  <a:srgbClr val="262630"/>
+                </a:solidFill>
+                <a:latin typeface="Yu Gothic" pitchFamily="34" charset="0"/>
+                <a:ea typeface="Yu Gothic" pitchFamily="34" charset="-122"/>
+                <a:cs typeface="Yu Gothic" pitchFamily="34" charset="-120"/>
+              </a:rPr>
+              <a:t>決算発表で確定した数字――経営判断の前提となる公式開示</a:t>
+            </a:r>
+            <a:endParaRPr lang="en-US" sz="2200" dirty="0"/>
+          </a:p>
+        </p:txBody>
+      </p:sp>
+      <p:sp>
+        <p:nvSpPr>
+          <p:cNvPr id="4" name="Shape 2"/>
+          <p:cNvSpPr/>
+          <p:nvPr/>
+        </p:nvSpPr>
+        <p:spPr>
+          <a:xfrm>
+            <a:off x="502920" y="1234440"/>
+            <a:ext cx="3685032" cy="1371600"/>
+          </a:xfrm>
+          <a:prstGeom prst="roundRect">
+            <a:avLst>
+              <a:gd name="adj" fmla="val 8000"/>
+            </a:avLst>
+          </a:prstGeom>
+          <a:solidFill>
+            <a:srgbClr val="F7F7F9"/>
+          </a:solidFill>
+          <a:ln w="12700">
+            <a:solidFill>
+              <a:srgbClr val="D9D9E0"/>
+            </a:solidFill>
+            <a:prstDash val="solid"/>
+          </a:ln>
+        </p:spPr>
+      </p:sp>
+      <p:sp>
+        <p:nvSpPr>
+          <p:cNvPr id="5" name="Text 3"/>
+          <p:cNvSpPr/>
+          <p:nvPr/>
+        </p:nvSpPr>
+        <p:spPr>
+          <a:xfrm>
+            <a:off x="731520" y="1353312"/>
+            <a:ext cx="3227832" cy="274320"/>
           </a:xfrm>
           <a:prstGeom prst="rect">
             <a:avLst/>
@@ -1889,52 +1970,30 @@
               <a:buNone/>
             </a:pPr>
             <a:r>
-              <a:rPr lang="en-US" sz="1250" dirty="0">
+              <a:rPr lang="en-US" sz="1150" b="1" dirty="0">
                 <a:solidFill>
-                  <a:srgbClr val="5A6472"/>
+                  <a:srgbClr val="5F5F6E"/>
                 </a:solidFill>
-                <a:latin typeface="Meiryo" pitchFamily="34" charset="0"/>
-                <a:ea typeface="Meiryo" pitchFamily="34" charset="-122"/>
-                <a:cs typeface="Meiryo" pitchFamily="34" charset="-120"/>
+                <a:latin typeface="Yu Gothic" pitchFamily="34" charset="0"/>
+                <a:ea typeface="Yu Gothic" pitchFamily="34" charset="-122"/>
+                <a:cs typeface="Yu Gothic" pitchFamily="34" charset="-120"/>
               </a:rPr>
-              <a:t>経営判断の前提となる公式開示数字（2026年7月27日発表）</a:t>
-            </a:r>
-            <a:endParaRPr lang="en-US" sz="1250" dirty="0"/>
+              <a:t>連結営業利益予想</a:t>
+            </a:r>
+            <a:endParaRPr lang="en-US" sz="1150" dirty="0"/>
           </a:p>
         </p:txBody>
       </p:sp>
       <p:sp>
         <p:nvSpPr>
-          <p:cNvPr id="4" name="Shape 2"/>
-          <p:cNvSpPr/>
-          <p:nvPr/>
-        </p:nvSpPr>
-        <p:spPr>
-          <a:xfrm>
-            <a:off x="457200" y="1325880"/>
-            <a:ext cx="3767328" cy="1481328"/>
-          </a:xfrm>
-          <a:prstGeom prst="roundRect">
-            <a:avLst>
-              <a:gd name="adj" fmla="val 3704"/>
-            </a:avLst>
-          </a:prstGeom>
-          <a:solidFill>
-            <a:srgbClr val="F2F4F8"/>
-          </a:solidFill>
-          <a:ln/>
-        </p:spPr>
-      </p:sp>
-      <p:sp>
-        <p:nvSpPr>
-          <p:cNvPr id="5" name="Text 3"/>
-          <p:cNvSpPr/>
-          <p:nvPr/>
-        </p:nvSpPr>
-        <p:spPr>
-          <a:xfrm>
-            <a:off x="685800" y="1463040"/>
-            <a:ext cx="3383280" cy="292608"/>
+          <p:cNvPr id="6" name="Text 4"/>
+          <p:cNvSpPr/>
+          <p:nvPr/>
+        </p:nvSpPr>
+        <p:spPr>
+          <a:xfrm>
+            <a:off x="731520" y="1627632"/>
+            <a:ext cx="3227832" cy="548640"/>
           </a:xfrm>
           <a:prstGeom prst="rect">
             <a:avLst/>
@@ -1950,30 +2009,44 @@
               <a:buNone/>
             </a:pPr>
             <a:r>
-              <a:rPr lang="en-US" sz="1200" b="1" dirty="0">
+              <a:rPr lang="en-US" sz="1500" b="1" dirty="0">
                 <a:solidFill>
-                  <a:srgbClr val="5A6472"/>
+                  <a:srgbClr val="5F5F6E"/>
                 </a:solidFill>
-                <a:latin typeface="Meiryo" pitchFamily="34" charset="0"/>
-                <a:ea typeface="Meiryo" pitchFamily="34" charset="-122"/>
-                <a:cs typeface="Meiryo" pitchFamily="34" charset="-120"/>
+                <a:latin typeface="Yu Gothic" pitchFamily="34" charset="0"/>
+                <a:ea typeface="Yu Gothic" pitchFamily="34" charset="-122"/>
+                <a:cs typeface="Yu Gothic" pitchFamily="34" charset="-120"/>
               </a:rPr>
-              <a:t>連結営業利益予想</a:t>
-            </a:r>
-            <a:endParaRPr lang="en-US" sz="1200" dirty="0"/>
+              <a:t>190億円 → </a:t>
+            </a:r>
+            <a:pPr indent="0" marL="0">
+              <a:buNone/>
+            </a:pPr>
+            <a:r>
+              <a:rPr lang="en-US" sz="2700" b="1" dirty="0">
+                <a:solidFill>
+                  <a:srgbClr val="7823DC"/>
+                </a:solidFill>
+                <a:latin typeface="Yu Gothic" pitchFamily="34" charset="0"/>
+                <a:ea typeface="Yu Gothic" pitchFamily="34" charset="-122"/>
+                <a:cs typeface="Yu Gothic" pitchFamily="34" charset="-120"/>
+              </a:rPr>
+              <a:t>225億円</a:t>
+            </a:r>
+            <a:endParaRPr lang="en-US" sz="1500" dirty="0"/>
           </a:p>
         </p:txBody>
       </p:sp>
       <p:sp>
         <p:nvSpPr>
-          <p:cNvPr id="6" name="Text 4"/>
-          <p:cNvSpPr/>
-          <p:nvPr/>
-        </p:nvSpPr>
-        <p:spPr>
-          <a:xfrm>
-            <a:off x="685800" y="1755648"/>
-            <a:ext cx="3383280" cy="566928"/>
+          <p:cNvPr id="7" name="Text 5"/>
+          <p:cNvSpPr/>
+          <p:nvPr/>
+        </p:nvSpPr>
+        <p:spPr>
+          <a:xfrm>
+            <a:off x="731520" y="2212848"/>
+            <a:ext cx="3227832" cy="292608"/>
           </a:xfrm>
           <a:prstGeom prst="rect">
             <a:avLst/>
@@ -1989,58 +2062,144 @@
               <a:buNone/>
             </a:pPr>
             <a:r>
-              <a:rPr lang="en-US" sz="1800" b="1" dirty="0">
+              <a:rPr lang="en-US" sz="950" dirty="0">
                 <a:solidFill>
-                  <a:srgbClr val="5A6472"/>
+                  <a:srgbClr val="5F5F6E"/>
                 </a:solidFill>
-                <a:latin typeface="Meiryo" pitchFamily="34" charset="0"/>
-                <a:ea typeface="Meiryo" pitchFamily="34" charset="-122"/>
-                <a:cs typeface="Meiryo" pitchFamily="34" charset="-120"/>
+                <a:latin typeface="Yu Gothic" pitchFamily="34" charset="0"/>
+                <a:ea typeface="Yu Gothic" pitchFamily="34" charset="-122"/>
+                <a:cs typeface="Yu Gothic" pitchFamily="34" charset="-120"/>
               </a:rPr>
-              <a:t>190億円 </a:t>
-            </a:r>
+              <a:t>＋35億円（アミューズ＋20／C&amp;D＋15）</a:t>
+            </a:r>
+            <a:endParaRPr lang="en-US" sz="950" dirty="0"/>
+          </a:p>
+        </p:txBody>
+      </p:sp>
+      <p:sp>
+        <p:nvSpPr>
+          <p:cNvPr id="8" name="Shape 6"/>
+          <p:cNvSpPr/>
+          <p:nvPr/>
+        </p:nvSpPr>
+        <p:spPr>
+          <a:xfrm>
+            <a:off x="4343400" y="1234440"/>
+            <a:ext cx="3685032" cy="1371600"/>
+          </a:xfrm>
+          <a:prstGeom prst="roundRect">
+            <a:avLst>
+              <a:gd name="adj" fmla="val 8000"/>
+            </a:avLst>
+          </a:prstGeom>
+          <a:solidFill>
+            <a:srgbClr val="7823DC"/>
+          </a:solidFill>
+          <a:ln/>
+        </p:spPr>
+      </p:sp>
+      <p:sp>
+        <p:nvSpPr>
+          <p:cNvPr id="9" name="Text 7"/>
+          <p:cNvSpPr/>
+          <p:nvPr/>
+        </p:nvSpPr>
+        <p:spPr>
+          <a:xfrm>
+            <a:off x="4572000" y="1353312"/>
+            <a:ext cx="3227832" cy="274320"/>
+          </a:xfrm>
+          <a:prstGeom prst="rect">
+            <a:avLst/>
+          </a:prstGeom>
+          <a:noFill/>
+          <a:ln/>
+        </p:spPr>
+        <p:txBody>
+          <a:bodyPr wrap="square" lIns="0" tIns="0" rIns="0" bIns="0" rtlCol="0" anchor="ctr"/>
+          <a:lstStyle/>
+          <a:p>
             <a:pPr indent="0" marL="0">
               <a:buNone/>
             </a:pPr>
             <a:r>
-              <a:rPr lang="en-US" sz="1800" b="1" dirty="0">
+              <a:rPr lang="en-US" sz="1150" b="1" dirty="0">
                 <a:solidFill>
-                  <a:srgbClr val="5A6472"/>
+                  <a:srgbClr val="FFFFFF"/>
                 </a:solidFill>
-                <a:latin typeface="Meiryo" pitchFamily="34" charset="0"/>
-                <a:ea typeface="Meiryo" pitchFamily="34" charset="-122"/>
-                <a:cs typeface="Meiryo" pitchFamily="34" charset="-120"/>
+                <a:latin typeface="Yu Gothic" pitchFamily="34" charset="0"/>
+                <a:ea typeface="Yu Gothic" pitchFamily="34" charset="-122"/>
+                <a:cs typeface="Yu Gothic" pitchFamily="34" charset="-120"/>
               </a:rPr>
-              <a:t>→ </a:t>
-            </a:r>
+              <a:t>C&amp;D営業利益予想</a:t>
+            </a:r>
+            <a:endParaRPr lang="en-US" sz="1150" dirty="0"/>
+          </a:p>
+        </p:txBody>
+      </p:sp>
+      <p:sp>
+        <p:nvSpPr>
+          <p:cNvPr id="10" name="Text 8"/>
+          <p:cNvSpPr/>
+          <p:nvPr/>
+        </p:nvSpPr>
+        <p:spPr>
+          <a:xfrm>
+            <a:off x="4572000" y="1627632"/>
+            <a:ext cx="3227832" cy="548640"/>
+          </a:xfrm>
+          <a:prstGeom prst="rect">
+            <a:avLst/>
+          </a:prstGeom>
+          <a:noFill/>
+          <a:ln/>
+        </p:spPr>
+        <p:txBody>
+          <a:bodyPr wrap="square" lIns="0" tIns="0" rIns="0" bIns="0" rtlCol="0" anchor="ctr"/>
+          <a:lstStyle/>
+          <a:p>
             <a:pPr indent="0" marL="0">
               <a:buNone/>
             </a:pPr>
             <a:r>
-              <a:rPr lang="en-US" sz="3000" b="1" dirty="0">
+              <a:rPr lang="en-US" sz="1500" b="1" dirty="0">
                 <a:solidFill>
-                  <a:srgbClr val="C8102E"/>
+                  <a:srgbClr val="D9C6F5"/>
                 </a:solidFill>
-                <a:latin typeface="Meiryo" pitchFamily="34" charset="0"/>
-                <a:ea typeface="Meiryo" pitchFamily="34" charset="-122"/>
-                <a:cs typeface="Meiryo" pitchFamily="34" charset="-120"/>
+                <a:latin typeface="Yu Gothic" pitchFamily="34" charset="0"/>
+                <a:ea typeface="Yu Gothic" pitchFamily="34" charset="-122"/>
+                <a:cs typeface="Yu Gothic" pitchFamily="34" charset="-120"/>
               </a:rPr>
-              <a:t>225億円</a:t>
-            </a:r>
-            <a:endParaRPr lang="en-US" sz="1800" dirty="0"/>
+              <a:t>30億円 → </a:t>
+            </a:r>
+            <a:pPr indent="0" marL="0">
+              <a:buNone/>
+            </a:pPr>
+            <a:r>
+              <a:rPr lang="en-US" sz="2700" b="1" dirty="0">
+                <a:solidFill>
+                  <a:srgbClr val="FFFFFF"/>
+                </a:solidFill>
+                <a:latin typeface="Yu Gothic" pitchFamily="34" charset="0"/>
+                <a:ea typeface="Yu Gothic" pitchFamily="34" charset="-122"/>
+                <a:cs typeface="Yu Gothic" pitchFamily="34" charset="-120"/>
+              </a:rPr>
+              <a:t>45億円</a:t>
+            </a:r>
+            <a:endParaRPr lang="en-US" sz="1500" dirty="0"/>
           </a:p>
         </p:txBody>
       </p:sp>
       <p:sp>
         <p:nvSpPr>
-          <p:cNvPr id="7" name="Text 5"/>
-          <p:cNvSpPr/>
-          <p:nvPr/>
-        </p:nvSpPr>
-        <p:spPr>
-          <a:xfrm>
-            <a:off x="685800" y="2377440"/>
-            <a:ext cx="3383280" cy="365760"/>
+          <p:cNvPr id="11" name="Text 9"/>
+          <p:cNvSpPr/>
+          <p:nvPr/>
+        </p:nvSpPr>
+        <p:spPr>
+          <a:xfrm>
+            <a:off x="4572000" y="2212848"/>
+            <a:ext cx="3227832" cy="292608"/>
           </a:xfrm>
           <a:prstGeom prst="rect">
             <a:avLst/>
@@ -2056,52 +2215,57 @@
               <a:buNone/>
             </a:pPr>
             <a:r>
-              <a:rPr lang="en-US" sz="1050" dirty="0">
+              <a:rPr lang="en-US" sz="950" dirty="0">
                 <a:solidFill>
-                  <a:srgbClr val="5A6472"/>
+                  <a:srgbClr val="EDE3FB"/>
                 </a:solidFill>
-                <a:latin typeface="Meiryo" pitchFamily="34" charset="0"/>
-                <a:ea typeface="Meiryo" pitchFamily="34" charset="-122"/>
-                <a:cs typeface="Meiryo" pitchFamily="34" charset="-120"/>
+                <a:latin typeface="Yu Gothic" pitchFamily="34" charset="0"/>
+                <a:ea typeface="Yu Gothic" pitchFamily="34" charset="-122"/>
+                <a:cs typeface="Yu Gothic" pitchFamily="34" charset="-120"/>
               </a:rPr>
-              <a:t>＋35億円（アミューズ＋20／C&amp;D＋15）</a:t>
-            </a:r>
-            <a:endParaRPr lang="en-US" sz="1050" dirty="0"/>
+              <a:t>＋50%上方修正・FY2029目標65億円へ</a:t>
+            </a:r>
+            <a:endParaRPr lang="en-US" sz="950" dirty="0"/>
           </a:p>
         </p:txBody>
       </p:sp>
       <p:sp>
         <p:nvSpPr>
-          <p:cNvPr id="8" name="Shape 6"/>
-          <p:cNvSpPr/>
-          <p:nvPr/>
-        </p:nvSpPr>
-        <p:spPr>
-          <a:xfrm>
-            <a:off x="4370832" y="1325880"/>
-            <a:ext cx="3767328" cy="1481328"/>
+          <p:cNvPr id="12" name="Shape 10"/>
+          <p:cNvSpPr/>
+          <p:nvPr/>
+        </p:nvSpPr>
+        <p:spPr>
+          <a:xfrm>
+            <a:off x="8183880" y="1234440"/>
+            <a:ext cx="3685032" cy="1371600"/>
           </a:xfrm>
           <a:prstGeom prst="roundRect">
             <a:avLst>
-              <a:gd name="adj" fmla="val 3704"/>
+              <a:gd name="adj" fmla="val 8000"/>
             </a:avLst>
           </a:prstGeom>
           <a:solidFill>
-            <a:srgbClr val="F2F4F8"/>
+            <a:srgbClr val="F7F7F9"/>
           </a:solidFill>
-          <a:ln/>
-        </p:spPr>
-      </p:sp>
-      <p:sp>
-        <p:nvSpPr>
-          <p:cNvPr id="9" name="Text 7"/>
-          <p:cNvSpPr/>
-          <p:nvPr/>
-        </p:nvSpPr>
-        <p:spPr>
-          <a:xfrm>
-            <a:off x="4599432" y="1463040"/>
-            <a:ext cx="3383280" cy="292608"/>
+          <a:ln w="12700">
+            <a:solidFill>
+              <a:srgbClr val="D9D9E0"/>
+            </a:solidFill>
+            <a:prstDash val="solid"/>
+          </a:ln>
+        </p:spPr>
+      </p:sp>
+      <p:sp>
+        <p:nvSpPr>
+          <p:cNvPr id="13" name="Text 11"/>
+          <p:cNvSpPr/>
+          <p:nvPr/>
+        </p:nvSpPr>
+        <p:spPr>
+          <a:xfrm>
+            <a:off x="8412480" y="1353312"/>
+            <a:ext cx="3227832" cy="274320"/>
           </a:xfrm>
           <a:prstGeom prst="rect">
             <a:avLst/>
@@ -2117,30 +2281,30 @@
               <a:buNone/>
             </a:pPr>
             <a:r>
-              <a:rPr lang="en-US" sz="1200" b="1" dirty="0">
+              <a:rPr lang="en-US" sz="1150" b="1" dirty="0">
                 <a:solidFill>
-                  <a:srgbClr val="5A6472"/>
+                  <a:srgbClr val="5F5F6E"/>
                 </a:solidFill>
-                <a:latin typeface="Meiryo" pitchFamily="34" charset="0"/>
-                <a:ea typeface="Meiryo" pitchFamily="34" charset="-122"/>
-                <a:cs typeface="Meiryo" pitchFamily="34" charset="-120"/>
+                <a:latin typeface="Yu Gothic" pitchFamily="34" charset="0"/>
+                <a:ea typeface="Yu Gothic" pitchFamily="34" charset="-122"/>
+                <a:cs typeface="Yu Gothic" pitchFamily="34" charset="-120"/>
               </a:rPr>
-              <a:t>C&amp;D営業利益予想</a:t>
-            </a:r>
-            <a:endParaRPr lang="en-US" sz="1200" dirty="0"/>
+              <a:t>年間配当予想</a:t>
+            </a:r>
+            <a:endParaRPr lang="en-US" sz="1150" dirty="0"/>
           </a:p>
         </p:txBody>
       </p:sp>
       <p:sp>
         <p:nvSpPr>
-          <p:cNvPr id="10" name="Text 8"/>
-          <p:cNvSpPr/>
-          <p:nvPr/>
-        </p:nvSpPr>
-        <p:spPr>
-          <a:xfrm>
-            <a:off x="4599432" y="1755648"/>
-            <a:ext cx="3383280" cy="566928"/>
+          <p:cNvPr id="14" name="Text 12"/>
+          <p:cNvSpPr/>
+          <p:nvPr/>
+        </p:nvSpPr>
+        <p:spPr>
+          <a:xfrm>
+            <a:off x="8412480" y="1627632"/>
+            <a:ext cx="3227832" cy="548640"/>
           </a:xfrm>
           <a:prstGeom prst="rect">
             <a:avLst/>
@@ -2156,58 +2320,83 @@
               <a:buNone/>
             </a:pPr>
             <a:r>
-              <a:rPr lang="en-US" sz="1800" b="1" dirty="0">
+              <a:rPr lang="en-US" sz="1500" b="1" dirty="0">
                 <a:solidFill>
-                  <a:srgbClr val="5A6472"/>
+                  <a:srgbClr val="5F5F6E"/>
                 </a:solidFill>
-                <a:latin typeface="Meiryo" pitchFamily="34" charset="0"/>
-                <a:ea typeface="Meiryo" pitchFamily="34" charset="-122"/>
-                <a:cs typeface="Meiryo" pitchFamily="34" charset="-120"/>
+                <a:latin typeface="Yu Gothic" pitchFamily="34" charset="0"/>
+                <a:ea typeface="Yu Gothic" pitchFamily="34" charset="-122"/>
+                <a:cs typeface="Yu Gothic" pitchFamily="34" charset="-120"/>
               </a:rPr>
-              <a:t>30億円 </a:t>
+              <a:t>70円 → </a:t>
             </a:r>
             <a:pPr indent="0" marL="0">
               <a:buNone/>
             </a:pPr>
             <a:r>
-              <a:rPr lang="en-US" sz="1800" b="1" dirty="0">
+              <a:rPr lang="en-US" sz="2700" b="1" dirty="0">
                 <a:solidFill>
-                  <a:srgbClr val="5A6472"/>
+                  <a:srgbClr val="7823DC"/>
                 </a:solidFill>
-                <a:latin typeface="Meiryo" pitchFamily="34" charset="0"/>
-                <a:ea typeface="Meiryo" pitchFamily="34" charset="-122"/>
-                <a:cs typeface="Meiryo" pitchFamily="34" charset="-120"/>
+                <a:latin typeface="Yu Gothic" pitchFamily="34" charset="0"/>
+                <a:ea typeface="Yu Gothic" pitchFamily="34" charset="-122"/>
+                <a:cs typeface="Yu Gothic" pitchFamily="34" charset="-120"/>
               </a:rPr>
-              <a:t>→ </a:t>
-            </a:r>
+              <a:t>140円</a:t>
+            </a:r>
+            <a:endParaRPr lang="en-US" sz="1500" dirty="0"/>
+          </a:p>
+        </p:txBody>
+      </p:sp>
+      <p:sp>
+        <p:nvSpPr>
+          <p:cNvPr id="15" name="Text 13"/>
+          <p:cNvSpPr/>
+          <p:nvPr/>
+        </p:nvSpPr>
+        <p:spPr>
+          <a:xfrm>
+            <a:off x="8412480" y="2212848"/>
+            <a:ext cx="3227832" cy="292608"/>
+          </a:xfrm>
+          <a:prstGeom prst="rect">
+            <a:avLst/>
+          </a:prstGeom>
+          <a:noFill/>
+          <a:ln/>
+        </p:spPr>
+        <p:txBody>
+          <a:bodyPr wrap="square" lIns="0" tIns="0" rIns="0" bIns="0" rtlCol="0" anchor="ctr"/>
+          <a:lstStyle/>
+          <a:p>
             <a:pPr indent="0" marL="0">
               <a:buNone/>
             </a:pPr>
             <a:r>
-              <a:rPr lang="en-US" sz="3000" b="1" dirty="0">
+              <a:rPr lang="en-US" sz="950" dirty="0">
                 <a:solidFill>
-                  <a:srgbClr val="C8102E"/>
+                  <a:srgbClr val="5F5F6E"/>
                 </a:solidFill>
-                <a:latin typeface="Meiryo" pitchFamily="34" charset="0"/>
-                <a:ea typeface="Meiryo" pitchFamily="34" charset="-122"/>
-                <a:cs typeface="Meiryo" pitchFamily="34" charset="-120"/>
+                <a:latin typeface="Yu Gothic" pitchFamily="34" charset="0"/>
+                <a:ea typeface="Yu Gothic" pitchFamily="34" charset="-122"/>
+                <a:cs typeface="Yu Gothic" pitchFamily="34" charset="-120"/>
               </a:rPr>
-              <a:t>45億円</a:t>
-            </a:r>
-            <a:endParaRPr lang="en-US" sz="1800" dirty="0"/>
+              <a:t>倍増・来期以降も中間配当を継続予定</a:t>
+            </a:r>
+            <a:endParaRPr lang="en-US" sz="950" dirty="0"/>
           </a:p>
         </p:txBody>
       </p:sp>
       <p:sp>
         <p:nvSpPr>
-          <p:cNvPr id="11" name="Text 9"/>
-          <p:cNvSpPr/>
-          <p:nvPr/>
-        </p:nvSpPr>
-        <p:spPr>
-          <a:xfrm>
-            <a:off x="4599432" y="2377440"/>
-            <a:ext cx="3383280" cy="365760"/>
+          <p:cNvPr id="16" name="Text 14"/>
+          <p:cNvSpPr/>
+          <p:nvPr/>
+        </p:nvSpPr>
+        <p:spPr>
+          <a:xfrm>
+            <a:off x="502920" y="2834640"/>
+            <a:ext cx="5760720" cy="292608"/>
           </a:xfrm>
           <a:prstGeom prst="rect">
             <a:avLst/>
@@ -2223,52 +2412,57 @@
               <a:buNone/>
             </a:pPr>
             <a:r>
-              <a:rPr lang="en-US" sz="1050" dirty="0">
+              <a:rPr lang="en-US" sz="1300" b="1" dirty="0">
                 <a:solidFill>
-                  <a:srgbClr val="5A6472"/>
+                  <a:srgbClr val="262630"/>
                 </a:solidFill>
-                <a:latin typeface="Meiryo" pitchFamily="34" charset="0"/>
-                <a:ea typeface="Meiryo" pitchFamily="34" charset="-122"/>
-                <a:cs typeface="Meiryo" pitchFamily="34" charset="-120"/>
+                <a:latin typeface="Yu Gothic" pitchFamily="34" charset="0"/>
+                <a:ea typeface="Yu Gothic" pitchFamily="34" charset="-122"/>
+                <a:cs typeface="Yu Gothic" pitchFamily="34" charset="-120"/>
               </a:rPr>
-              <a:t>＋50%上方修正・FY2029目標65億円へ</a:t>
-            </a:r>
-            <a:endParaRPr lang="en-US" sz="1050" dirty="0"/>
+              <a:t>上方修正理由として公式に示された項目</a:t>
+            </a:r>
+            <a:endParaRPr lang="en-US" sz="1300" dirty="0"/>
           </a:p>
         </p:txBody>
       </p:sp>
       <p:sp>
         <p:nvSpPr>
-          <p:cNvPr id="12" name="Shape 10"/>
-          <p:cNvSpPr/>
-          <p:nvPr/>
-        </p:nvSpPr>
-        <p:spPr>
-          <a:xfrm>
-            <a:off x="8284464" y="1325880"/>
-            <a:ext cx="3767328" cy="1481328"/>
+          <p:cNvPr id="17" name="Shape 15"/>
+          <p:cNvSpPr/>
+          <p:nvPr/>
+        </p:nvSpPr>
+        <p:spPr>
+          <a:xfrm>
+            <a:off x="502920" y="3154680"/>
+            <a:ext cx="5760720" cy="932688"/>
           </a:xfrm>
           <a:prstGeom prst="roundRect">
             <a:avLst>
-              <a:gd name="adj" fmla="val 3704"/>
+              <a:gd name="adj" fmla="val 7843"/>
             </a:avLst>
           </a:prstGeom>
           <a:solidFill>
-            <a:srgbClr val="F2F4F8"/>
+            <a:srgbClr val="F7F7F9"/>
           </a:solidFill>
-          <a:ln/>
-        </p:spPr>
-      </p:sp>
-      <p:sp>
-        <p:nvSpPr>
-          <p:cNvPr id="13" name="Text 11"/>
-          <p:cNvSpPr/>
-          <p:nvPr/>
-        </p:nvSpPr>
-        <p:spPr>
-          <a:xfrm>
-            <a:off x="8513064" y="1463040"/>
-            <a:ext cx="3383280" cy="292608"/>
+          <a:ln w="12700">
+            <a:solidFill>
+              <a:srgbClr val="D9D9E0"/>
+            </a:solidFill>
+            <a:prstDash val="solid"/>
+          </a:ln>
+        </p:spPr>
+      </p:sp>
+      <p:sp>
+        <p:nvSpPr>
+          <p:cNvPr id="18" name="Text 16"/>
+          <p:cNvSpPr/>
+          <p:nvPr/>
+        </p:nvSpPr>
+        <p:spPr>
+          <a:xfrm>
+            <a:off x="731520" y="3218688"/>
+            <a:ext cx="5349240" cy="420624"/>
           </a:xfrm>
           <a:prstGeom prst="rect">
             <a:avLst/>
@@ -2281,33 +2475,53 @@
           <a:lstStyle/>
           <a:p>
             <a:pPr indent="0" marL="0">
+              <a:lnSpc>
+                <a:spcPct val="112000"/>
+              </a:lnSpc>
               <a:buNone/>
             </a:pPr>
             <a:r>
-              <a:rPr lang="en-US" sz="1200" b="1" dirty="0">
+              <a:rPr lang="en-US" sz="1050" b="1" dirty="0">
                 <a:solidFill>
-                  <a:srgbClr val="5A6472"/>
+                  <a:srgbClr val="3A106E"/>
                 </a:solidFill>
-                <a:latin typeface="Meiryo" pitchFamily="34" charset="0"/>
-                <a:ea typeface="Meiryo" pitchFamily="34" charset="-122"/>
-                <a:cs typeface="Meiryo" pitchFamily="34" charset="-120"/>
+                <a:latin typeface="Yu Gothic" pitchFamily="34" charset="0"/>
+                <a:ea typeface="Yu Gothic" pitchFamily="34" charset="-122"/>
+                <a:cs typeface="Yu Gothic" pitchFamily="34" charset="-120"/>
               </a:rPr>
-              <a:t>年間配当予想</a:t>
-            </a:r>
-            <a:endParaRPr lang="en-US" sz="1200" dirty="0"/>
+              <a:t>C&amp;D：</a:t>
+            </a:r>
+            <a:pPr indent="0" marL="0">
+              <a:lnSpc>
+                <a:spcPct val="112000"/>
+              </a:lnSpc>
+              <a:buNone/>
+            </a:pPr>
+            <a:r>
+              <a:rPr lang="en-US" sz="1050" dirty="0">
+                <a:solidFill>
+                  <a:srgbClr val="262630"/>
+                </a:solidFill>
+                <a:latin typeface="Yu Gothic" pitchFamily="34" charset="0"/>
+                <a:ea typeface="Yu Gothic" pitchFamily="34" charset="-122"/>
+                <a:cs typeface="Yu Gothic" pitchFamily="34" charset="-120"/>
+              </a:rPr>
+              <a:t>国内MD好調／ライセンス好調／広告収入が想定以上／中国市場の回復基調</a:t>
+            </a:r>
+            <a:endParaRPr lang="en-US" sz="1050" dirty="0"/>
           </a:p>
         </p:txBody>
       </p:sp>
       <p:sp>
         <p:nvSpPr>
-          <p:cNvPr id="14" name="Text 12"/>
-          <p:cNvSpPr/>
-          <p:nvPr/>
-        </p:nvSpPr>
-        <p:spPr>
-          <a:xfrm>
-            <a:off x="8513064" y="1755648"/>
-            <a:ext cx="3383280" cy="566928"/>
+          <p:cNvPr id="19" name="Text 17"/>
+          <p:cNvSpPr/>
+          <p:nvPr/>
+        </p:nvSpPr>
+        <p:spPr>
+          <a:xfrm>
+            <a:off x="731520" y="3639312"/>
+            <a:ext cx="5349240" cy="420624"/>
           </a:xfrm>
           <a:prstGeom prst="rect">
             <a:avLst/>
@@ -2320,305 +2534,79 @@
           <a:lstStyle/>
           <a:p>
             <a:pPr indent="0" marL="0">
+              <a:lnSpc>
+                <a:spcPct val="112000"/>
+              </a:lnSpc>
               <a:buNone/>
             </a:pPr>
             <a:r>
-              <a:rPr lang="en-US" sz="1800" b="1" dirty="0">
+              <a:rPr lang="en-US" sz="1050" b="1" dirty="0">
                 <a:solidFill>
-                  <a:srgbClr val="5A6472"/>
+                  <a:srgbClr val="3A106E"/>
                 </a:solidFill>
-                <a:latin typeface="Meiryo" pitchFamily="34" charset="0"/>
-                <a:ea typeface="Meiryo" pitchFamily="34" charset="-122"/>
-                <a:cs typeface="Meiryo" pitchFamily="34" charset="-120"/>
+                <a:latin typeface="Yu Gothic" pitchFamily="34" charset="0"/>
+                <a:ea typeface="Yu Gothic" pitchFamily="34" charset="-122"/>
+                <a:cs typeface="Yu Gothic" pitchFamily="34" charset="-120"/>
               </a:rPr>
-              <a:t>70円 </a:t>
-            </a:r>
+              <a:t>アミューズメント：</a:t>
+            </a:r>
+            <a:pPr indent="0" marL="0">
+              <a:lnSpc>
+                <a:spcPct val="112000"/>
+              </a:lnSpc>
+              <a:buNone/>
+            </a:pPr>
+            <a:r>
+              <a:rPr lang="en-US" sz="1050" dirty="0">
+                <a:solidFill>
+                  <a:srgbClr val="262630"/>
+                </a:solidFill>
+                <a:latin typeface="Yu Gothic" pitchFamily="34" charset="0"/>
+                <a:ea typeface="Yu Gothic" pitchFamily="34" charset="-122"/>
+                <a:cs typeface="Yu Gothic" pitchFamily="34" charset="-120"/>
+              </a:rPr>
+              <a:t>2Q累計納品予定商品が完売／3Q主力機種の受注が極めて好調</a:t>
+            </a:r>
+            <a:endParaRPr lang="en-US" sz="1050" dirty="0"/>
+          </a:p>
+        </p:txBody>
+      </p:sp>
+      <p:sp>
+        <p:nvSpPr>
+          <p:cNvPr id="20" name="Text 18"/>
+          <p:cNvSpPr/>
+          <p:nvPr/>
+        </p:nvSpPr>
+        <p:spPr>
+          <a:xfrm>
+            <a:off x="502920" y="4224528"/>
+            <a:ext cx="5760720" cy="292608"/>
+          </a:xfrm>
+          <a:prstGeom prst="rect">
+            <a:avLst/>
+          </a:prstGeom>
+          <a:noFill/>
+          <a:ln/>
+        </p:spPr>
+        <p:txBody>
+          <a:bodyPr wrap="square" lIns="0" tIns="0" rIns="0" bIns="0" rtlCol="0" anchor="ctr"/>
+          <a:lstStyle/>
+          <a:p>
             <a:pPr indent="0" marL="0">
               <a:buNone/>
             </a:pPr>
             <a:r>
-              <a:rPr lang="en-US" sz="1800" b="1" dirty="0">
+              <a:rPr lang="en-US" sz="1300" b="1" dirty="0">
                 <a:solidFill>
-                  <a:srgbClr val="5A6472"/>
+                  <a:srgbClr val="262630"/>
                 </a:solidFill>
-                <a:latin typeface="Meiryo" pitchFamily="34" charset="0"/>
-                <a:ea typeface="Meiryo" pitchFamily="34" charset="-122"/>
-                <a:cs typeface="Meiryo" pitchFamily="34" charset="-120"/>
+                <a:latin typeface="Yu Gothic" pitchFamily="34" charset="0"/>
+                <a:ea typeface="Yu Gothic" pitchFamily="34" charset="-122"/>
+                <a:cs typeface="Yu Gothic" pitchFamily="34" charset="-120"/>
               </a:rPr>
-              <a:t>→ </a:t>
-            </a:r>
-            <a:pPr indent="0" marL="0">
-              <a:buNone/>
-            </a:pPr>
-            <a:r>
-              <a:rPr lang="en-US" sz="3000" b="1" dirty="0">
-                <a:solidFill>
-                  <a:srgbClr val="C8102E"/>
-                </a:solidFill>
-                <a:latin typeface="Meiryo" pitchFamily="34" charset="0"/>
-                <a:ea typeface="Meiryo" pitchFamily="34" charset="-122"/>
-                <a:cs typeface="Meiryo" pitchFamily="34" charset="-120"/>
-              </a:rPr>
-              <a:t>140円</a:t>
-            </a:r>
-            <a:endParaRPr lang="en-US" sz="1800" dirty="0"/>
-          </a:p>
-        </p:txBody>
-      </p:sp>
-      <p:sp>
-        <p:nvSpPr>
-          <p:cNvPr id="15" name="Text 13"/>
-          <p:cNvSpPr/>
-          <p:nvPr/>
-        </p:nvSpPr>
-        <p:spPr>
-          <a:xfrm>
-            <a:off x="8513064" y="2377440"/>
-            <a:ext cx="3383280" cy="365760"/>
-          </a:xfrm>
-          <a:prstGeom prst="rect">
-            <a:avLst/>
-          </a:prstGeom>
-          <a:noFill/>
-          <a:ln/>
-        </p:spPr>
-        <p:txBody>
-          <a:bodyPr wrap="square" lIns="0" tIns="0" rIns="0" bIns="0" rtlCol="0" anchor="ctr"/>
-          <a:lstStyle/>
-          <a:p>
-            <a:pPr indent="0" marL="0">
-              <a:buNone/>
-            </a:pPr>
-            <a:r>
-              <a:rPr lang="en-US" sz="1050" dirty="0">
-                <a:solidFill>
-                  <a:srgbClr val="5A6472"/>
-                </a:solidFill>
-                <a:latin typeface="Meiryo" pitchFamily="34" charset="0"/>
-                <a:ea typeface="Meiryo" pitchFamily="34" charset="-122"/>
-                <a:cs typeface="Meiryo" pitchFamily="34" charset="-120"/>
-              </a:rPr>
-              <a:t>倍増・来期以降も中間配当を継続予定</a:t>
-            </a:r>
-            <a:endParaRPr lang="en-US" sz="1050" dirty="0"/>
-          </a:p>
-        </p:txBody>
-      </p:sp>
-      <p:sp>
-        <p:nvSpPr>
-          <p:cNvPr id="16" name="Text 14"/>
-          <p:cNvSpPr/>
-          <p:nvPr/>
-        </p:nvSpPr>
-        <p:spPr>
-          <a:xfrm>
-            <a:off x="457200" y="3063240"/>
-            <a:ext cx="5760720" cy="320040"/>
-          </a:xfrm>
-          <a:prstGeom prst="rect">
-            <a:avLst/>
-          </a:prstGeom>
-          <a:noFill/>
-          <a:ln/>
-        </p:spPr>
-        <p:txBody>
-          <a:bodyPr wrap="square" lIns="0" tIns="0" rIns="0" bIns="0" rtlCol="0" anchor="ctr"/>
-          <a:lstStyle/>
-          <a:p>
-            <a:pPr indent="0" marL="0">
-              <a:buNone/>
-            </a:pPr>
-            <a:r>
-              <a:rPr lang="en-US" sz="1400" b="1" dirty="0">
-                <a:solidFill>
-                  <a:srgbClr val="1B2A4A"/>
-                </a:solidFill>
-                <a:latin typeface="Meiryo" pitchFamily="34" charset="0"/>
-                <a:ea typeface="Meiryo" pitchFamily="34" charset="-122"/>
-                <a:cs typeface="Meiryo" pitchFamily="34" charset="-120"/>
-              </a:rPr>
-              <a:t>上方修正理由として公式に示された項目</a:t>
-            </a:r>
-            <a:endParaRPr lang="en-US" sz="1400" dirty="0"/>
-          </a:p>
-        </p:txBody>
-      </p:sp>
-      <p:sp>
-        <p:nvSpPr>
-          <p:cNvPr id="17" name="Shape 15"/>
-          <p:cNvSpPr/>
-          <p:nvPr/>
-        </p:nvSpPr>
-        <p:spPr>
-          <a:xfrm>
-            <a:off x="457200" y="3429000"/>
-            <a:ext cx="5760720" cy="1143000"/>
-          </a:xfrm>
-          <a:prstGeom prst="roundRect">
-            <a:avLst>
-              <a:gd name="adj" fmla="val 4800"/>
-            </a:avLst>
-          </a:prstGeom>
-          <a:solidFill>
-            <a:srgbClr val="F2F4F8"/>
-          </a:solidFill>
-          <a:ln/>
-        </p:spPr>
-      </p:sp>
-      <p:sp>
-        <p:nvSpPr>
-          <p:cNvPr id="18" name="Text 16"/>
-          <p:cNvSpPr/>
-          <p:nvPr/>
-        </p:nvSpPr>
-        <p:spPr>
-          <a:xfrm>
-            <a:off x="685800" y="3520440"/>
-            <a:ext cx="5349240" cy="502920"/>
-          </a:xfrm>
-          <a:prstGeom prst="rect">
-            <a:avLst/>
-          </a:prstGeom>
-          <a:noFill/>
-          <a:ln/>
-        </p:spPr>
-        <p:txBody>
-          <a:bodyPr wrap="square" lIns="0" tIns="0" rIns="0" bIns="0" rtlCol="0" anchor="ctr"/>
-          <a:lstStyle/>
-          <a:p>
-            <a:pPr indent="0" marL="0">
-              <a:lnSpc>
-                <a:spcPct val="120000"/>
-              </a:lnSpc>
-              <a:buNone/>
-            </a:pPr>
-            <a:r>
-              <a:rPr lang="en-US" sz="1200" b="1" dirty="0">
-                <a:solidFill>
-                  <a:srgbClr val="1B2A4A"/>
-                </a:solidFill>
-                <a:latin typeface="Meiryo" pitchFamily="34" charset="0"/>
-                <a:ea typeface="Meiryo" pitchFamily="34" charset="-122"/>
-                <a:cs typeface="Meiryo" pitchFamily="34" charset="-120"/>
-              </a:rPr>
-              <a:t>C&amp;D：</a:t>
-            </a:r>
-            <a:pPr indent="0" marL="0">
-              <a:lnSpc>
-                <a:spcPct val="120000"/>
-              </a:lnSpc>
-              <a:buNone/>
-            </a:pPr>
-            <a:r>
-              <a:rPr lang="en-US" sz="1200" dirty="0">
-                <a:solidFill>
-                  <a:srgbClr val="1A1A1A"/>
-                </a:solidFill>
-                <a:latin typeface="Meiryo" pitchFamily="34" charset="0"/>
-                <a:ea typeface="Meiryo" pitchFamily="34" charset="-122"/>
-                <a:cs typeface="Meiryo" pitchFamily="34" charset="-120"/>
-              </a:rPr>
-              <a:t>国内MD好調／ライセンス好調／広告収入が想定以上／中国市場の回復基調</a:t>
-            </a:r>
-            <a:endParaRPr lang="en-US" sz="1200" dirty="0"/>
-          </a:p>
-        </p:txBody>
-      </p:sp>
-      <p:sp>
-        <p:nvSpPr>
-          <p:cNvPr id="19" name="Text 17"/>
-          <p:cNvSpPr/>
-          <p:nvPr/>
-        </p:nvSpPr>
-        <p:spPr>
-          <a:xfrm>
-            <a:off x="685800" y="4041648"/>
-            <a:ext cx="5349240" cy="502920"/>
-          </a:xfrm>
-          <a:prstGeom prst="rect">
-            <a:avLst/>
-          </a:prstGeom>
-          <a:noFill/>
-          <a:ln/>
-        </p:spPr>
-        <p:txBody>
-          <a:bodyPr wrap="square" lIns="0" tIns="0" rIns="0" bIns="0" rtlCol="0" anchor="ctr"/>
-          <a:lstStyle/>
-          <a:p>
-            <a:pPr indent="0" marL="0">
-              <a:lnSpc>
-                <a:spcPct val="120000"/>
-              </a:lnSpc>
-              <a:buNone/>
-            </a:pPr>
-            <a:r>
-              <a:rPr lang="en-US" sz="1200" b="1" dirty="0">
-                <a:solidFill>
-                  <a:srgbClr val="1B2A4A"/>
-                </a:solidFill>
-                <a:latin typeface="Meiryo" pitchFamily="34" charset="0"/>
-                <a:ea typeface="Meiryo" pitchFamily="34" charset="-122"/>
-                <a:cs typeface="Meiryo" pitchFamily="34" charset="-120"/>
-              </a:rPr>
-              <a:t>アミューズメント：</a:t>
-            </a:r>
-            <a:pPr indent="0" marL="0">
-              <a:lnSpc>
-                <a:spcPct val="120000"/>
-              </a:lnSpc>
-              <a:buNone/>
-            </a:pPr>
-            <a:r>
-              <a:rPr lang="en-US" sz="1200" dirty="0">
-                <a:solidFill>
-                  <a:srgbClr val="1A1A1A"/>
-                </a:solidFill>
-                <a:latin typeface="Meiryo" pitchFamily="34" charset="0"/>
-                <a:ea typeface="Meiryo" pitchFamily="34" charset="-122"/>
-                <a:cs typeface="Meiryo" pitchFamily="34" charset="-120"/>
-              </a:rPr>
-              <a:t>2Q累計納品予定商品が完売／3Q主力機種の受注が極めて好調</a:t>
-            </a:r>
-            <a:endParaRPr lang="en-US" sz="1200" dirty="0"/>
-          </a:p>
-        </p:txBody>
-      </p:sp>
-      <p:sp>
-        <p:nvSpPr>
-          <p:cNvPr id="20" name="Text 18"/>
-          <p:cNvSpPr/>
-          <p:nvPr/>
-        </p:nvSpPr>
-        <p:spPr>
-          <a:xfrm>
-            <a:off x="457200" y="4754880"/>
-            <a:ext cx="5760720" cy="320040"/>
-          </a:xfrm>
-          <a:prstGeom prst="rect">
-            <a:avLst/>
-          </a:prstGeom>
-          <a:noFill/>
-          <a:ln/>
-        </p:spPr>
-        <p:txBody>
-          <a:bodyPr wrap="square" lIns="0" tIns="0" rIns="0" bIns="0" rtlCol="0" anchor="ctr"/>
-          <a:lstStyle/>
-          <a:p>
-            <a:pPr indent="0" marL="0">
-              <a:buNone/>
-            </a:pPr>
-            <a:r>
-              <a:rPr lang="en-US" sz="1400" b="1" dirty="0">
-                <a:solidFill>
-                  <a:srgbClr val="1B2A4A"/>
-                </a:solidFill>
-                <a:latin typeface="Meiryo" pitchFamily="34" charset="0"/>
-                <a:ea typeface="Meiryo" pitchFamily="34" charset="-122"/>
-                <a:cs typeface="Meiryo" pitchFamily="34" charset="-120"/>
-              </a:rPr>
-              <a:t>中期経営計画（連結営業利益）</a:t>
-            </a:r>
-            <a:endParaRPr lang="en-US" sz="1400" dirty="0"/>
+              <a:t>中期経営計画（営業利益）</a:t>
+            </a:r>
+            <a:endParaRPr lang="en-US" sz="1300" dirty="0"/>
           </a:p>
         </p:txBody>
       </p:sp>
@@ -2637,7 +2625,7 @@
           </p:nvPr>
         </p:nvGraphicFramePr>
         <p:xfrm>
-          <a:off x="457200" y="5120640"/>
+          <a:off x="502920" y="4535424"/>
           <a:ext cx="5760720" cy="914400"/>
         </p:xfrm>
         <a:graphic>
@@ -2650,7 +2638,7 @@
                 <a:gridCol w="1371600"/>
                 <a:gridCol w="1508760"/>
               </a:tblGrid>
-              <a:tr h="292608">
+              <a:tr h="228600">
                 <a:tc>
                   <a:txBody>
                     <a:bodyPr/>
@@ -2660,27 +2648,27 @@
                         <a:buNone/>
                       </a:pPr>
                       <a:r>
-                        <a:rPr lang="en-US" sz="1150" b="1" dirty="0">
+                        <a:rPr lang="en-US" sz="1050" b="1" dirty="0">
                           <a:solidFill>
                             <a:srgbClr val="FFFFFF"/>
                           </a:solidFill>
-                          <a:latin typeface="Meiryo" pitchFamily="34" charset="0"/>
-                          <a:ea typeface="Meiryo" pitchFamily="34" charset="-122"/>
-                          <a:cs typeface="Meiryo" pitchFamily="34" charset="-120"/>
+                          <a:latin typeface="Yu Gothic" pitchFamily="34" charset="0"/>
+                          <a:ea typeface="Yu Gothic" pitchFamily="34" charset="-122"/>
+                          <a:cs typeface="Yu Gothic" pitchFamily="34" charset="-120"/>
                         </a:rPr>
                         <a:t>年度</a:t>
                       </a:r>
-                      <a:endParaRPr lang="en-US" sz="1150" dirty="0">
-                        <a:latin typeface="Meiryo" charset="0"/>
-                        <a:ea typeface="Meiryo" charset="0"/>
-                        <a:cs typeface="Meiryo" charset="0"/>
+                      <a:endParaRPr lang="en-US" sz="1050" dirty="0">
+                        <a:latin typeface="Yu Gothic" charset="0"/>
+                        <a:ea typeface="Yu Gothic" charset="0"/>
+                        <a:cs typeface="Yu Gothic" charset="0"/>
                       </a:endParaRPr>
                     </a:p>
                   </a:txBody>
-                  <a:tcPr marL="91440" marR="91440" marT="45720" marB="45720" anchor="ctr">
+                  <a:tcPr marL="45720" marR="45720" marT="18288" marB="18288" anchor="ctr">
                     <a:lnL w="9525" cap="flat" cmpd="sng" algn="ctr">
                       <a:solidFill>
-                        <a:srgbClr val="D5DAE3"/>
+                        <a:srgbClr val="D9D9E0"/>
                       </a:solidFill>
                       <a:prstDash val="solid"/>
                       <a:round/>
@@ -2689,7 +2677,7 @@
                     </a:lnL>
                     <a:lnR w="9525" cap="flat" cmpd="sng" algn="ctr">
                       <a:solidFill>
-                        <a:srgbClr val="D5DAE3"/>
+                        <a:srgbClr val="D9D9E0"/>
                       </a:solidFill>
                       <a:prstDash val="solid"/>
                       <a:round/>
@@ -2698,7 +2686,7 @@
                     </a:lnR>
                     <a:lnT w="9525" cap="flat" cmpd="sng" algn="ctr">
                       <a:solidFill>
-                        <a:srgbClr val="D5DAE3"/>
+                        <a:srgbClr val="D9D9E0"/>
                       </a:solidFill>
                       <a:prstDash val="solid"/>
                       <a:round/>
@@ -2707,7 +2695,7 @@
                     </a:lnT>
                     <a:lnB w="9525" cap="flat" cmpd="sng" algn="ctr">
                       <a:solidFill>
-                        <a:srgbClr val="D5DAE3"/>
+                        <a:srgbClr val="D9D9E0"/>
                       </a:solidFill>
                       <a:prstDash val="solid"/>
                       <a:round/>
@@ -2715,7 +2703,7 @@
                       <a:tailEnd type="none" w="med" len="med"/>
                     </a:lnB>
                     <a:solidFill>
-                      <a:srgbClr val="1B2A4A"/>
+                      <a:srgbClr val="3A106E"/>
                     </a:solidFill>
                   </a:tcPr>
                 </a:tc>
@@ -2728,27 +2716,27 @@
                         <a:buNone/>
                       </a:pPr>
                       <a:r>
-                        <a:rPr lang="en-US" sz="1150" b="1" dirty="0">
+                        <a:rPr lang="en-US" sz="1050" b="1" dirty="0">
                           <a:solidFill>
                             <a:srgbClr val="FFFFFF"/>
                           </a:solidFill>
-                          <a:latin typeface="Meiryo" pitchFamily="34" charset="0"/>
-                          <a:ea typeface="Meiryo" pitchFamily="34" charset="-122"/>
-                          <a:cs typeface="Meiryo" pitchFamily="34" charset="-120"/>
+                          <a:latin typeface="Yu Gothic" pitchFamily="34" charset="0"/>
+                          <a:ea typeface="Yu Gothic" pitchFamily="34" charset="-122"/>
+                          <a:cs typeface="Yu Gothic" pitchFamily="34" charset="-120"/>
                         </a:rPr>
                         <a:t>連結</a:t>
                       </a:r>
-                      <a:endParaRPr lang="en-US" sz="1150" dirty="0">
-                        <a:latin typeface="Meiryo" charset="0"/>
-                        <a:ea typeface="Meiryo" charset="0"/>
-                        <a:cs typeface="Meiryo" charset="0"/>
+                      <a:endParaRPr lang="en-US" sz="1050" dirty="0">
+                        <a:latin typeface="Yu Gothic" charset="0"/>
+                        <a:ea typeface="Yu Gothic" charset="0"/>
+                        <a:cs typeface="Yu Gothic" charset="0"/>
                       </a:endParaRPr>
                     </a:p>
                   </a:txBody>
-                  <a:tcPr marL="91440" marR="91440" marT="45720" marB="45720" anchor="ctr">
+                  <a:tcPr marL="45720" marR="45720" marT="18288" marB="18288" anchor="ctr">
                     <a:lnL w="9525" cap="flat" cmpd="sng" algn="ctr">
                       <a:solidFill>
-                        <a:srgbClr val="D5DAE3"/>
+                        <a:srgbClr val="D9D9E0"/>
                       </a:solidFill>
                       <a:prstDash val="solid"/>
                       <a:round/>
@@ -2757,7 +2745,7 @@
                     </a:lnL>
                     <a:lnR w="9525" cap="flat" cmpd="sng" algn="ctr">
                       <a:solidFill>
-                        <a:srgbClr val="D5DAE3"/>
+                        <a:srgbClr val="D9D9E0"/>
                       </a:solidFill>
                       <a:prstDash val="solid"/>
                       <a:round/>
@@ -2766,7 +2754,7 @@
                     </a:lnR>
                     <a:lnT w="9525" cap="flat" cmpd="sng" algn="ctr">
                       <a:solidFill>
-                        <a:srgbClr val="D5DAE3"/>
+                        <a:srgbClr val="D9D9E0"/>
                       </a:solidFill>
                       <a:prstDash val="solid"/>
                       <a:round/>
@@ -2775,7 +2763,7 @@
                     </a:lnT>
                     <a:lnB w="9525" cap="flat" cmpd="sng" algn="ctr">
                       <a:solidFill>
-                        <a:srgbClr val="D5DAE3"/>
+                        <a:srgbClr val="D9D9E0"/>
                       </a:solidFill>
                       <a:prstDash val="solid"/>
                       <a:round/>
@@ -2783,7 +2771,7 @@
                       <a:tailEnd type="none" w="med" len="med"/>
                     </a:lnB>
                     <a:solidFill>
-                      <a:srgbClr val="1B2A4A"/>
+                      <a:srgbClr val="3A106E"/>
                     </a:solidFill>
                   </a:tcPr>
                 </a:tc>
@@ -2796,27 +2784,27 @@
                         <a:buNone/>
                       </a:pPr>
                       <a:r>
-                        <a:rPr lang="en-US" sz="1150" b="1" dirty="0">
+                        <a:rPr lang="en-US" sz="1050" b="1" dirty="0">
                           <a:solidFill>
                             <a:srgbClr val="FFFFFF"/>
                           </a:solidFill>
-                          <a:latin typeface="Meiryo" pitchFamily="34" charset="0"/>
-                          <a:ea typeface="Meiryo" pitchFamily="34" charset="-122"/>
-                          <a:cs typeface="Meiryo" pitchFamily="34" charset="-120"/>
+                          <a:latin typeface="Yu Gothic" pitchFamily="34" charset="0"/>
+                          <a:ea typeface="Yu Gothic" pitchFamily="34" charset="-122"/>
+                          <a:cs typeface="Yu Gothic" pitchFamily="34" charset="-120"/>
                         </a:rPr>
                         <a:t>C&amp;D</a:t>
                       </a:r>
-                      <a:endParaRPr lang="en-US" sz="1150" dirty="0">
-                        <a:latin typeface="Meiryo" charset="0"/>
-                        <a:ea typeface="Meiryo" charset="0"/>
-                        <a:cs typeface="Meiryo" charset="0"/>
+                      <a:endParaRPr lang="en-US" sz="1050" dirty="0">
+                        <a:latin typeface="Yu Gothic" charset="0"/>
+                        <a:ea typeface="Yu Gothic" charset="0"/>
+                        <a:cs typeface="Yu Gothic" charset="0"/>
                       </a:endParaRPr>
                     </a:p>
                   </a:txBody>
-                  <a:tcPr marL="91440" marR="91440" marT="45720" marB="45720" anchor="ctr">
+                  <a:tcPr marL="45720" marR="45720" marT="18288" marB="18288" anchor="ctr">
                     <a:lnL w="9525" cap="flat" cmpd="sng" algn="ctr">
                       <a:solidFill>
-                        <a:srgbClr val="D5DAE3"/>
+                        <a:srgbClr val="D9D9E0"/>
                       </a:solidFill>
                       <a:prstDash val="solid"/>
                       <a:round/>
@@ -2825,7 +2813,7 @@
                     </a:lnL>
                     <a:lnR w="9525" cap="flat" cmpd="sng" algn="ctr">
                       <a:solidFill>
-                        <a:srgbClr val="D5DAE3"/>
+                        <a:srgbClr val="D9D9E0"/>
                       </a:solidFill>
                       <a:prstDash val="solid"/>
                       <a:round/>
@@ -2834,7 +2822,7 @@
                     </a:lnR>
                     <a:lnT w="9525" cap="flat" cmpd="sng" algn="ctr">
                       <a:solidFill>
-                        <a:srgbClr val="D5DAE3"/>
+                        <a:srgbClr val="D9D9E0"/>
                       </a:solidFill>
                       <a:prstDash val="solid"/>
                       <a:round/>
@@ -2843,7 +2831,7 @@
                     </a:lnT>
                     <a:lnB w="9525" cap="flat" cmpd="sng" algn="ctr">
                       <a:solidFill>
-                        <a:srgbClr val="D5DAE3"/>
+                        <a:srgbClr val="D9D9E0"/>
                       </a:solidFill>
                       <a:prstDash val="solid"/>
                       <a:round/>
@@ -2851,7 +2839,7 @@
                       <a:tailEnd type="none" w="med" len="med"/>
                     </a:lnB>
                     <a:solidFill>
-                      <a:srgbClr val="1B2A4A"/>
+                      <a:srgbClr val="3A106E"/>
                     </a:solidFill>
                   </a:tcPr>
                 </a:tc>
@@ -2864,27 +2852,27 @@
                         <a:buNone/>
                       </a:pPr>
                       <a:r>
-                        <a:rPr lang="en-US" sz="1150" b="1" dirty="0">
+                        <a:rPr lang="en-US" sz="1050" b="1" dirty="0">
                           <a:solidFill>
                             <a:srgbClr val="FFFFFF"/>
                           </a:solidFill>
-                          <a:latin typeface="Meiryo" pitchFamily="34" charset="0"/>
-                          <a:ea typeface="Meiryo" pitchFamily="34" charset="-122"/>
-                          <a:cs typeface="Meiryo" pitchFamily="34" charset="-120"/>
+                          <a:latin typeface="Yu Gothic" pitchFamily="34" charset="0"/>
+                          <a:ea typeface="Yu Gothic" pitchFamily="34" charset="-122"/>
+                          <a:cs typeface="Yu Gothic" pitchFamily="34" charset="-120"/>
                         </a:rPr>
                         <a:t>アミューズ</a:t>
                       </a:r>
-                      <a:endParaRPr lang="en-US" sz="1150" dirty="0">
-                        <a:latin typeface="Meiryo" charset="0"/>
-                        <a:ea typeface="Meiryo" charset="0"/>
-                        <a:cs typeface="Meiryo" charset="0"/>
+                      <a:endParaRPr lang="en-US" sz="1050" dirty="0">
+                        <a:latin typeface="Yu Gothic" charset="0"/>
+                        <a:ea typeface="Yu Gothic" charset="0"/>
+                        <a:cs typeface="Yu Gothic" charset="0"/>
                       </a:endParaRPr>
                     </a:p>
                   </a:txBody>
-                  <a:tcPr marL="91440" marR="91440" marT="45720" marB="45720" anchor="ctr">
+                  <a:tcPr marL="45720" marR="45720" marT="18288" marB="18288" anchor="ctr">
                     <a:lnL w="9525" cap="flat" cmpd="sng" algn="ctr">
                       <a:solidFill>
-                        <a:srgbClr val="D5DAE3"/>
+                        <a:srgbClr val="D9D9E0"/>
                       </a:solidFill>
                       <a:prstDash val="solid"/>
                       <a:round/>
@@ -2893,7 +2881,7 @@
                     </a:lnL>
                     <a:lnR w="9525" cap="flat" cmpd="sng" algn="ctr">
                       <a:solidFill>
-                        <a:srgbClr val="D5DAE3"/>
+                        <a:srgbClr val="D9D9E0"/>
                       </a:solidFill>
                       <a:prstDash val="solid"/>
                       <a:round/>
@@ -2902,7 +2890,7 @@
                     </a:lnR>
                     <a:lnT w="9525" cap="flat" cmpd="sng" algn="ctr">
                       <a:solidFill>
-                        <a:srgbClr val="D5DAE3"/>
+                        <a:srgbClr val="D9D9E0"/>
                       </a:solidFill>
                       <a:prstDash val="solid"/>
                       <a:round/>
@@ -2911,7 +2899,7 @@
                     </a:lnT>
                     <a:lnB w="9525" cap="flat" cmpd="sng" algn="ctr">
                       <a:solidFill>
-                        <a:srgbClr val="D5DAE3"/>
+                        <a:srgbClr val="D9D9E0"/>
                       </a:solidFill>
                       <a:prstDash val="solid"/>
                       <a:round/>
@@ -2919,12 +2907,12 @@
                       <a:tailEnd type="none" w="med" len="med"/>
                     </a:lnB>
                     <a:solidFill>
-                      <a:srgbClr val="1B2A4A"/>
+                      <a:srgbClr val="3A106E"/>
                     </a:solidFill>
                   </a:tcPr>
                 </a:tc>
               </a:tr>
-              <a:tr h="292608">
+              <a:tr h="228600">
                 <a:tc>
                   <a:txBody>
                     <a:bodyPr/>
@@ -2934,27 +2922,27 @@
                         <a:buNone/>
                       </a:pPr>
                       <a:r>
-                        <a:rPr lang="en-US" sz="1150" dirty="0">
+                        <a:rPr lang="en-US" sz="1050" b="1" dirty="0">
                           <a:solidFill>
-                            <a:srgbClr val="1A1A1A"/>
+                            <a:srgbClr val="3A106E"/>
                           </a:solidFill>
-                          <a:latin typeface="Meiryo" pitchFamily="34" charset="0"/>
-                          <a:ea typeface="Meiryo" pitchFamily="34" charset="-122"/>
-                          <a:cs typeface="Meiryo" pitchFamily="34" charset="-120"/>
+                          <a:latin typeface="Yu Gothic" pitchFamily="34" charset="0"/>
+                          <a:ea typeface="Yu Gothic" pitchFamily="34" charset="-122"/>
+                          <a:cs typeface="Yu Gothic" pitchFamily="34" charset="-120"/>
                         </a:rPr>
                         <a:t>2027/3期</a:t>
                       </a:r>
-                      <a:endParaRPr lang="en-US" sz="1150" dirty="0">
-                        <a:latin typeface="Meiryo" charset="0"/>
-                        <a:ea typeface="Meiryo" charset="0"/>
-                        <a:cs typeface="Meiryo" charset="0"/>
+                      <a:endParaRPr lang="en-US" sz="1050" dirty="0">
+                        <a:latin typeface="Yu Gothic" charset="0"/>
+                        <a:ea typeface="Yu Gothic" charset="0"/>
+                        <a:cs typeface="Yu Gothic" charset="0"/>
                       </a:endParaRPr>
                     </a:p>
                   </a:txBody>
-                  <a:tcPr marL="91440" marR="91440" marT="45720" marB="45720" anchor="ctr">
+                  <a:tcPr marL="45720" marR="45720" marT="18288" marB="18288" anchor="ctr">
                     <a:lnL w="9525" cap="flat" cmpd="sng" algn="ctr">
                       <a:solidFill>
-                        <a:srgbClr val="D5DAE3"/>
+                        <a:srgbClr val="D9D9E0"/>
                       </a:solidFill>
                       <a:prstDash val="solid"/>
                       <a:round/>
@@ -2963,7 +2951,7 @@
                     </a:lnL>
                     <a:lnR w="9525" cap="flat" cmpd="sng" algn="ctr">
                       <a:solidFill>
-                        <a:srgbClr val="D5DAE3"/>
+                        <a:srgbClr val="D9D9E0"/>
                       </a:solidFill>
                       <a:prstDash val="solid"/>
                       <a:round/>
@@ -2972,7 +2960,7 @@
                     </a:lnR>
                     <a:lnT w="9525" cap="flat" cmpd="sng" algn="ctr">
                       <a:solidFill>
-                        <a:srgbClr val="D5DAE3"/>
+                        <a:srgbClr val="D9D9E0"/>
                       </a:solidFill>
                       <a:prstDash val="solid"/>
                       <a:round/>
@@ -2981,7 +2969,7 @@
                     </a:lnT>
                     <a:lnB w="9525" cap="flat" cmpd="sng" algn="ctr">
                       <a:solidFill>
-                        <a:srgbClr val="D5DAE3"/>
+                        <a:srgbClr val="D9D9E0"/>
                       </a:solidFill>
                       <a:prstDash val="solid"/>
                       <a:round/>
@@ -3002,27 +2990,27 @@
                         <a:buNone/>
                       </a:pPr>
                       <a:r>
-                        <a:rPr lang="en-US" sz="1150" dirty="0">
+                        <a:rPr lang="en-US" sz="1050" dirty="0">
                           <a:solidFill>
-                            <a:srgbClr val="1A1A1A"/>
+                            <a:srgbClr val="262630"/>
                           </a:solidFill>
-                          <a:latin typeface="Meiryo" pitchFamily="34" charset="0"/>
-                          <a:ea typeface="Meiryo" pitchFamily="34" charset="-122"/>
-                          <a:cs typeface="Meiryo" pitchFamily="34" charset="-120"/>
+                          <a:latin typeface="Yu Gothic" pitchFamily="34" charset="0"/>
+                          <a:ea typeface="Yu Gothic" pitchFamily="34" charset="-122"/>
+                          <a:cs typeface="Yu Gothic" pitchFamily="34" charset="-120"/>
                         </a:rPr>
                         <a:t>225億円</a:t>
                       </a:r>
-                      <a:endParaRPr lang="en-US" sz="1150" dirty="0">
-                        <a:latin typeface="Meiryo" charset="0"/>
-                        <a:ea typeface="Meiryo" charset="0"/>
-                        <a:cs typeface="Meiryo" charset="0"/>
+                      <a:endParaRPr lang="en-US" sz="1050" dirty="0">
+                        <a:latin typeface="Yu Gothic" charset="0"/>
+                        <a:ea typeface="Yu Gothic" charset="0"/>
+                        <a:cs typeface="Yu Gothic" charset="0"/>
                       </a:endParaRPr>
                     </a:p>
                   </a:txBody>
-                  <a:tcPr marL="91440" marR="91440" marT="45720" marB="45720" anchor="ctr">
+                  <a:tcPr marL="45720" marR="45720" marT="18288" marB="18288" anchor="ctr">
                     <a:lnL w="9525" cap="flat" cmpd="sng" algn="ctr">
                       <a:solidFill>
-                        <a:srgbClr val="D5DAE3"/>
+                        <a:srgbClr val="D9D9E0"/>
                       </a:solidFill>
                       <a:prstDash val="solid"/>
                       <a:round/>
@@ -3031,7 +3019,7 @@
                     </a:lnL>
                     <a:lnR w="9525" cap="flat" cmpd="sng" algn="ctr">
                       <a:solidFill>
-                        <a:srgbClr val="D5DAE3"/>
+                        <a:srgbClr val="D9D9E0"/>
                       </a:solidFill>
                       <a:prstDash val="solid"/>
                       <a:round/>
@@ -3040,7 +3028,7 @@
                     </a:lnR>
                     <a:lnT w="9525" cap="flat" cmpd="sng" algn="ctr">
                       <a:solidFill>
-                        <a:srgbClr val="D5DAE3"/>
+                        <a:srgbClr val="D9D9E0"/>
                       </a:solidFill>
                       <a:prstDash val="solid"/>
                       <a:round/>
@@ -3049,7 +3037,7 @@
                     </a:lnT>
                     <a:lnB w="9525" cap="flat" cmpd="sng" algn="ctr">
                       <a:solidFill>
-                        <a:srgbClr val="D5DAE3"/>
+                        <a:srgbClr val="D9D9E0"/>
                       </a:solidFill>
                       <a:prstDash val="solid"/>
                       <a:round/>
@@ -3070,27 +3058,27 @@
                         <a:buNone/>
                       </a:pPr>
                       <a:r>
-                        <a:rPr lang="en-US" sz="1150" dirty="0">
+                        <a:rPr lang="en-US" sz="1050" dirty="0">
                           <a:solidFill>
-                            <a:srgbClr val="1A1A1A"/>
+                            <a:srgbClr val="262630"/>
                           </a:solidFill>
-                          <a:latin typeface="Meiryo" pitchFamily="34" charset="0"/>
-                          <a:ea typeface="Meiryo" pitchFamily="34" charset="-122"/>
-                          <a:cs typeface="Meiryo" pitchFamily="34" charset="-120"/>
+                          <a:latin typeface="Yu Gothic" pitchFamily="34" charset="0"/>
+                          <a:ea typeface="Yu Gothic" pitchFamily="34" charset="-122"/>
+                          <a:cs typeface="Yu Gothic" pitchFamily="34" charset="-120"/>
                         </a:rPr>
                         <a:t>45億円</a:t>
                       </a:r>
-                      <a:endParaRPr lang="en-US" sz="1150" dirty="0">
-                        <a:latin typeface="Meiryo" charset="0"/>
-                        <a:ea typeface="Meiryo" charset="0"/>
-                        <a:cs typeface="Meiryo" charset="0"/>
+                      <a:endParaRPr lang="en-US" sz="1050" dirty="0">
+                        <a:latin typeface="Yu Gothic" charset="0"/>
+                        <a:ea typeface="Yu Gothic" charset="0"/>
+                        <a:cs typeface="Yu Gothic" charset="0"/>
                       </a:endParaRPr>
                     </a:p>
                   </a:txBody>
-                  <a:tcPr marL="91440" marR="91440" marT="45720" marB="45720" anchor="ctr">
+                  <a:tcPr marL="45720" marR="45720" marT="18288" marB="18288" anchor="ctr">
                     <a:lnL w="9525" cap="flat" cmpd="sng" algn="ctr">
                       <a:solidFill>
-                        <a:srgbClr val="D5DAE3"/>
+                        <a:srgbClr val="D9D9E0"/>
                       </a:solidFill>
                       <a:prstDash val="solid"/>
                       <a:round/>
@@ -3099,7 +3087,7 @@
                     </a:lnL>
                     <a:lnR w="9525" cap="flat" cmpd="sng" algn="ctr">
                       <a:solidFill>
-                        <a:srgbClr val="D5DAE3"/>
+                        <a:srgbClr val="D9D9E0"/>
                       </a:solidFill>
                       <a:prstDash val="solid"/>
                       <a:round/>
@@ -3108,7 +3096,7 @@
                     </a:lnR>
                     <a:lnT w="9525" cap="flat" cmpd="sng" algn="ctr">
                       <a:solidFill>
-                        <a:srgbClr val="D5DAE3"/>
+                        <a:srgbClr val="D9D9E0"/>
                       </a:solidFill>
                       <a:prstDash val="solid"/>
                       <a:round/>
@@ -3117,7 +3105,7 @@
                     </a:lnT>
                     <a:lnB w="9525" cap="flat" cmpd="sng" algn="ctr">
                       <a:solidFill>
-                        <a:srgbClr val="D5DAE3"/>
+                        <a:srgbClr val="D9D9E0"/>
                       </a:solidFill>
                       <a:prstDash val="solid"/>
                       <a:round/>
@@ -3138,27 +3126,27 @@
                         <a:buNone/>
                       </a:pPr>
                       <a:r>
-                        <a:rPr lang="en-US" sz="1150" dirty="0">
+                        <a:rPr lang="en-US" sz="1050" dirty="0">
                           <a:solidFill>
-                            <a:srgbClr val="1A1A1A"/>
+                            <a:srgbClr val="262630"/>
                           </a:solidFill>
-                          <a:latin typeface="Meiryo" pitchFamily="34" charset="0"/>
-                          <a:ea typeface="Meiryo" pitchFamily="34" charset="-122"/>
-                          <a:cs typeface="Meiryo" pitchFamily="34" charset="-120"/>
+                          <a:latin typeface="Yu Gothic" pitchFamily="34" charset="0"/>
+                          <a:ea typeface="Yu Gothic" pitchFamily="34" charset="-122"/>
+                          <a:cs typeface="Yu Gothic" pitchFamily="34" charset="-120"/>
                         </a:rPr>
                         <a:t>220億円</a:t>
                       </a:r>
-                      <a:endParaRPr lang="en-US" sz="1150" dirty="0">
-                        <a:latin typeface="Meiryo" charset="0"/>
-                        <a:ea typeface="Meiryo" charset="0"/>
-                        <a:cs typeface="Meiryo" charset="0"/>
+                      <a:endParaRPr lang="en-US" sz="1050" dirty="0">
+                        <a:latin typeface="Yu Gothic" charset="0"/>
+                        <a:ea typeface="Yu Gothic" charset="0"/>
+                        <a:cs typeface="Yu Gothic" charset="0"/>
                       </a:endParaRPr>
                     </a:p>
                   </a:txBody>
-                  <a:tcPr marL="91440" marR="91440" marT="45720" marB="45720" anchor="ctr">
+                  <a:tcPr marL="45720" marR="45720" marT="18288" marB="18288" anchor="ctr">
                     <a:lnL w="9525" cap="flat" cmpd="sng" algn="ctr">
                       <a:solidFill>
-                        <a:srgbClr val="D5DAE3"/>
+                        <a:srgbClr val="D9D9E0"/>
                       </a:solidFill>
                       <a:prstDash val="solid"/>
                       <a:round/>
@@ -3167,7 +3155,7 @@
                     </a:lnL>
                     <a:lnR w="9525" cap="flat" cmpd="sng" algn="ctr">
                       <a:solidFill>
-                        <a:srgbClr val="D5DAE3"/>
+                        <a:srgbClr val="D9D9E0"/>
                       </a:solidFill>
                       <a:prstDash val="solid"/>
                       <a:round/>
@@ -3176,7 +3164,7 @@
                     </a:lnR>
                     <a:lnT w="9525" cap="flat" cmpd="sng" algn="ctr">
                       <a:solidFill>
-                        <a:srgbClr val="D5DAE3"/>
+                        <a:srgbClr val="D9D9E0"/>
                       </a:solidFill>
                       <a:prstDash val="solid"/>
                       <a:round/>
@@ -3185,7 +3173,7 @@
                     </a:lnT>
                     <a:lnB w="9525" cap="flat" cmpd="sng" algn="ctr">
                       <a:solidFill>
-                        <a:srgbClr val="D5DAE3"/>
+                        <a:srgbClr val="D9D9E0"/>
                       </a:solidFill>
                       <a:prstDash val="solid"/>
                       <a:round/>
@@ -3198,7 +3186,7 @@
                   </a:tcPr>
                 </a:tc>
               </a:tr>
-              <a:tr h="292608">
+              <a:tr h="228600">
                 <a:tc>
                   <a:txBody>
                     <a:bodyPr/>
@@ -3208,27 +3196,27 @@
                         <a:buNone/>
                       </a:pPr>
                       <a:r>
-                        <a:rPr lang="en-US" sz="1150" dirty="0">
+                        <a:rPr lang="en-US" sz="1050" b="1" dirty="0">
                           <a:solidFill>
-                            <a:srgbClr val="1A1A1A"/>
+                            <a:srgbClr val="3A106E"/>
                           </a:solidFill>
-                          <a:latin typeface="Meiryo" pitchFamily="34" charset="0"/>
-                          <a:ea typeface="Meiryo" pitchFamily="34" charset="-122"/>
-                          <a:cs typeface="Meiryo" pitchFamily="34" charset="-120"/>
+                          <a:latin typeface="Yu Gothic" pitchFamily="34" charset="0"/>
+                          <a:ea typeface="Yu Gothic" pitchFamily="34" charset="-122"/>
+                          <a:cs typeface="Yu Gothic" pitchFamily="34" charset="-120"/>
                         </a:rPr>
                         <a:t>2028/3期</a:t>
                       </a:r>
-                      <a:endParaRPr lang="en-US" sz="1150" dirty="0">
-                        <a:latin typeface="Meiryo" charset="0"/>
-                        <a:ea typeface="Meiryo" charset="0"/>
-                        <a:cs typeface="Meiryo" charset="0"/>
+                      <a:endParaRPr lang="en-US" sz="1050" dirty="0">
+                        <a:latin typeface="Yu Gothic" charset="0"/>
+                        <a:ea typeface="Yu Gothic" charset="0"/>
+                        <a:cs typeface="Yu Gothic" charset="0"/>
                       </a:endParaRPr>
                     </a:p>
                   </a:txBody>
-                  <a:tcPr marL="91440" marR="91440" marT="45720" marB="45720" anchor="ctr">
+                  <a:tcPr marL="45720" marR="45720" marT="18288" marB="18288" anchor="ctr">
                     <a:lnL w="9525" cap="flat" cmpd="sng" algn="ctr">
                       <a:solidFill>
-                        <a:srgbClr val="D5DAE3"/>
+                        <a:srgbClr val="D9D9E0"/>
                       </a:solidFill>
                       <a:prstDash val="solid"/>
                       <a:round/>
@@ -3237,7 +3225,7 @@
                     </a:lnL>
                     <a:lnR w="9525" cap="flat" cmpd="sng" algn="ctr">
                       <a:solidFill>
-                        <a:srgbClr val="D5DAE3"/>
+                        <a:srgbClr val="D9D9E0"/>
                       </a:solidFill>
                       <a:prstDash val="solid"/>
                       <a:round/>
@@ -3246,7 +3234,7 @@
                     </a:lnR>
                     <a:lnT w="9525" cap="flat" cmpd="sng" algn="ctr">
                       <a:solidFill>
-                        <a:srgbClr val="D5DAE3"/>
+                        <a:srgbClr val="D9D9E0"/>
                       </a:solidFill>
                       <a:prstDash val="solid"/>
                       <a:round/>
@@ -3255,7 +3243,281 @@
                     </a:lnT>
                     <a:lnB w="9525" cap="flat" cmpd="sng" algn="ctr">
                       <a:solidFill>
-                        <a:srgbClr val="D5DAE3"/>
+                        <a:srgbClr val="D9D9E0"/>
+                      </a:solidFill>
+                      <a:prstDash val="solid"/>
+                      <a:round/>
+                      <a:headEnd type="none" w="med" len="med"/>
+                      <a:tailEnd type="none" w="med" len="med"/>
+                    </a:lnB>
+                    <a:solidFill>
+                      <a:srgbClr val="F7F7F9"/>
+                    </a:solidFill>
+                  </a:tcPr>
+                </a:tc>
+                <a:tc>
+                  <a:txBody>
+                    <a:bodyPr/>
+                    <a:lstStyle/>
+                    <a:p>
+                      <a:pPr algn="ctr" indent="0" marL="0">
+                        <a:buNone/>
+                      </a:pPr>
+                      <a:r>
+                        <a:rPr lang="en-US" sz="1050" dirty="0">
+                          <a:solidFill>
+                            <a:srgbClr val="262630"/>
+                          </a:solidFill>
+                          <a:latin typeface="Yu Gothic" pitchFamily="34" charset="0"/>
+                          <a:ea typeface="Yu Gothic" pitchFamily="34" charset="-122"/>
+                          <a:cs typeface="Yu Gothic" pitchFamily="34" charset="-120"/>
+                        </a:rPr>
+                        <a:t>255億円</a:t>
+                      </a:r>
+                      <a:endParaRPr lang="en-US" sz="1050" dirty="0">
+                        <a:latin typeface="Yu Gothic" charset="0"/>
+                        <a:ea typeface="Yu Gothic" charset="0"/>
+                        <a:cs typeface="Yu Gothic" charset="0"/>
+                      </a:endParaRPr>
+                    </a:p>
+                  </a:txBody>
+                  <a:tcPr marL="45720" marR="45720" marT="18288" marB="18288" anchor="ctr">
+                    <a:lnL w="9525" cap="flat" cmpd="sng" algn="ctr">
+                      <a:solidFill>
+                        <a:srgbClr val="D9D9E0"/>
+                      </a:solidFill>
+                      <a:prstDash val="solid"/>
+                      <a:round/>
+                      <a:headEnd type="none" w="med" len="med"/>
+                      <a:tailEnd type="none" w="med" len="med"/>
+                    </a:lnL>
+                    <a:lnR w="9525" cap="flat" cmpd="sng" algn="ctr">
+                      <a:solidFill>
+                        <a:srgbClr val="D9D9E0"/>
+                      </a:solidFill>
+                      <a:prstDash val="solid"/>
+                      <a:round/>
+                      <a:headEnd type="none" w="med" len="med"/>
+                      <a:tailEnd type="none" w="med" len="med"/>
+                    </a:lnR>
+                    <a:lnT w="9525" cap="flat" cmpd="sng" algn="ctr">
+                      <a:solidFill>
+                        <a:srgbClr val="D9D9E0"/>
+                      </a:solidFill>
+                      <a:prstDash val="solid"/>
+                      <a:round/>
+                      <a:headEnd type="none" w="med" len="med"/>
+                      <a:tailEnd type="none" w="med" len="med"/>
+                    </a:lnT>
+                    <a:lnB w="9525" cap="flat" cmpd="sng" algn="ctr">
+                      <a:solidFill>
+                        <a:srgbClr val="D9D9E0"/>
+                      </a:solidFill>
+                      <a:prstDash val="solid"/>
+                      <a:round/>
+                      <a:headEnd type="none" w="med" len="med"/>
+                      <a:tailEnd type="none" w="med" len="med"/>
+                    </a:lnB>
+                    <a:solidFill>
+                      <a:srgbClr val="F7F7F9"/>
+                    </a:solidFill>
+                  </a:tcPr>
+                </a:tc>
+                <a:tc>
+                  <a:txBody>
+                    <a:bodyPr/>
+                    <a:lstStyle/>
+                    <a:p>
+                      <a:pPr algn="ctr" indent="0" marL="0">
+                        <a:buNone/>
+                      </a:pPr>
+                      <a:r>
+                        <a:rPr lang="en-US" sz="1050" dirty="0">
+                          <a:solidFill>
+                            <a:srgbClr val="262630"/>
+                          </a:solidFill>
+                          <a:latin typeface="Yu Gothic" pitchFamily="34" charset="0"/>
+                          <a:ea typeface="Yu Gothic" pitchFamily="34" charset="-122"/>
+                          <a:cs typeface="Yu Gothic" pitchFamily="34" charset="-120"/>
+                        </a:rPr>
+                        <a:t>55億円</a:t>
+                      </a:r>
+                      <a:endParaRPr lang="en-US" sz="1050" dirty="0">
+                        <a:latin typeface="Yu Gothic" charset="0"/>
+                        <a:ea typeface="Yu Gothic" charset="0"/>
+                        <a:cs typeface="Yu Gothic" charset="0"/>
+                      </a:endParaRPr>
+                    </a:p>
+                  </a:txBody>
+                  <a:tcPr marL="45720" marR="45720" marT="18288" marB="18288" anchor="ctr">
+                    <a:lnL w="9525" cap="flat" cmpd="sng" algn="ctr">
+                      <a:solidFill>
+                        <a:srgbClr val="D9D9E0"/>
+                      </a:solidFill>
+                      <a:prstDash val="solid"/>
+                      <a:round/>
+                      <a:headEnd type="none" w="med" len="med"/>
+                      <a:tailEnd type="none" w="med" len="med"/>
+                    </a:lnL>
+                    <a:lnR w="9525" cap="flat" cmpd="sng" algn="ctr">
+                      <a:solidFill>
+                        <a:srgbClr val="D9D9E0"/>
+                      </a:solidFill>
+                      <a:prstDash val="solid"/>
+                      <a:round/>
+                      <a:headEnd type="none" w="med" len="med"/>
+                      <a:tailEnd type="none" w="med" len="med"/>
+                    </a:lnR>
+                    <a:lnT w="9525" cap="flat" cmpd="sng" algn="ctr">
+                      <a:solidFill>
+                        <a:srgbClr val="D9D9E0"/>
+                      </a:solidFill>
+                      <a:prstDash val="solid"/>
+                      <a:round/>
+                      <a:headEnd type="none" w="med" len="med"/>
+                      <a:tailEnd type="none" w="med" len="med"/>
+                    </a:lnT>
+                    <a:lnB w="9525" cap="flat" cmpd="sng" algn="ctr">
+                      <a:solidFill>
+                        <a:srgbClr val="D9D9E0"/>
+                      </a:solidFill>
+                      <a:prstDash val="solid"/>
+                      <a:round/>
+                      <a:headEnd type="none" w="med" len="med"/>
+                      <a:tailEnd type="none" w="med" len="med"/>
+                    </a:lnB>
+                    <a:solidFill>
+                      <a:srgbClr val="F7F7F9"/>
+                    </a:solidFill>
+                  </a:tcPr>
+                </a:tc>
+                <a:tc>
+                  <a:txBody>
+                    <a:bodyPr/>
+                    <a:lstStyle/>
+                    <a:p>
+                      <a:pPr algn="ctr" indent="0" marL="0">
+                        <a:buNone/>
+                      </a:pPr>
+                      <a:r>
+                        <a:rPr lang="en-US" sz="1050" dirty="0">
+                          <a:solidFill>
+                            <a:srgbClr val="262630"/>
+                          </a:solidFill>
+                          <a:latin typeface="Yu Gothic" pitchFamily="34" charset="0"/>
+                          <a:ea typeface="Yu Gothic" pitchFamily="34" charset="-122"/>
+                          <a:cs typeface="Yu Gothic" pitchFamily="34" charset="-120"/>
+                        </a:rPr>
+                        <a:t>240億円</a:t>
+                      </a:r>
+                      <a:endParaRPr lang="en-US" sz="1050" dirty="0">
+                        <a:latin typeface="Yu Gothic" charset="0"/>
+                        <a:ea typeface="Yu Gothic" charset="0"/>
+                        <a:cs typeface="Yu Gothic" charset="0"/>
+                      </a:endParaRPr>
+                    </a:p>
+                  </a:txBody>
+                  <a:tcPr marL="45720" marR="45720" marT="18288" marB="18288" anchor="ctr">
+                    <a:lnL w="9525" cap="flat" cmpd="sng" algn="ctr">
+                      <a:solidFill>
+                        <a:srgbClr val="D9D9E0"/>
+                      </a:solidFill>
+                      <a:prstDash val="solid"/>
+                      <a:round/>
+                      <a:headEnd type="none" w="med" len="med"/>
+                      <a:tailEnd type="none" w="med" len="med"/>
+                    </a:lnL>
+                    <a:lnR w="9525" cap="flat" cmpd="sng" algn="ctr">
+                      <a:solidFill>
+                        <a:srgbClr val="D9D9E0"/>
+                      </a:solidFill>
+                      <a:prstDash val="solid"/>
+                      <a:round/>
+                      <a:headEnd type="none" w="med" len="med"/>
+                      <a:tailEnd type="none" w="med" len="med"/>
+                    </a:lnR>
+                    <a:lnT w="9525" cap="flat" cmpd="sng" algn="ctr">
+                      <a:solidFill>
+                        <a:srgbClr val="D9D9E0"/>
+                      </a:solidFill>
+                      <a:prstDash val="solid"/>
+                      <a:round/>
+                      <a:headEnd type="none" w="med" len="med"/>
+                      <a:tailEnd type="none" w="med" len="med"/>
+                    </a:lnT>
+                    <a:lnB w="9525" cap="flat" cmpd="sng" algn="ctr">
+                      <a:solidFill>
+                        <a:srgbClr val="D9D9E0"/>
+                      </a:solidFill>
+                      <a:prstDash val="solid"/>
+                      <a:round/>
+                      <a:headEnd type="none" w="med" len="med"/>
+                      <a:tailEnd type="none" w="med" len="med"/>
+                    </a:lnB>
+                    <a:solidFill>
+                      <a:srgbClr val="F7F7F9"/>
+                    </a:solidFill>
+                  </a:tcPr>
+                </a:tc>
+              </a:tr>
+              <a:tr h="228600">
+                <a:tc>
+                  <a:txBody>
+                    <a:bodyPr/>
+                    <a:lstStyle/>
+                    <a:p>
+                      <a:pPr algn="ctr" indent="0" marL="0">
+                        <a:buNone/>
+                      </a:pPr>
+                      <a:r>
+                        <a:rPr lang="en-US" sz="1050" b="1" dirty="0">
+                          <a:solidFill>
+                            <a:srgbClr val="3A106E"/>
+                          </a:solidFill>
+                          <a:latin typeface="Yu Gothic" pitchFamily="34" charset="0"/>
+                          <a:ea typeface="Yu Gothic" pitchFamily="34" charset="-122"/>
+                          <a:cs typeface="Yu Gothic" pitchFamily="34" charset="-120"/>
+                        </a:rPr>
+                        <a:t>2029/3期</a:t>
+                      </a:r>
+                      <a:endParaRPr lang="en-US" sz="1050" dirty="0">
+                        <a:latin typeface="Yu Gothic" charset="0"/>
+                        <a:ea typeface="Yu Gothic" charset="0"/>
+                        <a:cs typeface="Yu Gothic" charset="0"/>
+                      </a:endParaRPr>
+                    </a:p>
+                  </a:txBody>
+                  <a:tcPr marL="45720" marR="45720" marT="18288" marB="18288" anchor="ctr">
+                    <a:lnL w="9525" cap="flat" cmpd="sng" algn="ctr">
+                      <a:solidFill>
+                        <a:srgbClr val="D9D9E0"/>
+                      </a:solidFill>
+                      <a:prstDash val="solid"/>
+                      <a:round/>
+                      <a:headEnd type="none" w="med" len="med"/>
+                      <a:tailEnd type="none" w="med" len="med"/>
+                    </a:lnL>
+                    <a:lnR w="9525" cap="flat" cmpd="sng" algn="ctr">
+                      <a:solidFill>
+                        <a:srgbClr val="D9D9E0"/>
+                      </a:solidFill>
+                      <a:prstDash val="solid"/>
+                      <a:round/>
+                      <a:headEnd type="none" w="med" len="med"/>
+                      <a:tailEnd type="none" w="med" len="med"/>
+                    </a:lnR>
+                    <a:lnT w="9525" cap="flat" cmpd="sng" algn="ctr">
+                      <a:solidFill>
+                        <a:srgbClr val="D9D9E0"/>
+                      </a:solidFill>
+                      <a:prstDash val="solid"/>
+                      <a:round/>
+                      <a:headEnd type="none" w="med" len="med"/>
+                      <a:tailEnd type="none" w="med" len="med"/>
+                    </a:lnT>
+                    <a:lnB w="9525" cap="flat" cmpd="sng" algn="ctr">
+                      <a:solidFill>
+                        <a:srgbClr val="D9D9E0"/>
                       </a:solidFill>
                       <a:prstDash val="solid"/>
                       <a:round/>
@@ -3276,27 +3538,27 @@
                         <a:buNone/>
                       </a:pPr>
                       <a:r>
-                        <a:rPr lang="en-US" sz="1150" dirty="0">
+                        <a:rPr lang="en-US" sz="1050" dirty="0">
                           <a:solidFill>
-                            <a:srgbClr val="1A1A1A"/>
+                            <a:srgbClr val="262630"/>
                           </a:solidFill>
-                          <a:latin typeface="Meiryo" pitchFamily="34" charset="0"/>
-                          <a:ea typeface="Meiryo" pitchFamily="34" charset="-122"/>
-                          <a:cs typeface="Meiryo" pitchFamily="34" charset="-120"/>
+                          <a:latin typeface="Yu Gothic" pitchFamily="34" charset="0"/>
+                          <a:ea typeface="Yu Gothic" pitchFamily="34" charset="-122"/>
+                          <a:cs typeface="Yu Gothic" pitchFamily="34" charset="-120"/>
                         </a:rPr>
-                        <a:t>255億円</a:t>
+                        <a:t>285億円</a:t>
                       </a:r>
-                      <a:endParaRPr lang="en-US" sz="1150" dirty="0">
-                        <a:latin typeface="Meiryo" charset="0"/>
-                        <a:ea typeface="Meiryo" charset="0"/>
-                        <a:cs typeface="Meiryo" charset="0"/>
+                      <a:endParaRPr lang="en-US" sz="1050" dirty="0">
+                        <a:latin typeface="Yu Gothic" charset="0"/>
+                        <a:ea typeface="Yu Gothic" charset="0"/>
+                        <a:cs typeface="Yu Gothic" charset="0"/>
                       </a:endParaRPr>
                     </a:p>
                   </a:txBody>
-                  <a:tcPr marL="91440" marR="91440" marT="45720" marB="45720" anchor="ctr">
+                  <a:tcPr marL="45720" marR="45720" marT="18288" marB="18288" anchor="ctr">
                     <a:lnL w="9525" cap="flat" cmpd="sng" algn="ctr">
                       <a:solidFill>
-                        <a:srgbClr val="D5DAE3"/>
+                        <a:srgbClr val="D9D9E0"/>
                       </a:solidFill>
                       <a:prstDash val="solid"/>
                       <a:round/>
@@ -3305,7 +3567,7 @@
                     </a:lnL>
                     <a:lnR w="9525" cap="flat" cmpd="sng" algn="ctr">
                       <a:solidFill>
-                        <a:srgbClr val="D5DAE3"/>
+                        <a:srgbClr val="D9D9E0"/>
                       </a:solidFill>
                       <a:prstDash val="solid"/>
                       <a:round/>
@@ -3314,7 +3576,7 @@
                     </a:lnR>
                     <a:lnT w="9525" cap="flat" cmpd="sng" algn="ctr">
                       <a:solidFill>
-                        <a:srgbClr val="D5DAE3"/>
+                        <a:srgbClr val="D9D9E0"/>
                       </a:solidFill>
                       <a:prstDash val="solid"/>
                       <a:round/>
@@ -3323,7 +3585,7 @@
                     </a:lnT>
                     <a:lnB w="9525" cap="flat" cmpd="sng" algn="ctr">
                       <a:solidFill>
-                        <a:srgbClr val="D5DAE3"/>
+                        <a:srgbClr val="D9D9E0"/>
                       </a:solidFill>
                       <a:prstDash val="solid"/>
                       <a:round/>
@@ -3344,27 +3606,27 @@
                         <a:buNone/>
                       </a:pPr>
                       <a:r>
-                        <a:rPr lang="en-US" sz="1150" dirty="0">
+                        <a:rPr lang="en-US" sz="1050" dirty="0">
                           <a:solidFill>
-                            <a:srgbClr val="1A1A1A"/>
+                            <a:srgbClr val="262630"/>
                           </a:solidFill>
-                          <a:latin typeface="Meiryo" pitchFamily="34" charset="0"/>
-                          <a:ea typeface="Meiryo" pitchFamily="34" charset="-122"/>
-                          <a:cs typeface="Meiryo" pitchFamily="34" charset="-120"/>
+                          <a:latin typeface="Yu Gothic" pitchFamily="34" charset="0"/>
+                          <a:ea typeface="Yu Gothic" pitchFamily="34" charset="-122"/>
+                          <a:cs typeface="Yu Gothic" pitchFamily="34" charset="-120"/>
                         </a:rPr>
-                        <a:t>55億円</a:t>
+                        <a:t>65億円</a:t>
                       </a:r>
-                      <a:endParaRPr lang="en-US" sz="1150" dirty="0">
-                        <a:latin typeface="Meiryo" charset="0"/>
-                        <a:ea typeface="Meiryo" charset="0"/>
-                        <a:cs typeface="Meiryo" charset="0"/>
+                      <a:endParaRPr lang="en-US" sz="1050" dirty="0">
+                        <a:latin typeface="Yu Gothic" charset="0"/>
+                        <a:ea typeface="Yu Gothic" charset="0"/>
+                        <a:cs typeface="Yu Gothic" charset="0"/>
                       </a:endParaRPr>
                     </a:p>
                   </a:txBody>
-                  <a:tcPr marL="91440" marR="91440" marT="45720" marB="45720" anchor="ctr">
+                  <a:tcPr marL="45720" marR="45720" marT="18288" marB="18288" anchor="ctr">
                     <a:lnL w="9525" cap="flat" cmpd="sng" algn="ctr">
                       <a:solidFill>
-                        <a:srgbClr val="D5DAE3"/>
+                        <a:srgbClr val="D9D9E0"/>
                       </a:solidFill>
                       <a:prstDash val="solid"/>
                       <a:round/>
@@ -3373,7 +3635,7 @@
                     </a:lnL>
                     <a:lnR w="9525" cap="flat" cmpd="sng" algn="ctr">
                       <a:solidFill>
-                        <a:srgbClr val="D5DAE3"/>
+                        <a:srgbClr val="D9D9E0"/>
                       </a:solidFill>
                       <a:prstDash val="solid"/>
                       <a:round/>
@@ -3382,7 +3644,7 @@
                     </a:lnR>
                     <a:lnT w="9525" cap="flat" cmpd="sng" algn="ctr">
                       <a:solidFill>
-                        <a:srgbClr val="D5DAE3"/>
+                        <a:srgbClr val="D9D9E0"/>
                       </a:solidFill>
                       <a:prstDash val="solid"/>
                       <a:round/>
@@ -3391,7 +3653,7 @@
                     </a:lnT>
                     <a:lnB w="9525" cap="flat" cmpd="sng" algn="ctr">
                       <a:solidFill>
-                        <a:srgbClr val="D5DAE3"/>
+                        <a:srgbClr val="D9D9E0"/>
                       </a:solidFill>
                       <a:prstDash val="solid"/>
                       <a:round/>
@@ -3412,27 +3674,27 @@
                         <a:buNone/>
                       </a:pPr>
                       <a:r>
-                        <a:rPr lang="en-US" sz="1150" dirty="0">
+                        <a:rPr lang="en-US" sz="1050" dirty="0">
                           <a:solidFill>
-                            <a:srgbClr val="1A1A1A"/>
+                            <a:srgbClr val="262630"/>
                           </a:solidFill>
-                          <a:latin typeface="Meiryo" pitchFamily="34" charset="0"/>
-                          <a:ea typeface="Meiryo" pitchFamily="34" charset="-122"/>
-                          <a:cs typeface="Meiryo" pitchFamily="34" charset="-120"/>
+                          <a:latin typeface="Yu Gothic" pitchFamily="34" charset="0"/>
+                          <a:ea typeface="Yu Gothic" pitchFamily="34" charset="-122"/>
+                          <a:cs typeface="Yu Gothic" pitchFamily="34" charset="-120"/>
                         </a:rPr>
-                        <a:t>240億円</a:t>
+                        <a:t>260億円</a:t>
                       </a:r>
-                      <a:endParaRPr lang="en-US" sz="1150" dirty="0">
-                        <a:latin typeface="Meiryo" charset="0"/>
-                        <a:ea typeface="Meiryo" charset="0"/>
-                        <a:cs typeface="Meiryo" charset="0"/>
+                      <a:endParaRPr lang="en-US" sz="1050" dirty="0">
+                        <a:latin typeface="Yu Gothic" charset="0"/>
+                        <a:ea typeface="Yu Gothic" charset="0"/>
+                        <a:cs typeface="Yu Gothic" charset="0"/>
                       </a:endParaRPr>
                     </a:p>
                   </a:txBody>
-                  <a:tcPr marL="91440" marR="91440" marT="45720" marB="45720" anchor="ctr">
+                  <a:tcPr marL="45720" marR="45720" marT="18288" marB="18288" anchor="ctr">
                     <a:lnL w="9525" cap="flat" cmpd="sng" algn="ctr">
                       <a:solidFill>
-                        <a:srgbClr val="D5DAE3"/>
+                        <a:srgbClr val="D9D9E0"/>
                       </a:solidFill>
                       <a:prstDash val="solid"/>
                       <a:round/>
@@ -3441,7 +3703,7 @@
                     </a:lnL>
                     <a:lnR w="9525" cap="flat" cmpd="sng" algn="ctr">
                       <a:solidFill>
-                        <a:srgbClr val="D5DAE3"/>
+                        <a:srgbClr val="D9D9E0"/>
                       </a:solidFill>
                       <a:prstDash val="solid"/>
                       <a:round/>
@@ -3450,7 +3712,7 @@
                     </a:lnR>
                     <a:lnT w="9525" cap="flat" cmpd="sng" algn="ctr">
                       <a:solidFill>
-                        <a:srgbClr val="D5DAE3"/>
+                        <a:srgbClr val="D9D9E0"/>
                       </a:solidFill>
                       <a:prstDash val="solid"/>
                       <a:round/>
@@ -3459,281 +3721,7 @@
                     </a:lnT>
                     <a:lnB w="9525" cap="flat" cmpd="sng" algn="ctr">
                       <a:solidFill>
-                        <a:srgbClr val="D5DAE3"/>
-                      </a:solidFill>
-                      <a:prstDash val="solid"/>
-                      <a:round/>
-                      <a:headEnd type="none" w="med" len="med"/>
-                      <a:tailEnd type="none" w="med" len="med"/>
-                    </a:lnB>
-                    <a:solidFill>
-                      <a:srgbClr val="FFFFFF"/>
-                    </a:solidFill>
-                  </a:tcPr>
-                </a:tc>
-              </a:tr>
-              <a:tr h="292608">
-                <a:tc>
-                  <a:txBody>
-                    <a:bodyPr/>
-                    <a:lstStyle/>
-                    <a:p>
-                      <a:pPr algn="ctr" indent="0" marL="0">
-                        <a:buNone/>
-                      </a:pPr>
-                      <a:r>
-                        <a:rPr lang="en-US" sz="1150" dirty="0">
-                          <a:solidFill>
-                            <a:srgbClr val="1A1A1A"/>
-                          </a:solidFill>
-                          <a:latin typeface="Meiryo" pitchFamily="34" charset="0"/>
-                          <a:ea typeface="Meiryo" pitchFamily="34" charset="-122"/>
-                          <a:cs typeface="Meiryo" pitchFamily="34" charset="-120"/>
-                        </a:rPr>
-                        <a:t>2029/3期</a:t>
-                      </a:r>
-                      <a:endParaRPr lang="en-US" sz="1150" dirty="0">
-                        <a:latin typeface="Meiryo" charset="0"/>
-                        <a:ea typeface="Meiryo" charset="0"/>
-                        <a:cs typeface="Meiryo" charset="0"/>
-                      </a:endParaRPr>
-                    </a:p>
-                  </a:txBody>
-                  <a:tcPr marL="91440" marR="91440" marT="45720" marB="45720" anchor="ctr">
-                    <a:lnL w="9525" cap="flat" cmpd="sng" algn="ctr">
-                      <a:solidFill>
-                        <a:srgbClr val="D5DAE3"/>
-                      </a:solidFill>
-                      <a:prstDash val="solid"/>
-                      <a:round/>
-                      <a:headEnd type="none" w="med" len="med"/>
-                      <a:tailEnd type="none" w="med" len="med"/>
-                    </a:lnL>
-                    <a:lnR w="9525" cap="flat" cmpd="sng" algn="ctr">
-                      <a:solidFill>
-                        <a:srgbClr val="D5DAE3"/>
-                      </a:solidFill>
-                      <a:prstDash val="solid"/>
-                      <a:round/>
-                      <a:headEnd type="none" w="med" len="med"/>
-                      <a:tailEnd type="none" w="med" len="med"/>
-                    </a:lnR>
-                    <a:lnT w="9525" cap="flat" cmpd="sng" algn="ctr">
-                      <a:solidFill>
-                        <a:srgbClr val="D5DAE3"/>
-                      </a:solidFill>
-                      <a:prstDash val="solid"/>
-                      <a:round/>
-                      <a:headEnd type="none" w="med" len="med"/>
-                      <a:tailEnd type="none" w="med" len="med"/>
-                    </a:lnT>
-                    <a:lnB w="9525" cap="flat" cmpd="sng" algn="ctr">
-                      <a:solidFill>
-                        <a:srgbClr val="D5DAE3"/>
-                      </a:solidFill>
-                      <a:prstDash val="solid"/>
-                      <a:round/>
-                      <a:headEnd type="none" w="med" len="med"/>
-                      <a:tailEnd type="none" w="med" len="med"/>
-                    </a:lnB>
-                    <a:solidFill>
-                      <a:srgbClr val="FFFFFF"/>
-                    </a:solidFill>
-                  </a:tcPr>
-                </a:tc>
-                <a:tc>
-                  <a:txBody>
-                    <a:bodyPr/>
-                    <a:lstStyle/>
-                    <a:p>
-                      <a:pPr algn="ctr" indent="0" marL="0">
-                        <a:buNone/>
-                      </a:pPr>
-                      <a:r>
-                        <a:rPr lang="en-US" sz="1150" dirty="0">
-                          <a:solidFill>
-                            <a:srgbClr val="1A1A1A"/>
-                          </a:solidFill>
-                          <a:latin typeface="Meiryo" pitchFamily="34" charset="0"/>
-                          <a:ea typeface="Meiryo" pitchFamily="34" charset="-122"/>
-                          <a:cs typeface="Meiryo" pitchFamily="34" charset="-120"/>
-                        </a:rPr>
-                        <a:t>285億円</a:t>
-                      </a:r>
-                      <a:endParaRPr lang="en-US" sz="1150" dirty="0">
-                        <a:latin typeface="Meiryo" charset="0"/>
-                        <a:ea typeface="Meiryo" charset="0"/>
-                        <a:cs typeface="Meiryo" charset="0"/>
-                      </a:endParaRPr>
-                    </a:p>
-                  </a:txBody>
-                  <a:tcPr marL="91440" marR="91440" marT="45720" marB="45720" anchor="ctr">
-                    <a:lnL w="9525" cap="flat" cmpd="sng" algn="ctr">
-                      <a:solidFill>
-                        <a:srgbClr val="D5DAE3"/>
-                      </a:solidFill>
-                      <a:prstDash val="solid"/>
-                      <a:round/>
-                      <a:headEnd type="none" w="med" len="med"/>
-                      <a:tailEnd type="none" w="med" len="med"/>
-                    </a:lnL>
-                    <a:lnR w="9525" cap="flat" cmpd="sng" algn="ctr">
-                      <a:solidFill>
-                        <a:srgbClr val="D5DAE3"/>
-                      </a:solidFill>
-                      <a:prstDash val="solid"/>
-                      <a:round/>
-                      <a:headEnd type="none" w="med" len="med"/>
-                      <a:tailEnd type="none" w="med" len="med"/>
-                    </a:lnR>
-                    <a:lnT w="9525" cap="flat" cmpd="sng" algn="ctr">
-                      <a:solidFill>
-                        <a:srgbClr val="D5DAE3"/>
-                      </a:solidFill>
-                      <a:prstDash val="solid"/>
-                      <a:round/>
-                      <a:headEnd type="none" w="med" len="med"/>
-                      <a:tailEnd type="none" w="med" len="med"/>
-                    </a:lnT>
-                    <a:lnB w="9525" cap="flat" cmpd="sng" algn="ctr">
-                      <a:solidFill>
-                        <a:srgbClr val="D5DAE3"/>
-                      </a:solidFill>
-                      <a:prstDash val="solid"/>
-                      <a:round/>
-                      <a:headEnd type="none" w="med" len="med"/>
-                      <a:tailEnd type="none" w="med" len="med"/>
-                    </a:lnB>
-                    <a:solidFill>
-                      <a:srgbClr val="FFFFFF"/>
-                    </a:solidFill>
-                  </a:tcPr>
-                </a:tc>
-                <a:tc>
-                  <a:txBody>
-                    <a:bodyPr/>
-                    <a:lstStyle/>
-                    <a:p>
-                      <a:pPr algn="ctr" indent="0" marL="0">
-                        <a:buNone/>
-                      </a:pPr>
-                      <a:r>
-                        <a:rPr lang="en-US" sz="1150" dirty="0">
-                          <a:solidFill>
-                            <a:srgbClr val="1A1A1A"/>
-                          </a:solidFill>
-                          <a:latin typeface="Meiryo" pitchFamily="34" charset="0"/>
-                          <a:ea typeface="Meiryo" pitchFamily="34" charset="-122"/>
-                          <a:cs typeface="Meiryo" pitchFamily="34" charset="-120"/>
-                        </a:rPr>
-                        <a:t>65億円</a:t>
-                      </a:r>
-                      <a:endParaRPr lang="en-US" sz="1150" dirty="0">
-                        <a:latin typeface="Meiryo" charset="0"/>
-                        <a:ea typeface="Meiryo" charset="0"/>
-                        <a:cs typeface="Meiryo" charset="0"/>
-                      </a:endParaRPr>
-                    </a:p>
-                  </a:txBody>
-                  <a:tcPr marL="91440" marR="91440" marT="45720" marB="45720" anchor="ctr">
-                    <a:lnL w="9525" cap="flat" cmpd="sng" algn="ctr">
-                      <a:solidFill>
-                        <a:srgbClr val="D5DAE3"/>
-                      </a:solidFill>
-                      <a:prstDash val="solid"/>
-                      <a:round/>
-                      <a:headEnd type="none" w="med" len="med"/>
-                      <a:tailEnd type="none" w="med" len="med"/>
-                    </a:lnL>
-                    <a:lnR w="9525" cap="flat" cmpd="sng" algn="ctr">
-                      <a:solidFill>
-                        <a:srgbClr val="D5DAE3"/>
-                      </a:solidFill>
-                      <a:prstDash val="solid"/>
-                      <a:round/>
-                      <a:headEnd type="none" w="med" len="med"/>
-                      <a:tailEnd type="none" w="med" len="med"/>
-                    </a:lnR>
-                    <a:lnT w="9525" cap="flat" cmpd="sng" algn="ctr">
-                      <a:solidFill>
-                        <a:srgbClr val="D5DAE3"/>
-                      </a:solidFill>
-                      <a:prstDash val="solid"/>
-                      <a:round/>
-                      <a:headEnd type="none" w="med" len="med"/>
-                      <a:tailEnd type="none" w="med" len="med"/>
-                    </a:lnT>
-                    <a:lnB w="9525" cap="flat" cmpd="sng" algn="ctr">
-                      <a:solidFill>
-                        <a:srgbClr val="D5DAE3"/>
-                      </a:solidFill>
-                      <a:prstDash val="solid"/>
-                      <a:round/>
-                      <a:headEnd type="none" w="med" len="med"/>
-                      <a:tailEnd type="none" w="med" len="med"/>
-                    </a:lnB>
-                    <a:solidFill>
-                      <a:srgbClr val="FFFFFF"/>
-                    </a:solidFill>
-                  </a:tcPr>
-                </a:tc>
-                <a:tc>
-                  <a:txBody>
-                    <a:bodyPr/>
-                    <a:lstStyle/>
-                    <a:p>
-                      <a:pPr algn="ctr" indent="0" marL="0">
-                        <a:buNone/>
-                      </a:pPr>
-                      <a:r>
-                        <a:rPr lang="en-US" sz="1150" dirty="0">
-                          <a:solidFill>
-                            <a:srgbClr val="1A1A1A"/>
-                          </a:solidFill>
-                          <a:latin typeface="Meiryo" pitchFamily="34" charset="0"/>
-                          <a:ea typeface="Meiryo" pitchFamily="34" charset="-122"/>
-                          <a:cs typeface="Meiryo" pitchFamily="34" charset="-120"/>
-                        </a:rPr>
-                        <a:t>260億円</a:t>
-                      </a:r>
-                      <a:endParaRPr lang="en-US" sz="1150" dirty="0">
-                        <a:latin typeface="Meiryo" charset="0"/>
-                        <a:ea typeface="Meiryo" charset="0"/>
-                        <a:cs typeface="Meiryo" charset="0"/>
-                      </a:endParaRPr>
-                    </a:p>
-                  </a:txBody>
-                  <a:tcPr marL="91440" marR="91440" marT="45720" marB="45720" anchor="ctr">
-                    <a:lnL w="9525" cap="flat" cmpd="sng" algn="ctr">
-                      <a:solidFill>
-                        <a:srgbClr val="D5DAE3"/>
-                      </a:solidFill>
-                      <a:prstDash val="solid"/>
-                      <a:round/>
-                      <a:headEnd type="none" w="med" len="med"/>
-                      <a:tailEnd type="none" w="med" len="med"/>
-                    </a:lnL>
-                    <a:lnR w="9525" cap="flat" cmpd="sng" algn="ctr">
-                      <a:solidFill>
-                        <a:srgbClr val="D5DAE3"/>
-                      </a:solidFill>
-                      <a:prstDash val="solid"/>
-                      <a:round/>
-                      <a:headEnd type="none" w="med" len="med"/>
-                      <a:tailEnd type="none" w="med" len="med"/>
-                    </a:lnR>
-                    <a:lnT w="9525" cap="flat" cmpd="sng" algn="ctr">
-                      <a:solidFill>
-                        <a:srgbClr val="D5DAE3"/>
-                      </a:solidFill>
-                      <a:prstDash val="solid"/>
-                      <a:round/>
-                      <a:headEnd type="none" w="med" len="med"/>
-                      <a:tailEnd type="none" w="med" len="med"/>
-                    </a:lnT>
-                    <a:lnB w="9525" cap="flat" cmpd="sng" algn="ctr">
-                      <a:solidFill>
-                        <a:srgbClr val="D5DAE3"/>
+                        <a:srgbClr val="D9D9E0"/>
                       </a:solidFill>
                       <a:prstDash val="solid"/>
                       <a:round/>
@@ -3758,8 +3746,8 @@
         </p:nvSpPr>
         <p:spPr>
           <a:xfrm>
-            <a:off x="6537960" y="3063240"/>
-            <a:ext cx="5212080" cy="320040"/>
+            <a:off x="6537960" y="2834640"/>
+            <a:ext cx="5212080" cy="292608"/>
           </a:xfrm>
           <a:prstGeom prst="rect">
             <a:avLst/>
@@ -3775,17 +3763,17 @@
               <a:buNone/>
             </a:pPr>
             <a:r>
-              <a:rPr lang="en-US" sz="1400" b="1" dirty="0">
+              <a:rPr lang="en-US" sz="1300" b="1" dirty="0">
                 <a:solidFill>
-                  <a:srgbClr val="1B2A4A"/>
+                  <a:srgbClr val="262630"/>
                 </a:solidFill>
-                <a:latin typeface="Meiryo" pitchFamily="34" charset="0"/>
-                <a:ea typeface="Meiryo" pitchFamily="34" charset="-122"/>
-                <a:cs typeface="Meiryo" pitchFamily="34" charset="-120"/>
+                <a:latin typeface="Yu Gothic" pitchFamily="34" charset="0"/>
+                <a:ea typeface="Yu Gothic" pitchFamily="34" charset="-122"/>
+                <a:cs typeface="Yu Gothic" pitchFamily="34" charset="-120"/>
               </a:rPr>
               <a:t>C&amp;D営業利益：実績9.3億円からの利益成長コミット（億円）</a:t>
             </a:r>
-            <a:endParaRPr lang="en-US" sz="1400" dirty="0"/>
+            <a:endParaRPr lang="en-US" sz="1300" dirty="0"/>
           </a:p>
         </p:txBody>
       </p:sp>
@@ -3796,8 +3784,8 @@
           <p:nvPr/>
         </p:nvGraphicFramePr>
         <p:xfrm>
-          <a:off x="6537960" y="3429000"/>
-          <a:ext cx="5193792" cy="2788920"/>
+          <a:off x="6537960" y="3154680"/>
+          <a:ext cx="5148072" cy="2514600"/>
         </p:xfrm>
         <a:graphic xmlns:a="http://schemas.openxmlformats.org/drawingml/2006/main">
           <a:graphicData uri="http://schemas.openxmlformats.org/drawingml/2006/chart">
@@ -3807,14 +3795,54 @@
       </p:graphicFrame>
       <p:sp>
         <p:nvSpPr>
-          <p:cNvPr id="24" name="Text 20"/>
-          <p:cNvSpPr/>
-          <p:nvPr/>
-        </p:nvSpPr>
-        <p:spPr>
-          <a:xfrm>
-            <a:off x="6537960" y="6263640"/>
-            <a:ext cx="5193792" cy="320040"/>
+          <p:cNvPr id="24" name="Shape 20"/>
+          <p:cNvSpPr/>
+          <p:nvPr/>
+        </p:nvSpPr>
+        <p:spPr>
+          <a:xfrm>
+            <a:off x="502920" y="5806440"/>
+            <a:ext cx="11183112" cy="530352"/>
+          </a:xfrm>
+          <a:prstGeom prst="rect">
+            <a:avLst/>
+          </a:prstGeom>
+          <a:solidFill>
+            <a:srgbClr val="F3EFFB"/>
+          </a:solidFill>
+          <a:ln/>
+        </p:spPr>
+      </p:sp>
+      <p:sp>
+        <p:nvSpPr>
+          <p:cNvPr id="25" name="Shape 21"/>
+          <p:cNvSpPr/>
+          <p:nvPr/>
+        </p:nvSpPr>
+        <p:spPr>
+          <a:xfrm>
+            <a:off x="502920" y="5806440"/>
+            <a:ext cx="50292" cy="530352"/>
+          </a:xfrm>
+          <a:prstGeom prst="rect">
+            <a:avLst/>
+          </a:prstGeom>
+          <a:solidFill>
+            <a:srgbClr val="7823DC"/>
+          </a:solidFill>
+          <a:ln/>
+        </p:spPr>
+      </p:sp>
+      <p:sp>
+        <p:nvSpPr>
+          <p:cNvPr id="26" name="Text 22"/>
+          <p:cNvSpPr/>
+          <p:nvPr/>
+        </p:nvSpPr>
+        <p:spPr>
+          <a:xfrm>
+            <a:off x="777240" y="5806440"/>
+            <a:ext cx="10835640" cy="530352"/>
           </a:xfrm>
           <a:prstGeom prst="rect">
             <a:avLst/>
@@ -3830,17 +3858,129 @@
               <a:buNone/>
             </a:pPr>
             <a:r>
-              <a:rPr lang="en-US" sz="1200" b="1" dirty="0">
+              <a:rPr lang="en-US" sz="1250" b="1" dirty="0">
                 <a:solidFill>
-                  <a:srgbClr val="C8102E"/>
+                  <a:srgbClr val="7823DC"/>
                 </a:solidFill>
-                <a:latin typeface="Meiryo" pitchFamily="34" charset="0"/>
-                <a:ea typeface="Meiryo" pitchFamily="34" charset="-122"/>
-                <a:cs typeface="Meiryo" pitchFamily="34" charset="-120"/>
+                <a:latin typeface="Yu Gothic" pitchFamily="34" charset="0"/>
+                <a:ea typeface="Yu Gothic" pitchFamily="34" charset="-122"/>
+                <a:cs typeface="Yu Gothic" pitchFamily="34" charset="-120"/>
               </a:rPr>
-              <a:t>部長陣は、この利益成長を支える実行主体である。</a:t>
-            </a:r>
-            <a:endParaRPr lang="en-US" sz="1200" dirty="0"/>
+              <a:t>この場で覚えて帰ってほしいこと　</a:t>
+            </a:r>
+            <a:pPr indent="0" marL="0">
+              <a:buNone/>
+            </a:pPr>
+            <a:r>
+              <a:rPr lang="en-US" sz="1250" dirty="0">
+                <a:solidFill>
+                  <a:srgbClr val="262630"/>
+                </a:solidFill>
+                <a:latin typeface="Yu Gothic" pitchFamily="34" charset="0"/>
+                <a:ea typeface="Yu Gothic" pitchFamily="34" charset="-122"/>
+                <a:cs typeface="Yu Gothic" pitchFamily="34" charset="-120"/>
+              </a:rPr>
+              <a:t>部長陣は、45→55→65億円の利益成長を支える実行主体である。</a:t>
+            </a:r>
+            <a:endParaRPr lang="en-US" sz="1250" dirty="0"/>
+          </a:p>
+        </p:txBody>
+      </p:sp>
+      <p:sp>
+        <p:nvSpPr>
+          <p:cNvPr id="27" name="Shape 23"/>
+          <p:cNvSpPr/>
+          <p:nvPr/>
+        </p:nvSpPr>
+        <p:spPr>
+          <a:xfrm>
+            <a:off x="502920" y="6473952"/>
+            <a:ext cx="11183112" cy="7315"/>
+          </a:xfrm>
+          <a:prstGeom prst="rect">
+            <a:avLst/>
+          </a:prstGeom>
+          <a:solidFill>
+            <a:srgbClr val="D9D9E0"/>
+          </a:solidFill>
+          <a:ln/>
+        </p:spPr>
+      </p:sp>
+      <p:sp>
+        <p:nvSpPr>
+          <p:cNvPr id="28" name="Text 24"/>
+          <p:cNvSpPr/>
+          <p:nvPr/>
+        </p:nvSpPr>
+        <p:spPr>
+          <a:xfrm>
+            <a:off x="502920" y="6519672"/>
+            <a:ext cx="8229600" cy="256032"/>
+          </a:xfrm>
+          <a:prstGeom prst="rect">
+            <a:avLst/>
+          </a:prstGeom>
+          <a:noFill/>
+          <a:ln/>
+        </p:spPr>
+        <p:txBody>
+          <a:bodyPr wrap="square" lIns="0" tIns="0" rIns="0" bIns="0" rtlCol="0" anchor="ctr"/>
+          <a:lstStyle/>
+          <a:p>
+            <a:pPr indent="0" marL="0">
+              <a:buNone/>
+            </a:pPr>
+            <a:r>
+              <a:rPr lang="en-US" sz="850" dirty="0">
+                <a:solidFill>
+                  <a:srgbClr val="5F5F6E"/>
+                </a:solidFill>
+                <a:latin typeface="Yu Gothic" pitchFamily="34" charset="0"/>
+                <a:ea typeface="Yu Gothic" pitchFamily="34" charset="-122"/>
+                <a:cs typeface="Yu Gothic" pitchFamily="34" charset="-120"/>
+              </a:rPr>
+              <a:t>円谷フィールズホールディングス／円谷プロダクション｜部長会資料（社外秘）</a:t>
+            </a:r>
+            <a:endParaRPr lang="en-US" sz="850" dirty="0"/>
+          </a:p>
+        </p:txBody>
+      </p:sp>
+      <p:sp>
+        <p:nvSpPr>
+          <p:cNvPr id="29" name="Text 25"/>
+          <p:cNvSpPr/>
+          <p:nvPr/>
+        </p:nvSpPr>
+        <p:spPr>
+          <a:xfrm>
+            <a:off x="11247120" y="6519672"/>
+            <a:ext cx="438912" cy="256032"/>
+          </a:xfrm>
+          <a:prstGeom prst="rect">
+            <a:avLst/>
+          </a:prstGeom>
+          <a:noFill/>
+          <a:ln/>
+        </p:spPr>
+        <p:txBody>
+          <a:bodyPr wrap="square" lIns="0" tIns="0" rIns="0" bIns="0" rtlCol="0" anchor="ctr"/>
+          <a:lstStyle/>
+          <a:p>
+            <a:pPr algn="r" indent="0" marL="0">
+              <a:buNone/>
+            </a:pPr>
+            <a:r>
+              <a:rPr lang="en-US" sz="900" dirty="0">
+                <a:solidFill>
+                  <a:srgbClr val="5F5F6E"/>
+                </a:solidFill>
+                <a:latin typeface="Yu Gothic" pitchFamily="34" charset="0"/>
+                <a:ea typeface="Yu Gothic" pitchFamily="34" charset="-122"/>
+                <a:cs typeface="Yu Gothic" pitchFamily="34" charset="-120"/>
+              </a:rPr>
+              <a:t>2</a:t>
+            </a:r>
+            <a:endParaRPr lang="en-US" sz="900" dirty="0"/>
           </a:p>
         </p:txBody>
       </p:sp>
@@ -3884,8 +4024,8 @@
         </p:nvSpPr>
         <p:spPr>
           <a:xfrm>
-            <a:off x="457200" y="320040"/>
-            <a:ext cx="8686800" cy="548640"/>
+            <a:off x="502920" y="274320"/>
+            <a:ext cx="11155680" cy="292608"/>
           </a:xfrm>
           <a:prstGeom prst="rect">
             <a:avLst/>
@@ -3901,17 +4041,17 @@
               <a:buNone/>
             </a:pPr>
             <a:r>
-              <a:rPr lang="en-US" sz="2600" b="1" dirty="0">
+              <a:rPr lang="en-US" sz="1150" b="1" dirty="0">
                 <a:solidFill>
-                  <a:srgbClr val="1B2A4A"/>
+                  <a:srgbClr val="7823DC"/>
                 </a:solidFill>
-                <a:latin typeface="Meiryo" pitchFamily="34" charset="0"/>
-                <a:ea typeface="Meiryo" pitchFamily="34" charset="-122"/>
-                <a:cs typeface="Meiryo" pitchFamily="34" charset="-120"/>
+                <a:latin typeface="Yu Gothic" pitchFamily="34" charset="0"/>
+                <a:ea typeface="Yu Gothic" pitchFamily="34" charset="-122"/>
+                <a:cs typeface="Yu Gothic" pitchFamily="34" charset="-120"/>
               </a:rPr>
-              <a:t>2｜なぜ「今」が極めて重要なのか</a:t>
-            </a:r>
-            <a:endParaRPr lang="en-US" sz="2600" dirty="0"/>
+              <a:t>なぜ今か</a:t>
+            </a:r>
+            <a:endParaRPr lang="en-US" sz="1150" dirty="0"/>
           </a:p>
         </p:txBody>
       </p:sp>
@@ -3923,8 +4063,1004 @@
         </p:nvSpPr>
         <p:spPr>
           <a:xfrm>
-            <a:off x="457200" y="868680"/>
-            <a:ext cx="10972800" cy="320040"/>
+            <a:off x="502920" y="566928"/>
+            <a:ext cx="11155680" cy="502920"/>
+          </a:xfrm>
+          <a:prstGeom prst="rect">
+            <a:avLst/>
+          </a:prstGeom>
+          <a:noFill/>
+          <a:ln/>
+        </p:spPr>
+        <p:txBody>
+          <a:bodyPr wrap="square" lIns="0" tIns="0" rIns="0" bIns="0" rtlCol="0" anchor="t"/>
+          <a:lstStyle/>
+          <a:p>
+            <a:pPr indent="0" marL="0">
+              <a:buNone/>
+            </a:pPr>
+            <a:r>
+              <a:rPr lang="en-US" sz="2200" b="1" dirty="0">
+                <a:solidFill>
+                  <a:srgbClr val="262630"/>
+                </a:solidFill>
+                <a:latin typeface="Yu Gothic" pitchFamily="34" charset="0"/>
+                <a:ea typeface="Yu Gothic" pitchFamily="34" charset="-122"/>
+                <a:cs typeface="Yu Gothic" pitchFamily="34" charset="-120"/>
+              </a:rPr>
+              <a:t>なぜ「今」が極めて重要なのか</a:t>
+            </a:r>
+            <a:endParaRPr lang="en-US" sz="2200" dirty="0"/>
+          </a:p>
+        </p:txBody>
+      </p:sp>
+      <p:sp>
+        <p:nvSpPr>
+          <p:cNvPr id="4" name="Shape 2"/>
+          <p:cNvSpPr/>
+          <p:nvPr/>
+        </p:nvSpPr>
+        <p:spPr>
+          <a:xfrm>
+            <a:off x="502920" y="1234440"/>
+            <a:ext cx="1554480" cy="36576"/>
+          </a:xfrm>
+          <a:prstGeom prst="rect">
+            <a:avLst/>
+          </a:prstGeom>
+          <a:solidFill>
+            <a:srgbClr val="7823DC"/>
+          </a:solidFill>
+          <a:ln/>
+        </p:spPr>
+      </p:sp>
+      <p:sp>
+        <p:nvSpPr>
+          <p:cNvPr id="5" name="Text 3"/>
+          <p:cNvSpPr/>
+          <p:nvPr/>
+        </p:nvSpPr>
+        <p:spPr>
+          <a:xfrm>
+            <a:off x="502920" y="1325880"/>
+            <a:ext cx="11155680" cy="320040"/>
+          </a:xfrm>
+          <a:prstGeom prst="rect">
+            <a:avLst/>
+          </a:prstGeom>
+          <a:noFill/>
+          <a:ln/>
+        </p:spPr>
+        <p:txBody>
+          <a:bodyPr wrap="square" lIns="0" tIns="0" rIns="0" bIns="0" rtlCol="0" anchor="t"/>
+          <a:lstStyle/>
+          <a:p>
+            <a:pPr indent="0" marL="0">
+              <a:buNone/>
+            </a:pPr>
+            <a:r>
+              <a:rPr lang="en-US" sz="1300" b="1" dirty="0">
+                <a:solidFill>
+                  <a:srgbClr val="262630"/>
+                </a:solidFill>
+                <a:latin typeface="Yu Gothic" pitchFamily="34" charset="0"/>
+                <a:ea typeface="Yu Gothic" pitchFamily="34" charset="-122"/>
+                <a:cs typeface="Yu Gothic" pitchFamily="34" charset="-120"/>
+              </a:rPr>
+              <a:t>上方修正後の局面を、5つの経営論点で捉えます</a:t>
+            </a:r>
+            <a:endParaRPr lang="en-US" sz="1300" dirty="0"/>
+          </a:p>
+        </p:txBody>
+      </p:sp>
+      <p:graphicFrame>
+        <p:nvGraphicFramePr>
+          <p:cNvPr id="4" name="Table 0"/>
+          <p:cNvGraphicFramePr>
+            <a:graphicFrameLocks noGrp="1"/>
+          </p:cNvGraphicFramePr>
+          <p:nvPr>
+            <p:extLst>
+              <p:ext uri="{D42A27DB-BD31-4B8C-83A1-F6EECF244321}">
+                <p14:modId xmlns:p14="http://schemas.microsoft.com/office/powerpoint/2010/main" val="1579011935"/>
+              </p:ext>
+            </p:extLst>
+          </p:nvPr>
+        </p:nvGraphicFramePr>
+        <p:xfrm>
+          <a:off x="502920" y="1828800"/>
+          <a:ext cx="11183112" cy="914400"/>
+        </p:xfrm>
+        <a:graphic>
+          <a:graphicData uri="http://schemas.openxmlformats.org/drawingml/2006/table">
+            <a:tbl>
+              <a:tblPr/>
+              <a:tblGrid>
+                <a:gridCol w="3429000"/>
+                <a:gridCol w="7754112"/>
+              </a:tblGrid>
+              <a:tr h="603504">
+                <a:tc>
+                  <a:txBody>
+                    <a:bodyPr/>
+                    <a:lstStyle/>
+                    <a:p>
+                      <a:pPr algn="l" indent="0" marL="0">
+                        <a:buNone/>
+                      </a:pPr>
+                      <a:r>
+                        <a:rPr lang="en-US" sz="1100" b="1" dirty="0">
+                          <a:solidFill>
+                            <a:srgbClr val="FFFFFF"/>
+                          </a:solidFill>
+                          <a:latin typeface="Yu Gothic" pitchFamily="34" charset="0"/>
+                          <a:ea typeface="Yu Gothic" pitchFamily="34" charset="-122"/>
+                          <a:cs typeface="Yu Gothic" pitchFamily="34" charset="-120"/>
+                        </a:rPr>
+                        <a:t>経営論点</a:t>
+                      </a:r>
+                      <a:endParaRPr lang="en-US" sz="1100" dirty="0">
+                        <a:latin typeface="Yu Gothic" charset="0"/>
+                        <a:ea typeface="Yu Gothic" charset="0"/>
+                        <a:cs typeface="Yu Gothic" charset="0"/>
+                      </a:endParaRPr>
+                    </a:p>
+                  </a:txBody>
+                  <a:tcPr marL="109728" marR="109728" marT="54864" marB="54864" anchor="ctr">
+                    <a:lnL w="9525" cap="flat" cmpd="sng" algn="ctr">
+                      <a:solidFill>
+                        <a:srgbClr val="D9D9E0"/>
+                      </a:solidFill>
+                      <a:prstDash val="solid"/>
+                      <a:round/>
+                      <a:headEnd type="none" w="med" len="med"/>
+                      <a:tailEnd type="none" w="med" len="med"/>
+                    </a:lnL>
+                    <a:lnR w="9525" cap="flat" cmpd="sng" algn="ctr">
+                      <a:solidFill>
+                        <a:srgbClr val="D9D9E0"/>
+                      </a:solidFill>
+                      <a:prstDash val="solid"/>
+                      <a:round/>
+                      <a:headEnd type="none" w="med" len="med"/>
+                      <a:tailEnd type="none" w="med" len="med"/>
+                    </a:lnR>
+                    <a:lnT w="9525" cap="flat" cmpd="sng" algn="ctr">
+                      <a:solidFill>
+                        <a:srgbClr val="D9D9E0"/>
+                      </a:solidFill>
+                      <a:prstDash val="solid"/>
+                      <a:round/>
+                      <a:headEnd type="none" w="med" len="med"/>
+                      <a:tailEnd type="none" w="med" len="med"/>
+                    </a:lnT>
+                    <a:lnB w="9525" cap="flat" cmpd="sng" algn="ctr">
+                      <a:solidFill>
+                        <a:srgbClr val="D9D9E0"/>
+                      </a:solidFill>
+                      <a:prstDash val="solid"/>
+                      <a:round/>
+                      <a:headEnd type="none" w="med" len="med"/>
+                      <a:tailEnd type="none" w="med" len="med"/>
+                    </a:lnB>
+                    <a:solidFill>
+                      <a:srgbClr val="3A106E"/>
+                    </a:solidFill>
+                  </a:tcPr>
+                </a:tc>
+                <a:tc>
+                  <a:txBody>
+                    <a:bodyPr/>
+                    <a:lstStyle/>
+                    <a:p>
+                      <a:pPr algn="l" indent="0" marL="0">
+                        <a:buNone/>
+                      </a:pPr>
+                      <a:r>
+                        <a:rPr lang="en-US" sz="1100" b="1" dirty="0">
+                          <a:solidFill>
+                            <a:srgbClr val="FFFFFF"/>
+                          </a:solidFill>
+                          <a:latin typeface="Yu Gothic" pitchFamily="34" charset="0"/>
+                          <a:ea typeface="Yu Gothic" pitchFamily="34" charset="-122"/>
+                          <a:cs typeface="Yu Gothic" pitchFamily="34" charset="-120"/>
+                        </a:rPr>
+                        <a:t>部長会で共有すべき含意</a:t>
+                      </a:r>
+                      <a:endParaRPr lang="en-US" sz="1100" dirty="0">
+                        <a:latin typeface="Yu Gothic" charset="0"/>
+                        <a:ea typeface="Yu Gothic" charset="0"/>
+                        <a:cs typeface="Yu Gothic" charset="0"/>
+                      </a:endParaRPr>
+                    </a:p>
+                  </a:txBody>
+                  <a:tcPr marL="109728" marR="109728" marT="54864" marB="54864" anchor="ctr">
+                    <a:lnL w="9525" cap="flat" cmpd="sng" algn="ctr">
+                      <a:solidFill>
+                        <a:srgbClr val="D9D9E0"/>
+                      </a:solidFill>
+                      <a:prstDash val="solid"/>
+                      <a:round/>
+                      <a:headEnd type="none" w="med" len="med"/>
+                      <a:tailEnd type="none" w="med" len="med"/>
+                    </a:lnL>
+                    <a:lnR w="9525" cap="flat" cmpd="sng" algn="ctr">
+                      <a:solidFill>
+                        <a:srgbClr val="D9D9E0"/>
+                      </a:solidFill>
+                      <a:prstDash val="solid"/>
+                      <a:round/>
+                      <a:headEnd type="none" w="med" len="med"/>
+                      <a:tailEnd type="none" w="med" len="med"/>
+                    </a:lnR>
+                    <a:lnT w="9525" cap="flat" cmpd="sng" algn="ctr">
+                      <a:solidFill>
+                        <a:srgbClr val="D9D9E0"/>
+                      </a:solidFill>
+                      <a:prstDash val="solid"/>
+                      <a:round/>
+                      <a:headEnd type="none" w="med" len="med"/>
+                      <a:tailEnd type="none" w="med" len="med"/>
+                    </a:lnT>
+                    <a:lnB w="9525" cap="flat" cmpd="sng" algn="ctr">
+                      <a:solidFill>
+                        <a:srgbClr val="D9D9E0"/>
+                      </a:solidFill>
+                      <a:prstDash val="solid"/>
+                      <a:round/>
+                      <a:headEnd type="none" w="med" len="med"/>
+                      <a:tailEnd type="none" w="med" len="med"/>
+                    </a:lnB>
+                    <a:solidFill>
+                      <a:srgbClr val="3A106E"/>
+                    </a:solidFill>
+                  </a:tcPr>
+                </a:tc>
+              </a:tr>
+              <a:tr h="603504">
+                <a:tc>
+                  <a:txBody>
+                    <a:bodyPr/>
+                    <a:lstStyle/>
+                    <a:p>
+                      <a:pPr algn="l" indent="0" marL="0">
+                        <a:buNone/>
+                      </a:pPr>
+                      <a:r>
+                        <a:rPr lang="en-US" sz="1100" b="1" dirty="0">
+                          <a:solidFill>
+                            <a:srgbClr val="3A106E"/>
+                          </a:solidFill>
+                          <a:latin typeface="Yu Gothic" pitchFamily="34" charset="0"/>
+                          <a:ea typeface="Yu Gothic" pitchFamily="34" charset="-122"/>
+                          <a:cs typeface="Yu Gothic" pitchFamily="34" charset="-120"/>
+                        </a:rPr>
+                        <a:t>1｜市場への約束が拘束力を持った</a:t>
+                      </a:r>
+                      <a:endParaRPr lang="en-US" sz="1100" dirty="0">
+                        <a:latin typeface="Yu Gothic" charset="0"/>
+                        <a:ea typeface="Yu Gothic" charset="0"/>
+                        <a:cs typeface="Yu Gothic" charset="0"/>
+                      </a:endParaRPr>
+                    </a:p>
+                  </a:txBody>
+                  <a:tcPr marL="109728" marR="109728" marT="54864" marB="54864" anchor="ctr">
+                    <a:lnL w="9525" cap="flat" cmpd="sng" algn="ctr">
+                      <a:solidFill>
+                        <a:srgbClr val="D9D9E0"/>
+                      </a:solidFill>
+                      <a:prstDash val="solid"/>
+                      <a:round/>
+                      <a:headEnd type="none" w="med" len="med"/>
+                      <a:tailEnd type="none" w="med" len="med"/>
+                    </a:lnL>
+                    <a:lnR w="9525" cap="flat" cmpd="sng" algn="ctr">
+                      <a:solidFill>
+                        <a:srgbClr val="D9D9E0"/>
+                      </a:solidFill>
+                      <a:prstDash val="solid"/>
+                      <a:round/>
+                      <a:headEnd type="none" w="med" len="med"/>
+                      <a:tailEnd type="none" w="med" len="med"/>
+                    </a:lnR>
+                    <a:lnT w="9525" cap="flat" cmpd="sng" algn="ctr">
+                      <a:solidFill>
+                        <a:srgbClr val="D9D9E0"/>
+                      </a:solidFill>
+                      <a:prstDash val="solid"/>
+                      <a:round/>
+                      <a:headEnd type="none" w="med" len="med"/>
+                      <a:tailEnd type="none" w="med" len="med"/>
+                    </a:lnT>
+                    <a:lnB w="9525" cap="flat" cmpd="sng" algn="ctr">
+                      <a:solidFill>
+                        <a:srgbClr val="D9D9E0"/>
+                      </a:solidFill>
+                      <a:prstDash val="solid"/>
+                      <a:round/>
+                      <a:headEnd type="none" w="med" len="med"/>
+                      <a:tailEnd type="none" w="med" len="med"/>
+                    </a:lnB>
+                    <a:solidFill>
+                      <a:srgbClr val="FFFFFF"/>
+                    </a:solidFill>
+                  </a:tcPr>
+                </a:tc>
+                <a:tc>
+                  <a:txBody>
+                    <a:bodyPr/>
+                    <a:lstStyle/>
+                    <a:p>
+                      <a:pPr algn="l" indent="0" marL="0">
+                        <a:buNone/>
+                      </a:pPr>
+                      <a:r>
+                        <a:rPr lang="en-US" sz="1100" dirty="0">
+                          <a:solidFill>
+                            <a:srgbClr val="262630"/>
+                          </a:solidFill>
+                          <a:latin typeface="Yu Gothic" pitchFamily="34" charset="0"/>
+                          <a:ea typeface="Yu Gothic" pitchFamily="34" charset="-122"/>
+                          <a:cs typeface="Yu Gothic" pitchFamily="34" charset="-120"/>
+                        </a:rPr>
+                        <a:t>45→55→65億円は外部公表した利益計画。投資家は「何をしたか」ではなく「計画に対し何億円進んだか」を確認する。一部門の遅れが連結業績・配当・企業価値に波及する。</a:t>
+                      </a:r>
+                      <a:endParaRPr lang="en-US" sz="1100" dirty="0">
+                        <a:latin typeface="Yu Gothic" charset="0"/>
+                        <a:ea typeface="Yu Gothic" charset="0"/>
+                        <a:cs typeface="Yu Gothic" charset="0"/>
+                      </a:endParaRPr>
+                    </a:p>
+                  </a:txBody>
+                  <a:tcPr marL="109728" marR="109728" marT="54864" marB="54864" anchor="ctr">
+                    <a:lnL w="9525" cap="flat" cmpd="sng" algn="ctr">
+                      <a:solidFill>
+                        <a:srgbClr val="D9D9E0"/>
+                      </a:solidFill>
+                      <a:prstDash val="solid"/>
+                      <a:round/>
+                      <a:headEnd type="none" w="med" len="med"/>
+                      <a:tailEnd type="none" w="med" len="med"/>
+                    </a:lnL>
+                    <a:lnR w="9525" cap="flat" cmpd="sng" algn="ctr">
+                      <a:solidFill>
+                        <a:srgbClr val="D9D9E0"/>
+                      </a:solidFill>
+                      <a:prstDash val="solid"/>
+                      <a:round/>
+                      <a:headEnd type="none" w="med" len="med"/>
+                      <a:tailEnd type="none" w="med" len="med"/>
+                    </a:lnR>
+                    <a:lnT w="9525" cap="flat" cmpd="sng" algn="ctr">
+                      <a:solidFill>
+                        <a:srgbClr val="D9D9E0"/>
+                      </a:solidFill>
+                      <a:prstDash val="solid"/>
+                      <a:round/>
+                      <a:headEnd type="none" w="med" len="med"/>
+                      <a:tailEnd type="none" w="med" len="med"/>
+                    </a:lnT>
+                    <a:lnB w="9525" cap="flat" cmpd="sng" algn="ctr">
+                      <a:solidFill>
+                        <a:srgbClr val="D9D9E0"/>
+                      </a:solidFill>
+                      <a:prstDash val="solid"/>
+                      <a:round/>
+                      <a:headEnd type="none" w="med" len="med"/>
+                      <a:tailEnd type="none" w="med" len="med"/>
+                    </a:lnB>
+                    <a:solidFill>
+                      <a:srgbClr val="FFFFFF"/>
+                    </a:solidFill>
+                  </a:tcPr>
+                </a:tc>
+              </a:tr>
+              <a:tr h="603504">
+                <a:tc>
+                  <a:txBody>
+                    <a:bodyPr/>
+                    <a:lstStyle/>
+                    <a:p>
+                      <a:pPr algn="l" indent="0" marL="0">
+                        <a:buNone/>
+                      </a:pPr>
+                      <a:r>
+                        <a:rPr lang="en-US" sz="1100" b="1" dirty="0">
+                          <a:solidFill>
+                            <a:srgbClr val="3A106E"/>
+                          </a:solidFill>
+                          <a:latin typeface="Yu Gothic" pitchFamily="34" charset="0"/>
+                          <a:ea typeface="Yu Gothic" pitchFamily="34" charset="-122"/>
+                          <a:cs typeface="Yu Gothic" pitchFamily="34" charset="-120"/>
+                        </a:rPr>
+                        <a:t>2｜評価軸がコスト改革から成長改革へ</a:t>
+                      </a:r>
+                      <a:endParaRPr lang="en-US" sz="1100" dirty="0">
+                        <a:latin typeface="Yu Gothic" charset="0"/>
+                        <a:ea typeface="Yu Gothic" charset="0"/>
+                        <a:cs typeface="Yu Gothic" charset="0"/>
+                      </a:endParaRPr>
+                    </a:p>
+                  </a:txBody>
+                  <a:tcPr marL="109728" marR="109728" marT="54864" marB="54864" anchor="ctr">
+                    <a:lnL w="9525" cap="flat" cmpd="sng" algn="ctr">
+                      <a:solidFill>
+                        <a:srgbClr val="D9D9E0"/>
+                      </a:solidFill>
+                      <a:prstDash val="solid"/>
+                      <a:round/>
+                      <a:headEnd type="none" w="med" len="med"/>
+                      <a:tailEnd type="none" w="med" len="med"/>
+                    </a:lnL>
+                    <a:lnR w="9525" cap="flat" cmpd="sng" algn="ctr">
+                      <a:solidFill>
+                        <a:srgbClr val="D9D9E0"/>
+                      </a:solidFill>
+                      <a:prstDash val="solid"/>
+                      <a:round/>
+                      <a:headEnd type="none" w="med" len="med"/>
+                      <a:tailEnd type="none" w="med" len="med"/>
+                    </a:lnR>
+                    <a:lnT w="9525" cap="flat" cmpd="sng" algn="ctr">
+                      <a:solidFill>
+                        <a:srgbClr val="D9D9E0"/>
+                      </a:solidFill>
+                      <a:prstDash val="solid"/>
+                      <a:round/>
+                      <a:headEnd type="none" w="med" len="med"/>
+                      <a:tailEnd type="none" w="med" len="med"/>
+                    </a:lnT>
+                    <a:lnB w="9525" cap="flat" cmpd="sng" algn="ctr">
+                      <a:solidFill>
+                        <a:srgbClr val="D9D9E0"/>
+                      </a:solidFill>
+                      <a:prstDash val="solid"/>
+                      <a:round/>
+                      <a:headEnd type="none" w="med" len="med"/>
+                      <a:tailEnd type="none" w="med" len="med"/>
+                    </a:lnB>
+                    <a:solidFill>
+                      <a:srgbClr val="F7F7F9"/>
+                    </a:solidFill>
+                  </a:tcPr>
+                </a:tc>
+                <a:tc>
+                  <a:txBody>
+                    <a:bodyPr/>
+                    <a:lstStyle/>
+                    <a:p>
+                      <a:pPr algn="l" indent="0" marL="0">
+                        <a:buNone/>
+                      </a:pPr>
+                      <a:r>
+                        <a:rPr lang="en-US" sz="1100" dirty="0">
+                          <a:solidFill>
+                            <a:srgbClr val="262630"/>
+                          </a:solidFill>
+                          <a:latin typeface="Yu Gothic" pitchFamily="34" charset="0"/>
+                          <a:ea typeface="Yu Gothic" pitchFamily="34" charset="-122"/>
+                          <a:cs typeface="Yu Gothic" pitchFamily="34" charset="-120"/>
+                        </a:rPr>
+                        <a:t>問われるのは費用を抑えたことではなく、売上・粗利・営業利益を増やしたこと。部門計画は「費用内で実行」から「投資対効果を伴う成長」へ切り替える。</a:t>
+                      </a:r>
+                      <a:endParaRPr lang="en-US" sz="1100" dirty="0">
+                        <a:latin typeface="Yu Gothic" charset="0"/>
+                        <a:ea typeface="Yu Gothic" charset="0"/>
+                        <a:cs typeface="Yu Gothic" charset="0"/>
+                      </a:endParaRPr>
+                    </a:p>
+                  </a:txBody>
+                  <a:tcPr marL="109728" marR="109728" marT="54864" marB="54864" anchor="ctr">
+                    <a:lnL w="9525" cap="flat" cmpd="sng" algn="ctr">
+                      <a:solidFill>
+                        <a:srgbClr val="D9D9E0"/>
+                      </a:solidFill>
+                      <a:prstDash val="solid"/>
+                      <a:round/>
+                      <a:headEnd type="none" w="med" len="med"/>
+                      <a:tailEnd type="none" w="med" len="med"/>
+                    </a:lnL>
+                    <a:lnR w="9525" cap="flat" cmpd="sng" algn="ctr">
+                      <a:solidFill>
+                        <a:srgbClr val="D9D9E0"/>
+                      </a:solidFill>
+                      <a:prstDash val="solid"/>
+                      <a:round/>
+                      <a:headEnd type="none" w="med" len="med"/>
+                      <a:tailEnd type="none" w="med" len="med"/>
+                    </a:lnR>
+                    <a:lnT w="9525" cap="flat" cmpd="sng" algn="ctr">
+                      <a:solidFill>
+                        <a:srgbClr val="D9D9E0"/>
+                      </a:solidFill>
+                      <a:prstDash val="solid"/>
+                      <a:round/>
+                      <a:headEnd type="none" w="med" len="med"/>
+                      <a:tailEnd type="none" w="med" len="med"/>
+                    </a:lnT>
+                    <a:lnB w="9525" cap="flat" cmpd="sng" algn="ctr">
+                      <a:solidFill>
+                        <a:srgbClr val="D9D9E0"/>
+                      </a:solidFill>
+                      <a:prstDash val="solid"/>
+                      <a:round/>
+                      <a:headEnd type="none" w="med" len="med"/>
+                      <a:tailEnd type="none" w="med" len="med"/>
+                    </a:lnB>
+                    <a:solidFill>
+                      <a:srgbClr val="F7F7F9"/>
+                    </a:solidFill>
+                  </a:tcPr>
+                </a:tc>
+              </a:tr>
+              <a:tr h="603504">
+                <a:tc>
+                  <a:txBody>
+                    <a:bodyPr/>
+                    <a:lstStyle/>
+                    <a:p>
+                      <a:pPr algn="l" indent="0" marL="0">
+                        <a:buNone/>
+                      </a:pPr>
+                      <a:r>
+                        <a:rPr lang="en-US" sz="1100" b="1" dirty="0">
+                          <a:solidFill>
+                            <a:srgbClr val="3A106E"/>
+                          </a:solidFill>
+                          <a:latin typeface="Yu Gothic" pitchFamily="34" charset="0"/>
+                          <a:ea typeface="Yu Gothic" pitchFamily="34" charset="-122"/>
+                          <a:cs typeface="Yu Gothic" pitchFamily="34" charset="-120"/>
+                        </a:rPr>
+                        <a:t>3｜営業改革が会社の公式戦略になった</a:t>
+                      </a:r>
+                      <a:endParaRPr lang="en-US" sz="1100" dirty="0">
+                        <a:latin typeface="Yu Gothic" charset="0"/>
+                        <a:ea typeface="Yu Gothic" charset="0"/>
+                        <a:cs typeface="Yu Gothic" charset="0"/>
+                      </a:endParaRPr>
+                    </a:p>
+                  </a:txBody>
+                  <a:tcPr marL="109728" marR="109728" marT="54864" marB="54864" anchor="ctr">
+                    <a:lnL w="9525" cap="flat" cmpd="sng" algn="ctr">
+                      <a:solidFill>
+                        <a:srgbClr val="D9D9E0"/>
+                      </a:solidFill>
+                      <a:prstDash val="solid"/>
+                      <a:round/>
+                      <a:headEnd type="none" w="med" len="med"/>
+                      <a:tailEnd type="none" w="med" len="med"/>
+                    </a:lnL>
+                    <a:lnR w="9525" cap="flat" cmpd="sng" algn="ctr">
+                      <a:solidFill>
+                        <a:srgbClr val="D9D9E0"/>
+                      </a:solidFill>
+                      <a:prstDash val="solid"/>
+                      <a:round/>
+                      <a:headEnd type="none" w="med" len="med"/>
+                      <a:tailEnd type="none" w="med" len="med"/>
+                    </a:lnR>
+                    <a:lnT w="9525" cap="flat" cmpd="sng" algn="ctr">
+                      <a:solidFill>
+                        <a:srgbClr val="D9D9E0"/>
+                      </a:solidFill>
+                      <a:prstDash val="solid"/>
+                      <a:round/>
+                      <a:headEnd type="none" w="med" len="med"/>
+                      <a:tailEnd type="none" w="med" len="med"/>
+                    </a:lnT>
+                    <a:lnB w="9525" cap="flat" cmpd="sng" algn="ctr">
+                      <a:solidFill>
+                        <a:srgbClr val="D9D9E0"/>
+                      </a:solidFill>
+                      <a:prstDash val="solid"/>
+                      <a:round/>
+                      <a:headEnd type="none" w="med" len="med"/>
+                      <a:tailEnd type="none" w="med" len="med"/>
+                    </a:lnB>
+                    <a:solidFill>
+                      <a:srgbClr val="FFFFFF"/>
+                    </a:solidFill>
+                  </a:tcPr>
+                </a:tc>
+                <a:tc>
+                  <a:txBody>
+                    <a:bodyPr/>
+                    <a:lstStyle/>
+                    <a:p>
+                      <a:pPr algn="l" indent="0" marL="0">
+                        <a:buNone/>
+                      </a:pPr>
+                      <a:r>
+                        <a:rPr lang="en-US" sz="1100" dirty="0">
+                          <a:solidFill>
+                            <a:srgbClr val="262630"/>
+                          </a:solidFill>
+                          <a:latin typeface="Yu Gothic" pitchFamily="34" charset="0"/>
+                          <a:ea typeface="Yu Gothic" pitchFamily="34" charset="-122"/>
+                          <a:cs typeface="Yu Gothic" pitchFamily="34" charset="-120"/>
+                        </a:rPr>
+                        <a:t>個別案件対応型からアカウント型営業への転換を公表。映像・MD・イベント・デジタルの複合提案は、商品・監修・法務・財務を束ねる全社横断課題である。</a:t>
+                      </a:r>
+                      <a:endParaRPr lang="en-US" sz="1100" dirty="0">
+                        <a:latin typeface="Yu Gothic" charset="0"/>
+                        <a:ea typeface="Yu Gothic" charset="0"/>
+                        <a:cs typeface="Yu Gothic" charset="0"/>
+                      </a:endParaRPr>
+                    </a:p>
+                  </a:txBody>
+                  <a:tcPr marL="109728" marR="109728" marT="54864" marB="54864" anchor="ctr">
+                    <a:lnL w="9525" cap="flat" cmpd="sng" algn="ctr">
+                      <a:solidFill>
+                        <a:srgbClr val="D9D9E0"/>
+                      </a:solidFill>
+                      <a:prstDash val="solid"/>
+                      <a:round/>
+                      <a:headEnd type="none" w="med" len="med"/>
+                      <a:tailEnd type="none" w="med" len="med"/>
+                    </a:lnL>
+                    <a:lnR w="9525" cap="flat" cmpd="sng" algn="ctr">
+                      <a:solidFill>
+                        <a:srgbClr val="D9D9E0"/>
+                      </a:solidFill>
+                      <a:prstDash val="solid"/>
+                      <a:round/>
+                      <a:headEnd type="none" w="med" len="med"/>
+                      <a:tailEnd type="none" w="med" len="med"/>
+                    </a:lnR>
+                    <a:lnT w="9525" cap="flat" cmpd="sng" algn="ctr">
+                      <a:solidFill>
+                        <a:srgbClr val="D9D9E0"/>
+                      </a:solidFill>
+                      <a:prstDash val="solid"/>
+                      <a:round/>
+                      <a:headEnd type="none" w="med" len="med"/>
+                      <a:tailEnd type="none" w="med" len="med"/>
+                    </a:lnT>
+                    <a:lnB w="9525" cap="flat" cmpd="sng" algn="ctr">
+                      <a:solidFill>
+                        <a:srgbClr val="D9D9E0"/>
+                      </a:solidFill>
+                      <a:prstDash val="solid"/>
+                      <a:round/>
+                      <a:headEnd type="none" w="med" len="med"/>
+                      <a:tailEnd type="none" w="med" len="med"/>
+                    </a:lnB>
+                    <a:solidFill>
+                      <a:srgbClr val="FFFFFF"/>
+                    </a:solidFill>
+                  </a:tcPr>
+                </a:tc>
+              </a:tr>
+              <a:tr h="603504">
+                <a:tc>
+                  <a:txBody>
+                    <a:bodyPr/>
+                    <a:lstStyle/>
+                    <a:p>
+                      <a:pPr algn="l" indent="0" marL="0">
+                        <a:buNone/>
+                      </a:pPr>
+                      <a:r>
+                        <a:rPr lang="en-US" sz="1100" b="1" dirty="0">
+                          <a:solidFill>
+                            <a:srgbClr val="3A106E"/>
+                          </a:solidFill>
+                          <a:latin typeface="Yu Gothic" pitchFamily="34" charset="0"/>
+                          <a:ea typeface="Yu Gothic" pitchFamily="34" charset="-122"/>
+                          <a:cs typeface="Yu Gothic" pitchFamily="34" charset="-120"/>
+                        </a:rPr>
+                        <a:t>4｜中国の成功を国内へ移植できるか</a:t>
+                      </a:r>
+                      <a:endParaRPr lang="en-US" sz="1100" dirty="0">
+                        <a:latin typeface="Yu Gothic" charset="0"/>
+                        <a:ea typeface="Yu Gothic" charset="0"/>
+                        <a:cs typeface="Yu Gothic" charset="0"/>
+                      </a:endParaRPr>
+                    </a:p>
+                  </a:txBody>
+                  <a:tcPr marL="109728" marR="109728" marT="54864" marB="54864" anchor="ctr">
+                    <a:lnL w="9525" cap="flat" cmpd="sng" algn="ctr">
+                      <a:solidFill>
+                        <a:srgbClr val="D9D9E0"/>
+                      </a:solidFill>
+                      <a:prstDash val="solid"/>
+                      <a:round/>
+                      <a:headEnd type="none" w="med" len="med"/>
+                      <a:tailEnd type="none" w="med" len="med"/>
+                    </a:lnL>
+                    <a:lnR w="9525" cap="flat" cmpd="sng" algn="ctr">
+                      <a:solidFill>
+                        <a:srgbClr val="D9D9E0"/>
+                      </a:solidFill>
+                      <a:prstDash val="solid"/>
+                      <a:round/>
+                      <a:headEnd type="none" w="med" len="med"/>
+                      <a:tailEnd type="none" w="med" len="med"/>
+                    </a:lnR>
+                    <a:lnT w="9525" cap="flat" cmpd="sng" algn="ctr">
+                      <a:solidFill>
+                        <a:srgbClr val="D9D9E0"/>
+                      </a:solidFill>
+                      <a:prstDash val="solid"/>
+                      <a:round/>
+                      <a:headEnd type="none" w="med" len="med"/>
+                      <a:tailEnd type="none" w="med" len="med"/>
+                    </a:lnT>
+                    <a:lnB w="9525" cap="flat" cmpd="sng" algn="ctr">
+                      <a:solidFill>
+                        <a:srgbClr val="D9D9E0"/>
+                      </a:solidFill>
+                      <a:prstDash val="solid"/>
+                      <a:round/>
+                      <a:headEnd type="none" w="med" len="med"/>
+                      <a:tailEnd type="none" w="med" len="med"/>
+                    </a:lnB>
+                    <a:solidFill>
+                      <a:srgbClr val="F7F7F9"/>
+                    </a:solidFill>
+                  </a:tcPr>
+                </a:tc>
+                <a:tc>
+                  <a:txBody>
+                    <a:bodyPr/>
+                    <a:lstStyle/>
+                    <a:p>
+                      <a:pPr algn="l" indent="0" marL="0">
+                        <a:buNone/>
+                      </a:pPr>
+                      <a:r>
+                        <a:rPr lang="en-US" sz="1100" dirty="0">
+                          <a:solidFill>
+                            <a:srgbClr val="262630"/>
+                          </a:solidFill>
+                          <a:latin typeface="Yu Gothic" pitchFamily="34" charset="0"/>
+                          <a:ea typeface="Yu Gothic" pitchFamily="34" charset="-122"/>
+                          <a:cs typeface="Yu Gothic" pitchFamily="34" charset="-120"/>
+                        </a:rPr>
+                        <a:t>中国はトイ&amp;ホビー中心に回復基調。ただし中計の中心テーマは日本事業の立て直し。重点顧客・カテゴリー細分化・SNS需要創出・商品高速開発を国内で実装する。</a:t>
+                      </a:r>
+                      <a:endParaRPr lang="en-US" sz="1100" dirty="0">
+                        <a:latin typeface="Yu Gothic" charset="0"/>
+                        <a:ea typeface="Yu Gothic" charset="0"/>
+                        <a:cs typeface="Yu Gothic" charset="0"/>
+                      </a:endParaRPr>
+                    </a:p>
+                  </a:txBody>
+                  <a:tcPr marL="109728" marR="109728" marT="54864" marB="54864" anchor="ctr">
+                    <a:lnL w="9525" cap="flat" cmpd="sng" algn="ctr">
+                      <a:solidFill>
+                        <a:srgbClr val="D9D9E0"/>
+                      </a:solidFill>
+                      <a:prstDash val="solid"/>
+                      <a:round/>
+                      <a:headEnd type="none" w="med" len="med"/>
+                      <a:tailEnd type="none" w="med" len="med"/>
+                    </a:lnL>
+                    <a:lnR w="9525" cap="flat" cmpd="sng" algn="ctr">
+                      <a:solidFill>
+                        <a:srgbClr val="D9D9E0"/>
+                      </a:solidFill>
+                      <a:prstDash val="solid"/>
+                      <a:round/>
+                      <a:headEnd type="none" w="med" len="med"/>
+                      <a:tailEnd type="none" w="med" len="med"/>
+                    </a:lnR>
+                    <a:lnT w="9525" cap="flat" cmpd="sng" algn="ctr">
+                      <a:solidFill>
+                        <a:srgbClr val="D9D9E0"/>
+                      </a:solidFill>
+                      <a:prstDash val="solid"/>
+                      <a:round/>
+                      <a:headEnd type="none" w="med" len="med"/>
+                      <a:tailEnd type="none" w="med" len="med"/>
+                    </a:lnT>
+                    <a:lnB w="9525" cap="flat" cmpd="sng" algn="ctr">
+                      <a:solidFill>
+                        <a:srgbClr val="D9D9E0"/>
+                      </a:solidFill>
+                      <a:prstDash val="solid"/>
+                      <a:round/>
+                      <a:headEnd type="none" w="med" len="med"/>
+                      <a:tailEnd type="none" w="med" len="med"/>
+                    </a:lnB>
+                    <a:solidFill>
+                      <a:srgbClr val="F7F7F9"/>
+                    </a:solidFill>
+                  </a:tcPr>
+                </a:tc>
+              </a:tr>
+              <a:tr h="603504">
+                <a:tc>
+                  <a:txBody>
+                    <a:bodyPr/>
+                    <a:lstStyle/>
+                    <a:p>
+                      <a:pPr algn="l" indent="0" marL="0">
+                        <a:buNone/>
+                      </a:pPr>
+                      <a:r>
+                        <a:rPr lang="en-US" sz="1100" b="1" dirty="0">
+                          <a:solidFill>
+                            <a:srgbClr val="3A106E"/>
+                          </a:solidFill>
+                          <a:latin typeface="Yu Gothic" pitchFamily="34" charset="0"/>
+                          <a:ea typeface="Yu Gothic" pitchFamily="34" charset="-122"/>
+                          <a:cs typeface="Yu Gothic" pitchFamily="34" charset="-120"/>
+                        </a:rPr>
+                        <a:t>5｜還元拡大で継続利益への責任が強まった</a:t>
+                      </a:r>
+                      <a:endParaRPr lang="en-US" sz="1100" dirty="0">
+                        <a:latin typeface="Yu Gothic" charset="0"/>
+                        <a:ea typeface="Yu Gothic" charset="0"/>
+                        <a:cs typeface="Yu Gothic" charset="0"/>
+                      </a:endParaRPr>
+                    </a:p>
+                  </a:txBody>
+                  <a:tcPr marL="109728" marR="109728" marT="54864" marB="54864" anchor="ctr">
+                    <a:lnL w="9525" cap="flat" cmpd="sng" algn="ctr">
+                      <a:solidFill>
+                        <a:srgbClr val="D9D9E0"/>
+                      </a:solidFill>
+                      <a:prstDash val="solid"/>
+                      <a:round/>
+                      <a:headEnd type="none" w="med" len="med"/>
+                      <a:tailEnd type="none" w="med" len="med"/>
+                    </a:lnL>
+                    <a:lnR w="9525" cap="flat" cmpd="sng" algn="ctr">
+                      <a:solidFill>
+                        <a:srgbClr val="D9D9E0"/>
+                      </a:solidFill>
+                      <a:prstDash val="solid"/>
+                      <a:round/>
+                      <a:headEnd type="none" w="med" len="med"/>
+                      <a:tailEnd type="none" w="med" len="med"/>
+                    </a:lnR>
+                    <a:lnT w="9525" cap="flat" cmpd="sng" algn="ctr">
+                      <a:solidFill>
+                        <a:srgbClr val="D9D9E0"/>
+                      </a:solidFill>
+                      <a:prstDash val="solid"/>
+                      <a:round/>
+                      <a:headEnd type="none" w="med" len="med"/>
+                      <a:tailEnd type="none" w="med" len="med"/>
+                    </a:lnT>
+                    <a:lnB w="9525" cap="flat" cmpd="sng" algn="ctr">
+                      <a:solidFill>
+                        <a:srgbClr val="D9D9E0"/>
+                      </a:solidFill>
+                      <a:prstDash val="solid"/>
+                      <a:round/>
+                      <a:headEnd type="none" w="med" len="med"/>
+                      <a:tailEnd type="none" w="med" len="med"/>
+                    </a:lnB>
+                    <a:solidFill>
+                      <a:srgbClr val="FFFFFF"/>
+                    </a:solidFill>
+                  </a:tcPr>
+                </a:tc>
+                <a:tc>
+                  <a:txBody>
+                    <a:bodyPr/>
+                    <a:lstStyle/>
+                    <a:p>
+                      <a:pPr algn="l" indent="0" marL="0">
+                        <a:buNone/>
+                      </a:pPr>
+                      <a:r>
+                        <a:rPr lang="en-US" sz="1100" dirty="0">
+                          <a:solidFill>
+                            <a:srgbClr val="262630"/>
+                          </a:solidFill>
+                          <a:latin typeface="Yu Gothic" pitchFamily="34" charset="0"/>
+                          <a:ea typeface="Yu Gothic" pitchFamily="34" charset="-122"/>
+                          <a:cs typeface="Yu Gothic" pitchFamily="34" charset="-120"/>
+                        </a:rPr>
+                        <a:t>年間配当を70円→140円へ引き上げ、来期以降も中間配当を継続予定。株主還元を支えるのは継続的な営業キャッシュフローであり、利益品質が直接問われる。</a:t>
+                      </a:r>
+                      <a:endParaRPr lang="en-US" sz="1100" dirty="0">
+                        <a:latin typeface="Yu Gothic" charset="0"/>
+                        <a:ea typeface="Yu Gothic" charset="0"/>
+                        <a:cs typeface="Yu Gothic" charset="0"/>
+                      </a:endParaRPr>
+                    </a:p>
+                  </a:txBody>
+                  <a:tcPr marL="109728" marR="109728" marT="54864" marB="54864" anchor="ctr">
+                    <a:lnL w="9525" cap="flat" cmpd="sng" algn="ctr">
+                      <a:solidFill>
+                        <a:srgbClr val="D9D9E0"/>
+                      </a:solidFill>
+                      <a:prstDash val="solid"/>
+                      <a:round/>
+                      <a:headEnd type="none" w="med" len="med"/>
+                      <a:tailEnd type="none" w="med" len="med"/>
+                    </a:lnL>
+                    <a:lnR w="9525" cap="flat" cmpd="sng" algn="ctr">
+                      <a:solidFill>
+                        <a:srgbClr val="D9D9E0"/>
+                      </a:solidFill>
+                      <a:prstDash val="solid"/>
+                      <a:round/>
+                      <a:headEnd type="none" w="med" len="med"/>
+                      <a:tailEnd type="none" w="med" len="med"/>
+                    </a:lnR>
+                    <a:lnT w="9525" cap="flat" cmpd="sng" algn="ctr">
+                      <a:solidFill>
+                        <a:srgbClr val="D9D9E0"/>
+                      </a:solidFill>
+                      <a:prstDash val="solid"/>
+                      <a:round/>
+                      <a:headEnd type="none" w="med" len="med"/>
+                      <a:tailEnd type="none" w="med" len="med"/>
+                    </a:lnT>
+                    <a:lnB w="9525" cap="flat" cmpd="sng" algn="ctr">
+                      <a:solidFill>
+                        <a:srgbClr val="D9D9E0"/>
+                      </a:solidFill>
+                      <a:prstDash val="solid"/>
+                      <a:round/>
+                      <a:headEnd type="none" w="med" len="med"/>
+                      <a:tailEnd type="none" w="med" len="med"/>
+                    </a:lnB>
+                    <a:solidFill>
+                      <a:srgbClr val="FFFFFF"/>
+                    </a:solidFill>
+                  </a:tcPr>
+                </a:tc>
+              </a:tr>
+            </a:tbl>
+          </a:graphicData>
+        </a:graphic>
+      </p:graphicFrame>
+      <p:sp>
+        <p:nvSpPr>
+          <p:cNvPr id="7" name="Shape 4"/>
+          <p:cNvSpPr/>
+          <p:nvPr/>
+        </p:nvSpPr>
+        <p:spPr>
+          <a:xfrm>
+            <a:off x="502920" y="5806440"/>
+            <a:ext cx="11183112" cy="530352"/>
+          </a:xfrm>
+          <a:prstGeom prst="rect">
+            <a:avLst/>
+          </a:prstGeom>
+          <a:solidFill>
+            <a:srgbClr val="F3EFFB"/>
+          </a:solidFill>
+          <a:ln/>
+        </p:spPr>
+      </p:sp>
+      <p:sp>
+        <p:nvSpPr>
+          <p:cNvPr id="8" name="Shape 5"/>
+          <p:cNvSpPr/>
+          <p:nvPr/>
+        </p:nvSpPr>
+        <p:spPr>
+          <a:xfrm>
+            <a:off x="502920" y="5806440"/>
+            <a:ext cx="50292" cy="530352"/>
+          </a:xfrm>
+          <a:prstGeom prst="rect">
+            <a:avLst/>
+          </a:prstGeom>
+          <a:solidFill>
+            <a:srgbClr val="7823DC"/>
+          </a:solidFill>
+          <a:ln/>
+        </p:spPr>
+      </p:sp>
+      <p:sp>
+        <p:nvSpPr>
+          <p:cNvPr id="9" name="Text 6"/>
+          <p:cNvSpPr/>
+          <p:nvPr/>
+        </p:nvSpPr>
+        <p:spPr>
+          <a:xfrm>
+            <a:off x="777240" y="5806440"/>
+            <a:ext cx="10835640" cy="530352"/>
           </a:xfrm>
           <a:prstGeom prst="rect">
             <a:avLst/>
@@ -3940,15 +5076,29 @@
               <a:buNone/>
             </a:pPr>
             <a:r>
+              <a:rPr lang="en-US" sz="1250" b="1" dirty="0">
+                <a:solidFill>
+                  <a:srgbClr val="7823DC"/>
+                </a:solidFill>
+                <a:latin typeface="Yu Gothic" pitchFamily="34" charset="0"/>
+                <a:ea typeface="Yu Gothic" pitchFamily="34" charset="-122"/>
+                <a:cs typeface="Yu Gothic" pitchFamily="34" charset="-120"/>
+              </a:rPr>
+              <a:t>この局面の本質　</a:t>
+            </a:r>
+            <a:pPr indent="0" marL="0">
+              <a:buNone/>
+            </a:pPr>
+            <a:r>
               <a:rPr lang="en-US" sz="1250" dirty="0">
                 <a:solidFill>
-                  <a:srgbClr val="5A6472"/>
+                  <a:srgbClr val="262630"/>
                 </a:solidFill>
-                <a:latin typeface="Meiryo" pitchFamily="34" charset="0"/>
-                <a:ea typeface="Meiryo" pitchFamily="34" charset="-122"/>
-                <a:cs typeface="Meiryo" pitchFamily="34" charset="-120"/>
+                <a:latin typeface="Yu Gothic" pitchFamily="34" charset="0"/>
+                <a:ea typeface="Yu Gothic" pitchFamily="34" charset="-122"/>
+                <a:cs typeface="Yu Gothic" pitchFamily="34" charset="-120"/>
               </a:rPr>
-              <a:t>上方修正後の局面を、5つの経営論点で捉える</a:t>
+              <a:t>今後6〜12か月が、C&amp;D事業の評価を「回復」から「成長」へ変えられるかを決める。</a:t>
             </a:r>
             <a:endParaRPr lang="en-US" sz="1250" dirty="0"/>
           </a:p>
@@ -3956,34 +5106,34 @@
       </p:sp>
       <p:sp>
         <p:nvSpPr>
-          <p:cNvPr id="4" name="Shape 2"/>
-          <p:cNvSpPr/>
-          <p:nvPr/>
-        </p:nvSpPr>
-        <p:spPr>
-          <a:xfrm>
-            <a:off x="457200" y="1380744"/>
-            <a:ext cx="475488" cy="475488"/>
-          </a:xfrm>
-          <a:prstGeom prst="ellipse">
+          <p:cNvPr id="10" name="Shape 7"/>
+          <p:cNvSpPr/>
+          <p:nvPr/>
+        </p:nvSpPr>
+        <p:spPr>
+          <a:xfrm>
+            <a:off x="502920" y="6473952"/>
+            <a:ext cx="11183112" cy="7315"/>
+          </a:xfrm>
+          <a:prstGeom prst="rect">
             <a:avLst/>
           </a:prstGeom>
           <a:solidFill>
-            <a:srgbClr val="1B2A4A"/>
+            <a:srgbClr val="D9D9E0"/>
           </a:solidFill>
           <a:ln/>
         </p:spPr>
       </p:sp>
       <p:sp>
         <p:nvSpPr>
-          <p:cNvPr id="5" name="Text 3"/>
-          <p:cNvSpPr/>
-          <p:nvPr/>
-        </p:nvSpPr>
-        <p:spPr>
-          <a:xfrm>
-            <a:off x="457200" y="1380744"/>
-            <a:ext cx="475488" cy="475488"/>
+          <p:cNvPr id="11" name="Text 8"/>
+          <p:cNvSpPr/>
+          <p:nvPr/>
+        </p:nvSpPr>
+        <p:spPr>
+          <a:xfrm>
+            <a:off x="502920" y="6519672"/>
+            <a:ext cx="8229600" cy="256032"/>
           </a:xfrm>
           <a:prstGeom prst="rect">
             <a:avLst/>
@@ -3995,135 +5145,34 @@
           <a:bodyPr wrap="square" lIns="0" tIns="0" rIns="0" bIns="0" rtlCol="0" anchor="ctr"/>
           <a:lstStyle/>
           <a:p>
-            <a:pPr algn="ctr" indent="0" marL="0">
-              <a:buNone/>
-            </a:pPr>
-            <a:r>
-              <a:rPr lang="en-US" sz="1800" b="1" dirty="0">
-                <a:solidFill>
-                  <a:srgbClr val="FFFFFF"/>
-                </a:solidFill>
-                <a:latin typeface="Meiryo" pitchFamily="34" charset="0"/>
-                <a:ea typeface="Meiryo" pitchFamily="34" charset="-122"/>
-                <a:cs typeface="Meiryo" pitchFamily="34" charset="-120"/>
-              </a:rPr>
-              <a:t>1</a:t>
-            </a:r>
-            <a:endParaRPr lang="en-US" sz="1800" dirty="0"/>
-          </a:p>
-        </p:txBody>
-      </p:sp>
-      <p:sp>
-        <p:nvSpPr>
-          <p:cNvPr id="6" name="Text 4"/>
-          <p:cNvSpPr/>
-          <p:nvPr/>
-        </p:nvSpPr>
-        <p:spPr>
-          <a:xfrm>
-            <a:off x="1143000" y="1325880"/>
-            <a:ext cx="10561320" cy="310896"/>
-          </a:xfrm>
-          <a:prstGeom prst="rect">
-            <a:avLst/>
-          </a:prstGeom>
-          <a:noFill/>
-          <a:ln/>
-        </p:spPr>
-        <p:txBody>
-          <a:bodyPr wrap="square" lIns="0" tIns="0" rIns="0" bIns="0" rtlCol="0" anchor="t"/>
-          <a:lstStyle/>
-          <a:p>
             <a:pPr indent="0" marL="0">
               <a:buNone/>
             </a:pPr>
             <a:r>
-              <a:rPr lang="en-US" sz="1550" b="1" dirty="0">
+              <a:rPr lang="en-US" sz="850" dirty="0">
                 <a:solidFill>
-                  <a:srgbClr val="1B2A4A"/>
+                  <a:srgbClr val="5F5F6E"/>
                 </a:solidFill>
-                <a:latin typeface="Meiryo" pitchFamily="34" charset="0"/>
-                <a:ea typeface="Meiryo" pitchFamily="34" charset="-122"/>
-                <a:cs typeface="Meiryo" pitchFamily="34" charset="-120"/>
+                <a:latin typeface="Yu Gothic" pitchFamily="34" charset="0"/>
+                <a:ea typeface="Yu Gothic" pitchFamily="34" charset="-122"/>
+                <a:cs typeface="Yu Gothic" pitchFamily="34" charset="-120"/>
               </a:rPr>
-              <a:t>市場への約束が、社内目標を上回る拘束力を持った</a:t>
-            </a:r>
-            <a:endParaRPr lang="en-US" sz="1550" dirty="0"/>
+              <a:t>円谷フィールズホールディングス／円谷プロダクション｜部長会資料（社外秘）</a:t>
+            </a:r>
+            <a:endParaRPr lang="en-US" sz="850" dirty="0"/>
           </a:p>
         </p:txBody>
       </p:sp>
       <p:sp>
         <p:nvSpPr>
-          <p:cNvPr id="7" name="Text 5"/>
-          <p:cNvSpPr/>
-          <p:nvPr/>
-        </p:nvSpPr>
-        <p:spPr>
-          <a:xfrm>
-            <a:off x="1143000" y="1645920"/>
-            <a:ext cx="10561320" cy="530352"/>
-          </a:xfrm>
-          <a:prstGeom prst="rect">
-            <a:avLst/>
-          </a:prstGeom>
-          <a:noFill/>
-          <a:ln/>
-        </p:spPr>
-        <p:txBody>
-          <a:bodyPr wrap="square" lIns="0" tIns="0" rIns="0" bIns="0" rtlCol="0" anchor="t"/>
-          <a:lstStyle/>
-          <a:p>
-            <a:pPr indent="0" marL="0">
-              <a:lnSpc>
-                <a:spcPct val="115000"/>
-              </a:lnSpc>
-              <a:buNone/>
-            </a:pPr>
-            <a:r>
-              <a:rPr lang="en-US" sz="1150" dirty="0">
-                <a:solidFill>
-                  <a:srgbClr val="5A6472"/>
-                </a:solidFill>
-                <a:latin typeface="Meiryo" pitchFamily="34" charset="0"/>
-                <a:ea typeface="Meiryo" pitchFamily="34" charset="-122"/>
-                <a:cs typeface="Meiryo" pitchFamily="34" charset="-120"/>
-              </a:rPr>
-              <a:t>45→55→65億円は外部公表した利益計画。投資家は「何をしたか」ではなく「計画に対し何億円進んだか」を確認する。一部門の遅れが連結業績・配当・企業価値に波及する。</a:t>
-            </a:r>
-            <a:endParaRPr lang="en-US" sz="1150" dirty="0"/>
-          </a:p>
-        </p:txBody>
-      </p:sp>
-      <p:sp>
-        <p:nvSpPr>
-          <p:cNvPr id="8" name="Shape 6"/>
-          <p:cNvSpPr/>
-          <p:nvPr/>
-        </p:nvSpPr>
-        <p:spPr>
-          <a:xfrm>
-            <a:off x="457200" y="2276856"/>
-            <a:ext cx="475488" cy="475488"/>
-          </a:xfrm>
-          <a:prstGeom prst="ellipse">
-            <a:avLst/>
-          </a:prstGeom>
-          <a:solidFill>
-            <a:srgbClr val="1B2A4A"/>
-          </a:solidFill>
-          <a:ln/>
-        </p:spPr>
-      </p:sp>
-      <p:sp>
-        <p:nvSpPr>
-          <p:cNvPr id="9" name="Text 7"/>
-          <p:cNvSpPr/>
-          <p:nvPr/>
-        </p:nvSpPr>
-        <p:spPr>
-          <a:xfrm>
-            <a:off x="457200" y="2276856"/>
-            <a:ext cx="475488" cy="475488"/>
+          <p:cNvPr id="12" name="Text 9"/>
+          <p:cNvSpPr/>
+          <p:nvPr/>
+        </p:nvSpPr>
+        <p:spPr>
+          <a:xfrm>
+            <a:off x="11247120" y="6519672"/>
+            <a:ext cx="438912" cy="256032"/>
           </a:xfrm>
           <a:prstGeom prst="rect">
             <a:avLst/>
@@ -4135,597 +5184,21 @@
           <a:bodyPr wrap="square" lIns="0" tIns="0" rIns="0" bIns="0" rtlCol="0" anchor="ctr"/>
           <a:lstStyle/>
           <a:p>
-            <a:pPr algn="ctr" indent="0" marL="0">
+            <a:pPr algn="r" indent="0" marL="0">
               <a:buNone/>
             </a:pPr>
             <a:r>
-              <a:rPr lang="en-US" sz="1800" b="1" dirty="0">
+              <a:rPr lang="en-US" sz="900" dirty="0">
                 <a:solidFill>
-                  <a:srgbClr val="FFFFFF"/>
+                  <a:srgbClr val="5F5F6E"/>
                 </a:solidFill>
-                <a:latin typeface="Meiryo" pitchFamily="34" charset="0"/>
-                <a:ea typeface="Meiryo" pitchFamily="34" charset="-122"/>
-                <a:cs typeface="Meiryo" pitchFamily="34" charset="-120"/>
-              </a:rPr>
-              <a:t>2</a:t>
-            </a:r>
-            <a:endParaRPr lang="en-US" sz="1800" dirty="0"/>
-          </a:p>
-        </p:txBody>
-      </p:sp>
-      <p:sp>
-        <p:nvSpPr>
-          <p:cNvPr id="10" name="Text 8"/>
-          <p:cNvSpPr/>
-          <p:nvPr/>
-        </p:nvSpPr>
-        <p:spPr>
-          <a:xfrm>
-            <a:off x="1143000" y="2221992"/>
-            <a:ext cx="10561320" cy="310896"/>
-          </a:xfrm>
-          <a:prstGeom prst="rect">
-            <a:avLst/>
-          </a:prstGeom>
-          <a:noFill/>
-          <a:ln/>
-        </p:spPr>
-        <p:txBody>
-          <a:bodyPr wrap="square" lIns="0" tIns="0" rIns="0" bIns="0" rtlCol="0" anchor="t"/>
-          <a:lstStyle/>
-          <a:p>
-            <a:pPr indent="0" marL="0">
-              <a:buNone/>
-            </a:pPr>
-            <a:r>
-              <a:rPr lang="en-US" sz="1550" b="1" dirty="0">
-                <a:solidFill>
-                  <a:srgbClr val="1B2A4A"/>
-                </a:solidFill>
-                <a:latin typeface="Meiryo" pitchFamily="34" charset="0"/>
-                <a:ea typeface="Meiryo" pitchFamily="34" charset="-122"/>
-                <a:cs typeface="Meiryo" pitchFamily="34" charset="-120"/>
-              </a:rPr>
-              <a:t>評価軸が「コスト改革」から「成長改革」へ変わった</a:t>
-            </a:r>
-            <a:endParaRPr lang="en-US" sz="1550" dirty="0"/>
-          </a:p>
-        </p:txBody>
-      </p:sp>
-      <p:sp>
-        <p:nvSpPr>
-          <p:cNvPr id="11" name="Text 9"/>
-          <p:cNvSpPr/>
-          <p:nvPr/>
-        </p:nvSpPr>
-        <p:spPr>
-          <a:xfrm>
-            <a:off x="1143000" y="2542032"/>
-            <a:ext cx="10561320" cy="530352"/>
-          </a:xfrm>
-          <a:prstGeom prst="rect">
-            <a:avLst/>
-          </a:prstGeom>
-          <a:noFill/>
-          <a:ln/>
-        </p:spPr>
-        <p:txBody>
-          <a:bodyPr wrap="square" lIns="0" tIns="0" rIns="0" bIns="0" rtlCol="0" anchor="t"/>
-          <a:lstStyle/>
-          <a:p>
-            <a:pPr indent="0" marL="0">
-              <a:lnSpc>
-                <a:spcPct val="115000"/>
-              </a:lnSpc>
-              <a:buNone/>
-            </a:pPr>
-            <a:r>
-              <a:rPr lang="en-US" sz="1150" dirty="0">
-                <a:solidFill>
-                  <a:srgbClr val="5A6472"/>
-                </a:solidFill>
-                <a:latin typeface="Meiryo" pitchFamily="34" charset="0"/>
-                <a:ea typeface="Meiryo" pitchFamily="34" charset="-122"/>
-                <a:cs typeface="Meiryo" pitchFamily="34" charset="-120"/>
-              </a:rPr>
-              <a:t>今後問われるのは、費用を抑えたことではなく、売上・粗利・営業利益を増やしたこと。部門計画は「費用内で実行」から「投資対効果を伴う成長」へ切り替える。</a:t>
-            </a:r>
-            <a:endParaRPr lang="en-US" sz="1150" dirty="0"/>
-          </a:p>
-        </p:txBody>
-      </p:sp>
-      <p:sp>
-        <p:nvSpPr>
-          <p:cNvPr id="12" name="Shape 10"/>
-          <p:cNvSpPr/>
-          <p:nvPr/>
-        </p:nvSpPr>
-        <p:spPr>
-          <a:xfrm>
-            <a:off x="457200" y="3172968"/>
-            <a:ext cx="475488" cy="475488"/>
-          </a:xfrm>
-          <a:prstGeom prst="ellipse">
-            <a:avLst/>
-          </a:prstGeom>
-          <a:solidFill>
-            <a:srgbClr val="1B2A4A"/>
-          </a:solidFill>
-          <a:ln/>
-        </p:spPr>
-      </p:sp>
-      <p:sp>
-        <p:nvSpPr>
-          <p:cNvPr id="13" name="Text 11"/>
-          <p:cNvSpPr/>
-          <p:nvPr/>
-        </p:nvSpPr>
-        <p:spPr>
-          <a:xfrm>
-            <a:off x="457200" y="3172968"/>
-            <a:ext cx="475488" cy="475488"/>
-          </a:xfrm>
-          <a:prstGeom prst="rect">
-            <a:avLst/>
-          </a:prstGeom>
-          <a:noFill/>
-          <a:ln/>
-        </p:spPr>
-        <p:txBody>
-          <a:bodyPr wrap="square" lIns="0" tIns="0" rIns="0" bIns="0" rtlCol="0" anchor="ctr"/>
-          <a:lstStyle/>
-          <a:p>
-            <a:pPr algn="ctr" indent="0" marL="0">
-              <a:buNone/>
-            </a:pPr>
-            <a:r>
-              <a:rPr lang="en-US" sz="1800" b="1" dirty="0">
-                <a:solidFill>
-                  <a:srgbClr val="FFFFFF"/>
-                </a:solidFill>
-                <a:latin typeface="Meiryo" pitchFamily="34" charset="0"/>
-                <a:ea typeface="Meiryo" pitchFamily="34" charset="-122"/>
-                <a:cs typeface="Meiryo" pitchFamily="34" charset="-120"/>
+                <a:latin typeface="Yu Gothic" pitchFamily="34" charset="0"/>
+                <a:ea typeface="Yu Gothic" pitchFamily="34" charset="-122"/>
+                <a:cs typeface="Yu Gothic" pitchFamily="34" charset="-120"/>
               </a:rPr>
               <a:t>3</a:t>
             </a:r>
-            <a:endParaRPr lang="en-US" sz="1800" dirty="0"/>
-          </a:p>
-        </p:txBody>
-      </p:sp>
-      <p:sp>
-        <p:nvSpPr>
-          <p:cNvPr id="14" name="Text 12"/>
-          <p:cNvSpPr/>
-          <p:nvPr/>
-        </p:nvSpPr>
-        <p:spPr>
-          <a:xfrm>
-            <a:off x="1143000" y="3118104"/>
-            <a:ext cx="10561320" cy="310896"/>
-          </a:xfrm>
-          <a:prstGeom prst="rect">
-            <a:avLst/>
-          </a:prstGeom>
-          <a:noFill/>
-          <a:ln/>
-        </p:spPr>
-        <p:txBody>
-          <a:bodyPr wrap="square" lIns="0" tIns="0" rIns="0" bIns="0" rtlCol="0" anchor="t"/>
-          <a:lstStyle/>
-          <a:p>
-            <a:pPr indent="0" marL="0">
-              <a:buNone/>
-            </a:pPr>
-            <a:r>
-              <a:rPr lang="en-US" sz="1550" b="1" dirty="0">
-                <a:solidFill>
-                  <a:srgbClr val="1B2A4A"/>
-                </a:solidFill>
-                <a:latin typeface="Meiryo" pitchFamily="34" charset="0"/>
-                <a:ea typeface="Meiryo" pitchFamily="34" charset="-122"/>
-                <a:cs typeface="Meiryo" pitchFamily="34" charset="-120"/>
-              </a:rPr>
-              <a:t>営業改革が会社の公式戦略になった</a:t>
-            </a:r>
-            <a:endParaRPr lang="en-US" sz="1550" dirty="0"/>
-          </a:p>
-        </p:txBody>
-      </p:sp>
-      <p:sp>
-        <p:nvSpPr>
-          <p:cNvPr id="15" name="Text 13"/>
-          <p:cNvSpPr/>
-          <p:nvPr/>
-        </p:nvSpPr>
-        <p:spPr>
-          <a:xfrm>
-            <a:off x="1143000" y="3438144"/>
-            <a:ext cx="10561320" cy="530352"/>
-          </a:xfrm>
-          <a:prstGeom prst="rect">
-            <a:avLst/>
-          </a:prstGeom>
-          <a:noFill/>
-          <a:ln/>
-        </p:spPr>
-        <p:txBody>
-          <a:bodyPr wrap="square" lIns="0" tIns="0" rIns="0" bIns="0" rtlCol="0" anchor="t"/>
-          <a:lstStyle/>
-          <a:p>
-            <a:pPr indent="0" marL="0">
-              <a:lnSpc>
-                <a:spcPct val="115000"/>
-              </a:lnSpc>
-              <a:buNone/>
-            </a:pPr>
-            <a:r>
-              <a:rPr lang="en-US" sz="1150" dirty="0">
-                <a:solidFill>
-                  <a:srgbClr val="5A6472"/>
-                </a:solidFill>
-                <a:latin typeface="Meiryo" pitchFamily="34" charset="0"/>
-                <a:ea typeface="Meiryo" pitchFamily="34" charset="-122"/>
-                <a:cs typeface="Meiryo" pitchFamily="34" charset="-120"/>
-              </a:rPr>
-              <a:t>個別案件対応型からアカウント型営業への転換を公表。映像・MD・イベント・デジタルを組み合わせた複合提案は、商品・監修・法務・財務を束ねる全社横断課題である。</a:t>
-            </a:r>
-            <a:endParaRPr lang="en-US" sz="1150" dirty="0"/>
-          </a:p>
-        </p:txBody>
-      </p:sp>
-      <p:sp>
-        <p:nvSpPr>
-          <p:cNvPr id="16" name="Shape 14"/>
-          <p:cNvSpPr/>
-          <p:nvPr/>
-        </p:nvSpPr>
-        <p:spPr>
-          <a:xfrm>
-            <a:off x="457200" y="4069080"/>
-            <a:ext cx="475488" cy="475488"/>
-          </a:xfrm>
-          <a:prstGeom prst="ellipse">
-            <a:avLst/>
-          </a:prstGeom>
-          <a:solidFill>
-            <a:srgbClr val="1B2A4A"/>
-          </a:solidFill>
-          <a:ln/>
-        </p:spPr>
-      </p:sp>
-      <p:sp>
-        <p:nvSpPr>
-          <p:cNvPr id="17" name="Text 15"/>
-          <p:cNvSpPr/>
-          <p:nvPr/>
-        </p:nvSpPr>
-        <p:spPr>
-          <a:xfrm>
-            <a:off x="457200" y="4069080"/>
-            <a:ext cx="475488" cy="475488"/>
-          </a:xfrm>
-          <a:prstGeom prst="rect">
-            <a:avLst/>
-          </a:prstGeom>
-          <a:noFill/>
-          <a:ln/>
-        </p:spPr>
-        <p:txBody>
-          <a:bodyPr wrap="square" lIns="0" tIns="0" rIns="0" bIns="0" rtlCol="0" anchor="ctr"/>
-          <a:lstStyle/>
-          <a:p>
-            <a:pPr algn="ctr" indent="0" marL="0">
-              <a:buNone/>
-            </a:pPr>
-            <a:r>
-              <a:rPr lang="en-US" sz="1800" b="1" dirty="0">
-                <a:solidFill>
-                  <a:srgbClr val="FFFFFF"/>
-                </a:solidFill>
-                <a:latin typeface="Meiryo" pitchFamily="34" charset="0"/>
-                <a:ea typeface="Meiryo" pitchFamily="34" charset="-122"/>
-                <a:cs typeface="Meiryo" pitchFamily="34" charset="-120"/>
-              </a:rPr>
-              <a:t>4</a:t>
-            </a:r>
-            <a:endParaRPr lang="en-US" sz="1800" dirty="0"/>
-          </a:p>
-        </p:txBody>
-      </p:sp>
-      <p:sp>
-        <p:nvSpPr>
-          <p:cNvPr id="18" name="Text 16"/>
-          <p:cNvSpPr/>
-          <p:nvPr/>
-        </p:nvSpPr>
-        <p:spPr>
-          <a:xfrm>
-            <a:off x="1143000" y="4014216"/>
-            <a:ext cx="10561320" cy="310896"/>
-          </a:xfrm>
-          <a:prstGeom prst="rect">
-            <a:avLst/>
-          </a:prstGeom>
-          <a:noFill/>
-          <a:ln/>
-        </p:spPr>
-        <p:txBody>
-          <a:bodyPr wrap="square" lIns="0" tIns="0" rIns="0" bIns="0" rtlCol="0" anchor="t"/>
-          <a:lstStyle/>
-          <a:p>
-            <a:pPr indent="0" marL="0">
-              <a:buNone/>
-            </a:pPr>
-            <a:r>
-              <a:rPr lang="en-US" sz="1550" b="1" dirty="0">
-                <a:solidFill>
-                  <a:srgbClr val="1B2A4A"/>
-                </a:solidFill>
-                <a:latin typeface="Meiryo" pitchFamily="34" charset="0"/>
-                <a:ea typeface="Meiryo" pitchFamily="34" charset="-122"/>
-                <a:cs typeface="Meiryo" pitchFamily="34" charset="-120"/>
-              </a:rPr>
-              <a:t>中国の成功を国内へ移植できるかが次の評価分岐点</a:t>
-            </a:r>
-            <a:endParaRPr lang="en-US" sz="1550" dirty="0"/>
-          </a:p>
-        </p:txBody>
-      </p:sp>
-      <p:sp>
-        <p:nvSpPr>
-          <p:cNvPr id="19" name="Text 17"/>
-          <p:cNvSpPr/>
-          <p:nvPr/>
-        </p:nvSpPr>
-        <p:spPr>
-          <a:xfrm>
-            <a:off x="1143000" y="4334256"/>
-            <a:ext cx="10561320" cy="530352"/>
-          </a:xfrm>
-          <a:prstGeom prst="rect">
-            <a:avLst/>
-          </a:prstGeom>
-          <a:noFill/>
-          <a:ln/>
-        </p:spPr>
-        <p:txBody>
-          <a:bodyPr wrap="square" lIns="0" tIns="0" rIns="0" bIns="0" rtlCol="0" anchor="t"/>
-          <a:lstStyle/>
-          <a:p>
-            <a:pPr indent="0" marL="0">
-              <a:lnSpc>
-                <a:spcPct val="115000"/>
-              </a:lnSpc>
-              <a:buNone/>
-            </a:pPr>
-            <a:r>
-              <a:rPr lang="en-US" sz="1150" dirty="0">
-                <a:solidFill>
-                  <a:srgbClr val="5A6472"/>
-                </a:solidFill>
-                <a:latin typeface="Meiryo" pitchFamily="34" charset="0"/>
-                <a:ea typeface="Meiryo" pitchFamily="34" charset="-122"/>
-                <a:cs typeface="Meiryo" pitchFamily="34" charset="-120"/>
-              </a:rPr>
-              <a:t>中国はトイ&amp;ホビー中心に回復基調。ただし中計の中心テーマは日本事業の立て直し。重点顧客・カテゴリー細分化・SNS需要創出・商品高速開発を国内で実装する必要がある。</a:t>
-            </a:r>
-            <a:endParaRPr lang="en-US" sz="1150" dirty="0"/>
-          </a:p>
-        </p:txBody>
-      </p:sp>
-      <p:sp>
-        <p:nvSpPr>
-          <p:cNvPr id="20" name="Shape 18"/>
-          <p:cNvSpPr/>
-          <p:nvPr/>
-        </p:nvSpPr>
-        <p:spPr>
-          <a:xfrm>
-            <a:off x="457200" y="4965192"/>
-            <a:ext cx="475488" cy="475488"/>
-          </a:xfrm>
-          <a:prstGeom prst="ellipse">
-            <a:avLst/>
-          </a:prstGeom>
-          <a:solidFill>
-            <a:srgbClr val="C8102E"/>
-          </a:solidFill>
-          <a:ln/>
-        </p:spPr>
-      </p:sp>
-      <p:sp>
-        <p:nvSpPr>
-          <p:cNvPr id="21" name="Text 19"/>
-          <p:cNvSpPr/>
-          <p:nvPr/>
-        </p:nvSpPr>
-        <p:spPr>
-          <a:xfrm>
-            <a:off x="457200" y="4965192"/>
-            <a:ext cx="475488" cy="475488"/>
-          </a:xfrm>
-          <a:prstGeom prst="rect">
-            <a:avLst/>
-          </a:prstGeom>
-          <a:noFill/>
-          <a:ln/>
-        </p:spPr>
-        <p:txBody>
-          <a:bodyPr wrap="square" lIns="0" tIns="0" rIns="0" bIns="0" rtlCol="0" anchor="ctr"/>
-          <a:lstStyle/>
-          <a:p>
-            <a:pPr algn="ctr" indent="0" marL="0">
-              <a:buNone/>
-            </a:pPr>
-            <a:r>
-              <a:rPr lang="en-US" sz="1800" b="1" dirty="0">
-                <a:solidFill>
-                  <a:srgbClr val="FFFFFF"/>
-                </a:solidFill>
-                <a:latin typeface="Meiryo" pitchFamily="34" charset="0"/>
-                <a:ea typeface="Meiryo" pitchFamily="34" charset="-122"/>
-                <a:cs typeface="Meiryo" pitchFamily="34" charset="-120"/>
-              </a:rPr>
-              <a:t>5</a:t>
-            </a:r>
-            <a:endParaRPr lang="en-US" sz="1800" dirty="0"/>
-          </a:p>
-        </p:txBody>
-      </p:sp>
-      <p:sp>
-        <p:nvSpPr>
-          <p:cNvPr id="22" name="Text 20"/>
-          <p:cNvSpPr/>
-          <p:nvPr/>
-        </p:nvSpPr>
-        <p:spPr>
-          <a:xfrm>
-            <a:off x="1143000" y="4910328"/>
-            <a:ext cx="10561320" cy="310896"/>
-          </a:xfrm>
-          <a:prstGeom prst="rect">
-            <a:avLst/>
-          </a:prstGeom>
-          <a:noFill/>
-          <a:ln/>
-        </p:spPr>
-        <p:txBody>
-          <a:bodyPr wrap="square" lIns="0" tIns="0" rIns="0" bIns="0" rtlCol="0" anchor="t"/>
-          <a:lstStyle/>
-          <a:p>
-            <a:pPr indent="0" marL="0">
-              <a:buNone/>
-            </a:pPr>
-            <a:r>
-              <a:rPr lang="en-US" sz="1550" b="1" dirty="0">
-                <a:solidFill>
-                  <a:srgbClr val="1B2A4A"/>
-                </a:solidFill>
-                <a:latin typeface="Meiryo" pitchFamily="34" charset="0"/>
-                <a:ea typeface="Meiryo" pitchFamily="34" charset="-122"/>
-                <a:cs typeface="Meiryo" pitchFamily="34" charset="-120"/>
-              </a:rPr>
-              <a:t>還元拡大により、継続利益への責任が強まった</a:t>
-            </a:r>
-            <a:endParaRPr lang="en-US" sz="1550" dirty="0"/>
-          </a:p>
-        </p:txBody>
-      </p:sp>
-      <p:sp>
-        <p:nvSpPr>
-          <p:cNvPr id="23" name="Text 21"/>
-          <p:cNvSpPr/>
-          <p:nvPr/>
-        </p:nvSpPr>
-        <p:spPr>
-          <a:xfrm>
-            <a:off x="1143000" y="5230368"/>
-            <a:ext cx="10561320" cy="530352"/>
-          </a:xfrm>
-          <a:prstGeom prst="rect">
-            <a:avLst/>
-          </a:prstGeom>
-          <a:noFill/>
-          <a:ln/>
-        </p:spPr>
-        <p:txBody>
-          <a:bodyPr wrap="square" lIns="0" tIns="0" rIns="0" bIns="0" rtlCol="0" anchor="t"/>
-          <a:lstStyle/>
-          <a:p>
-            <a:pPr indent="0" marL="0">
-              <a:lnSpc>
-                <a:spcPct val="115000"/>
-              </a:lnSpc>
-              <a:buNone/>
-            </a:pPr>
-            <a:r>
-              <a:rPr lang="en-US" sz="1150" dirty="0">
-                <a:solidFill>
-                  <a:srgbClr val="5A6472"/>
-                </a:solidFill>
-                <a:latin typeface="Meiryo" pitchFamily="34" charset="0"/>
-                <a:ea typeface="Meiryo" pitchFamily="34" charset="-122"/>
-                <a:cs typeface="Meiryo" pitchFamily="34" charset="-120"/>
-              </a:rPr>
-              <a:t>年間配当を70円→140円へ引き上げ、来期以降も中間配当を継続予定。株主還元を支えるのは一過性利益ではなく継続的な営業キャッシュフロー。利益品質が直接問われる。</a:t>
-            </a:r>
-            <a:endParaRPr lang="en-US" sz="1150" dirty="0"/>
-          </a:p>
-        </p:txBody>
-      </p:sp>
-      <p:sp>
-        <p:nvSpPr>
-          <p:cNvPr id="24" name="Shape 22"/>
-          <p:cNvSpPr/>
-          <p:nvPr/>
-        </p:nvSpPr>
-        <p:spPr>
-          <a:xfrm>
-            <a:off x="457200" y="5897880"/>
-            <a:ext cx="11274552" cy="640080"/>
-          </a:xfrm>
-          <a:prstGeom prst="roundRect">
-            <a:avLst>
-              <a:gd name="adj" fmla="val 8571"/>
-            </a:avLst>
-          </a:prstGeom>
-          <a:solidFill>
-            <a:srgbClr val="1B2A4A"/>
-          </a:solidFill>
-          <a:ln/>
-        </p:spPr>
-      </p:sp>
-      <p:sp>
-        <p:nvSpPr>
-          <p:cNvPr id="25" name="Text 23"/>
-          <p:cNvSpPr/>
-          <p:nvPr/>
-        </p:nvSpPr>
-        <p:spPr>
-          <a:xfrm>
-            <a:off x="777240" y="5897880"/>
-            <a:ext cx="10698480" cy="640080"/>
-          </a:xfrm>
-          <a:prstGeom prst="rect">
-            <a:avLst/>
-          </a:prstGeom>
-          <a:noFill/>
-          <a:ln/>
-        </p:spPr>
-        <p:txBody>
-          <a:bodyPr wrap="square" lIns="0" tIns="0" rIns="0" bIns="0" rtlCol="0" anchor="ctr"/>
-          <a:lstStyle/>
-          <a:p>
-            <a:pPr indent="0" marL="0">
-              <a:buNone/>
-            </a:pPr>
-            <a:r>
-              <a:rPr lang="en-US" sz="1350" b="1" dirty="0">
-                <a:solidFill>
-                  <a:srgbClr val="FF7A85"/>
-                </a:solidFill>
-                <a:latin typeface="Meiryo" pitchFamily="34" charset="0"/>
-                <a:ea typeface="Meiryo" pitchFamily="34" charset="-122"/>
-                <a:cs typeface="Meiryo" pitchFamily="34" charset="-120"/>
-              </a:rPr>
-              <a:t>この局面の本質　</a:t>
-            </a:r>
-            <a:pPr indent="0" marL="0">
-              <a:buNone/>
-            </a:pPr>
-            <a:r>
-              <a:rPr lang="en-US" sz="1350" b="1" dirty="0">
-                <a:solidFill>
-                  <a:srgbClr val="FFFFFF"/>
-                </a:solidFill>
-                <a:latin typeface="Meiryo" pitchFamily="34" charset="0"/>
-                <a:ea typeface="Meiryo" pitchFamily="34" charset="-122"/>
-                <a:cs typeface="Meiryo" pitchFamily="34" charset="-120"/>
-              </a:rPr>
-              <a:t>今後6〜12か月が、C&amp;D事業の評価を「回復」から「成長」へ変えられるかを決める。</a:t>
-            </a:r>
-            <a:endParaRPr lang="en-US" sz="1350" dirty="0"/>
+            <a:endParaRPr lang="en-US" sz="900" dirty="0"/>
           </a:p>
         </p:txBody>
       </p:sp>
@@ -4769,8 +5242,8 @@
         </p:nvSpPr>
         <p:spPr>
           <a:xfrm>
-            <a:off x="457200" y="320040"/>
-            <a:ext cx="8686800" cy="548640"/>
+            <a:off x="502920" y="274320"/>
+            <a:ext cx="11155680" cy="292608"/>
           </a:xfrm>
           <a:prstGeom prst="rect">
             <a:avLst/>
@@ -4786,17 +5259,17 @@
               <a:buNone/>
             </a:pPr>
             <a:r>
-              <a:rPr lang="en-US" sz="2600" b="1" dirty="0">
+              <a:rPr lang="en-US" sz="1150" b="1" dirty="0">
                 <a:solidFill>
-                  <a:srgbClr val="1B2A4A"/>
+                  <a:srgbClr val="7823DC"/>
                 </a:solidFill>
-                <a:latin typeface="Meiryo" pitchFamily="34" charset="0"/>
-                <a:ea typeface="Meiryo" pitchFamily="34" charset="-122"/>
-                <a:cs typeface="Meiryo" pitchFamily="34" charset="-120"/>
+                <a:latin typeface="Yu Gothic" pitchFamily="34" charset="0"/>
+                <a:ea typeface="Yu Gothic" pitchFamily="34" charset="-122"/>
+                <a:cs typeface="Yu Gothic" pitchFamily="34" charset="-120"/>
               </a:rPr>
-              <a:t>3｜部長陣に求める5つの実行責任</a:t>
-            </a:r>
-            <a:endParaRPr lang="en-US" sz="2600" dirty="0"/>
+              <a:t>実行責任</a:t>
+            </a:r>
+            <a:endParaRPr lang="en-US" sz="1150" dirty="0"/>
           </a:p>
         </p:txBody>
       </p:sp>
@@ -4808,8 +5281,8 @@
         </p:nvSpPr>
         <p:spPr>
           <a:xfrm>
-            <a:off x="457200" y="868680"/>
-            <a:ext cx="10972800" cy="320040"/>
+            <a:off x="502920" y="566928"/>
+            <a:ext cx="11155680" cy="502920"/>
           </a:xfrm>
           <a:prstGeom prst="rect">
             <a:avLst/>
@@ -4818,24 +5291,24 @@
           <a:ln/>
         </p:spPr>
         <p:txBody>
-          <a:bodyPr wrap="square" lIns="0" tIns="0" rIns="0" bIns="0" rtlCol="0" anchor="ctr"/>
+          <a:bodyPr wrap="square" lIns="0" tIns="0" rIns="0" bIns="0" rtlCol="0" anchor="t"/>
           <a:lstStyle/>
           <a:p>
             <a:pPr indent="0" marL="0">
               <a:buNone/>
             </a:pPr>
             <a:r>
-              <a:rPr lang="en-US" sz="1250" dirty="0">
+              <a:rPr lang="en-US" sz="2200" b="1" dirty="0">
                 <a:solidFill>
-                  <a:srgbClr val="5A6472"/>
+                  <a:srgbClr val="262630"/>
                 </a:solidFill>
-                <a:latin typeface="Meiryo" pitchFamily="34" charset="0"/>
-                <a:ea typeface="Meiryo" pitchFamily="34" charset="-122"/>
-                <a:cs typeface="Meiryo" pitchFamily="34" charset="-120"/>
+                <a:latin typeface="Yu Gothic" pitchFamily="34" charset="0"/>
+                <a:ea typeface="Yu Gothic" pitchFamily="34" charset="-122"/>
+                <a:cs typeface="Yu Gothic" pitchFamily="34" charset="-120"/>
               </a:rPr>
-              <a:t>すべてを営業利益と実行速度で管理する</a:t>
-            </a:r>
-            <a:endParaRPr lang="en-US" sz="1250" dirty="0"/>
+              <a:t>部長陣に求める5つの実行責任</a:t>
+            </a:r>
+            <a:endParaRPr lang="en-US" sz="2200" dirty="0"/>
           </a:p>
         </p:txBody>
       </p:sp>
@@ -4847,89 +5320,28 @@
         </p:nvSpPr>
         <p:spPr>
           <a:xfrm>
-            <a:off x="457200" y="1371600"/>
-            <a:ext cx="3758184" cy="1965960"/>
-          </a:xfrm>
-          <a:prstGeom prst="roundRect">
-            <a:avLst>
-              <a:gd name="adj" fmla="val 2791"/>
-            </a:avLst>
+            <a:off x="502920" y="1234440"/>
+            <a:ext cx="1554480" cy="36576"/>
+          </a:xfrm>
+          <a:prstGeom prst="rect">
+            <a:avLst/>
           </a:prstGeom>
           <a:solidFill>
-            <a:srgbClr val="F2F4F8"/>
+            <a:srgbClr val="7823DC"/>
           </a:solidFill>
           <a:ln/>
         </p:spPr>
       </p:sp>
       <p:sp>
         <p:nvSpPr>
-          <p:cNvPr id="5" name="Shape 3"/>
-          <p:cNvSpPr/>
-          <p:nvPr/>
-        </p:nvSpPr>
-        <p:spPr>
-          <a:xfrm>
-            <a:off x="658368" y="1554480"/>
-            <a:ext cx="384048" cy="384048"/>
-          </a:xfrm>
-          <a:prstGeom prst="ellipse">
-            <a:avLst/>
-          </a:prstGeom>
-          <a:solidFill>
-            <a:srgbClr val="1B2A4A"/>
-          </a:solidFill>
-          <a:ln/>
-        </p:spPr>
-      </p:sp>
-      <p:sp>
-        <p:nvSpPr>
-          <p:cNvPr id="6" name="Text 4"/>
-          <p:cNvSpPr/>
-          <p:nvPr/>
-        </p:nvSpPr>
-        <p:spPr>
-          <a:xfrm>
-            <a:off x="658368" y="1554480"/>
-            <a:ext cx="384048" cy="384048"/>
-          </a:xfrm>
-          <a:prstGeom prst="rect">
-            <a:avLst/>
-          </a:prstGeom>
-          <a:noFill/>
-          <a:ln/>
-        </p:spPr>
-        <p:txBody>
-          <a:bodyPr wrap="square" lIns="0" tIns="0" rIns="0" bIns="0" rtlCol="0" anchor="ctr"/>
-          <a:lstStyle/>
-          <a:p>
-            <a:pPr algn="ctr" indent="0" marL="0">
-              <a:buNone/>
-            </a:pPr>
-            <a:r>
-              <a:rPr lang="en-US" sz="1500" b="1" dirty="0">
-                <a:solidFill>
-                  <a:srgbClr val="FFFFFF"/>
-                </a:solidFill>
-                <a:latin typeface="Meiryo" pitchFamily="34" charset="0"/>
-                <a:ea typeface="Meiryo" pitchFamily="34" charset="-122"/>
-                <a:cs typeface="Meiryo" pitchFamily="34" charset="-120"/>
-              </a:rPr>
-              <a:t>1</a:t>
-            </a:r>
-            <a:endParaRPr lang="en-US" sz="1500" dirty="0"/>
-          </a:p>
-        </p:txBody>
-      </p:sp>
-      <p:sp>
-        <p:nvSpPr>
-          <p:cNvPr id="7" name="Text 5"/>
-          <p:cNvSpPr/>
-          <p:nvPr/>
-        </p:nvSpPr>
-        <p:spPr>
-          <a:xfrm>
-            <a:off x="1170432" y="1517904"/>
-            <a:ext cx="2862072" cy="777240"/>
+          <p:cNvPr id="5" name="Text 3"/>
+          <p:cNvSpPr/>
+          <p:nvPr/>
+        </p:nvSpPr>
+        <p:spPr>
+          <a:xfrm>
+            <a:off x="502920" y="1325880"/>
+            <a:ext cx="11155680" cy="320040"/>
           </a:xfrm>
           <a:prstGeom prst="rect">
             <a:avLst/>
@@ -4942,23 +5354,89 @@
           <a:lstStyle/>
           <a:p>
             <a:pPr indent="0" marL="0">
+              <a:buNone/>
+            </a:pPr>
+            <a:r>
+              <a:rPr lang="en-US" sz="1300" b="1" dirty="0">
+                <a:solidFill>
+                  <a:srgbClr val="262630"/>
+                </a:solidFill>
+                <a:latin typeface="Yu Gothic" pitchFamily="34" charset="0"/>
+                <a:ea typeface="Yu Gothic" pitchFamily="34" charset="-122"/>
+                <a:cs typeface="Yu Gothic" pitchFamily="34" charset="-120"/>
+              </a:rPr>
+              <a:t>すべてを営業利益と実行速度で管理します</a:t>
+            </a:r>
+            <a:endParaRPr lang="en-US" sz="1300" dirty="0"/>
+          </a:p>
+        </p:txBody>
+      </p:sp>
+      <p:sp>
+        <p:nvSpPr>
+          <p:cNvPr id="6" name="Shape 4"/>
+          <p:cNvSpPr/>
+          <p:nvPr/>
+        </p:nvSpPr>
+        <p:spPr>
+          <a:xfrm>
+            <a:off x="502920" y="1828800"/>
+            <a:ext cx="3657600" cy="1783080"/>
+          </a:xfrm>
+          <a:prstGeom prst="roundRect">
+            <a:avLst>
+              <a:gd name="adj" fmla="val 6154"/>
+            </a:avLst>
+          </a:prstGeom>
+          <a:solidFill>
+            <a:srgbClr val="F7F7F9"/>
+          </a:solidFill>
+          <a:ln w="12700">
+            <a:solidFill>
+              <a:srgbClr val="D9D9E0"/>
+            </a:solidFill>
+            <a:prstDash val="solid"/>
+          </a:ln>
+        </p:spPr>
+      </p:sp>
+      <p:sp>
+        <p:nvSpPr>
+          <p:cNvPr id="7" name="Text 5"/>
+          <p:cNvSpPr/>
+          <p:nvPr/>
+        </p:nvSpPr>
+        <p:spPr>
+          <a:xfrm>
+            <a:off x="704088" y="1975104"/>
+            <a:ext cx="3255264" cy="658368"/>
+          </a:xfrm>
+          <a:prstGeom prst="rect">
+            <a:avLst/>
+          </a:prstGeom>
+          <a:noFill/>
+          <a:ln/>
+        </p:spPr>
+        <p:txBody>
+          <a:bodyPr wrap="square" lIns="0" tIns="0" rIns="0" bIns="0" rtlCol="0" anchor="t"/>
+          <a:lstStyle/>
+          <a:p>
+            <a:pPr indent="0" marL="0">
               <a:lnSpc>
-                <a:spcPct val="110000"/>
+                <a:spcPct val="112000"/>
               </a:lnSpc>
               <a:buNone/>
             </a:pPr>
             <a:r>
-              <a:rPr lang="en-US" sz="1350" b="1" dirty="0">
+              <a:rPr lang="en-US" sz="1250" b="1" dirty="0">
                 <a:solidFill>
-                  <a:srgbClr val="1B2A4A"/>
+                  <a:srgbClr val="3A106E"/>
                 </a:solidFill>
-                <a:latin typeface="Meiryo" pitchFamily="34" charset="0"/>
-                <a:ea typeface="Meiryo" pitchFamily="34" charset="-122"/>
-                <a:cs typeface="Meiryo" pitchFamily="34" charset="-120"/>
+                <a:latin typeface="Yu Gothic" pitchFamily="34" charset="0"/>
+                <a:ea typeface="Yu Gothic" pitchFamily="34" charset="-122"/>
+                <a:cs typeface="Yu Gothic" pitchFamily="34" charset="-120"/>
               </a:rPr>
-              <a:t>部門計画を「営業利益ブリッジ」へ</a:t>
-            </a:r>
-            <a:endParaRPr lang="en-US" sz="1350" dirty="0"/>
+              <a:t>1｜部門計画を「営業利益ブリッジ」へ</a:t>
+            </a:r>
+            <a:endParaRPr lang="en-US" sz="1250" dirty="0"/>
           </a:p>
         </p:txBody>
       </p:sp>
@@ -4970,8 +5448,8 @@
         </p:nvSpPr>
         <p:spPr>
           <a:xfrm>
-            <a:off x="685800" y="2304288"/>
-            <a:ext cx="3300984" cy="914400"/>
+            <a:off x="704088" y="2670048"/>
+            <a:ext cx="3255264" cy="868680"/>
           </a:xfrm>
           <a:prstGeom prst="rect">
             <a:avLst/>
@@ -4990,17 +5468,17 @@
               <a:buNone/>
             </a:pPr>
             <a:r>
-              <a:rPr lang="en-US" sz="1100" dirty="0">
+              <a:rPr lang="en-US" sz="1050" dirty="0">
                 <a:solidFill>
-                  <a:srgbClr val="1A1A1A"/>
+                  <a:srgbClr val="262630"/>
                 </a:solidFill>
-                <a:latin typeface="Meiryo" pitchFamily="34" charset="0"/>
-                <a:ea typeface="Meiryo" pitchFamily="34" charset="-122"/>
-                <a:cs typeface="Meiryo" pitchFamily="34" charset="-120"/>
+                <a:latin typeface="Yu Gothic" pitchFamily="34" charset="0"/>
+                <a:ea typeface="Yu Gothic" pitchFamily="34" charset="-122"/>
+                <a:cs typeface="Yu Gothic" pitchFamily="34" charset="-120"/>
               </a:rPr>
               <a:t>売上・粗利・費用・利益寄与を施策別に説明。一過性／翌期継続／複数年を必ず区分する。</a:t>
             </a:r>
-            <a:endParaRPr lang="en-US" sz="1100" dirty="0"/>
+            <a:endParaRPr lang="en-US" sz="1050" dirty="0"/>
           </a:p>
         </p:txBody>
       </p:sp>
@@ -5012,89 +5490,35 @@
         </p:nvSpPr>
         <p:spPr>
           <a:xfrm>
-            <a:off x="4315968" y="1371600"/>
-            <a:ext cx="3758184" cy="1965960"/>
+            <a:off x="4265676" y="1828800"/>
+            <a:ext cx="3657600" cy="1783080"/>
           </a:xfrm>
           <a:prstGeom prst="roundRect">
             <a:avLst>
-              <a:gd name="adj" fmla="val 2791"/>
+              <a:gd name="adj" fmla="val 6154"/>
             </a:avLst>
           </a:prstGeom>
           <a:solidFill>
-            <a:srgbClr val="F2F4F8"/>
+            <a:srgbClr val="F7F7F9"/>
           </a:solidFill>
-          <a:ln/>
-        </p:spPr>
-      </p:sp>
-      <p:sp>
-        <p:nvSpPr>
-          <p:cNvPr id="10" name="Shape 8"/>
-          <p:cNvSpPr/>
-          <p:nvPr/>
-        </p:nvSpPr>
-        <p:spPr>
-          <a:xfrm>
-            <a:off x="4517136" y="1554480"/>
-            <a:ext cx="384048" cy="384048"/>
-          </a:xfrm>
-          <a:prstGeom prst="ellipse">
-            <a:avLst/>
-          </a:prstGeom>
-          <a:solidFill>
-            <a:srgbClr val="1B2A4A"/>
-          </a:solidFill>
-          <a:ln/>
-        </p:spPr>
-      </p:sp>
-      <p:sp>
-        <p:nvSpPr>
-          <p:cNvPr id="11" name="Text 9"/>
-          <p:cNvSpPr/>
-          <p:nvPr/>
-        </p:nvSpPr>
-        <p:spPr>
-          <a:xfrm>
-            <a:off x="4517136" y="1554480"/>
-            <a:ext cx="384048" cy="384048"/>
-          </a:xfrm>
-          <a:prstGeom prst="rect">
-            <a:avLst/>
-          </a:prstGeom>
-          <a:noFill/>
-          <a:ln/>
-        </p:spPr>
-        <p:txBody>
-          <a:bodyPr wrap="square" lIns="0" tIns="0" rIns="0" bIns="0" rtlCol="0" anchor="ctr"/>
-          <a:lstStyle/>
-          <a:p>
-            <a:pPr algn="ctr" indent="0" marL="0">
-              <a:buNone/>
-            </a:pPr>
-            <a:r>
-              <a:rPr lang="en-US" sz="1500" b="1" dirty="0">
-                <a:solidFill>
-                  <a:srgbClr val="FFFFFF"/>
-                </a:solidFill>
-                <a:latin typeface="Meiryo" pitchFamily="34" charset="0"/>
-                <a:ea typeface="Meiryo" pitchFamily="34" charset="-122"/>
-                <a:cs typeface="Meiryo" pitchFamily="34" charset="-120"/>
-              </a:rPr>
-              <a:t>2</a:t>
-            </a:r>
-            <a:endParaRPr lang="en-US" sz="1500" dirty="0"/>
-          </a:p>
-        </p:txBody>
-      </p:sp>
-      <p:sp>
-        <p:nvSpPr>
-          <p:cNvPr id="12" name="Text 10"/>
-          <p:cNvSpPr/>
-          <p:nvPr/>
-        </p:nvSpPr>
-        <p:spPr>
-          <a:xfrm>
-            <a:off x="5029200" y="1517904"/>
-            <a:ext cx="2862072" cy="777240"/>
+          <a:ln w="12700">
+            <a:solidFill>
+              <a:srgbClr val="D9D9E0"/>
+            </a:solidFill>
+            <a:prstDash val="solid"/>
+          </a:ln>
+        </p:spPr>
+      </p:sp>
+      <p:sp>
+        <p:nvSpPr>
+          <p:cNvPr id="10" name="Text 8"/>
+          <p:cNvSpPr/>
+          <p:nvPr/>
+        </p:nvSpPr>
+        <p:spPr>
+          <a:xfrm>
+            <a:off x="4466844" y="1975104"/>
+            <a:ext cx="3255264" cy="658368"/>
           </a:xfrm>
           <a:prstGeom prst="rect">
             <a:avLst/>
@@ -5108,35 +5532,35 @@
           <a:p>
             <a:pPr indent="0" marL="0">
               <a:lnSpc>
-                <a:spcPct val="110000"/>
+                <a:spcPct val="112000"/>
               </a:lnSpc>
               <a:buNone/>
             </a:pPr>
             <a:r>
-              <a:rPr lang="en-US" sz="1350" b="1" dirty="0">
+              <a:rPr lang="en-US" sz="1250" b="1" dirty="0">
                 <a:solidFill>
-                  <a:srgbClr val="1B2A4A"/>
+                  <a:srgbClr val="3A106E"/>
                 </a:solidFill>
-                <a:latin typeface="Meiryo" pitchFamily="34" charset="0"/>
-                <a:ea typeface="Meiryo" pitchFamily="34" charset="-122"/>
-                <a:cs typeface="Meiryo" pitchFamily="34" charset="-120"/>
+                <a:latin typeface="Yu Gothic" pitchFamily="34" charset="0"/>
+                <a:ea typeface="Yu Gothic" pitchFamily="34" charset="-122"/>
+                <a:cs typeface="Yu Gothic" pitchFamily="34" charset="-120"/>
               </a:rPr>
-              <a:t>パイプラインを確度×利益×計上時期で管理</a:t>
-            </a:r>
-            <a:endParaRPr lang="en-US" sz="1350" dirty="0"/>
+              <a:t>2｜パイプラインを確度×利益×計上時期で管理</a:t>
+            </a:r>
+            <a:endParaRPr lang="en-US" sz="1250" dirty="0"/>
           </a:p>
         </p:txBody>
       </p:sp>
       <p:sp>
         <p:nvSpPr>
-          <p:cNvPr id="13" name="Text 11"/>
-          <p:cNvSpPr/>
-          <p:nvPr/>
-        </p:nvSpPr>
-        <p:spPr>
-          <a:xfrm>
-            <a:off x="4544568" y="2304288"/>
-            <a:ext cx="3300984" cy="914400"/>
+          <p:cNvPr id="11" name="Text 9"/>
+          <p:cNvSpPr/>
+          <p:nvPr/>
+        </p:nvSpPr>
+        <p:spPr>
+          <a:xfrm>
+            <a:off x="4466844" y="2670048"/>
+            <a:ext cx="3255264" cy="868680"/>
           </a:xfrm>
           <a:prstGeom prst="rect">
             <a:avLst/>
@@ -5155,111 +5579,57 @@
               <a:buNone/>
             </a:pPr>
             <a:r>
-              <a:rPr lang="en-US" sz="1100" dirty="0">
+              <a:rPr lang="en-US" sz="1050" dirty="0">
                 <a:solidFill>
-                  <a:srgbClr val="1A1A1A"/>
+                  <a:srgbClr val="262630"/>
                 </a:solidFill>
-                <a:latin typeface="Meiryo" pitchFamily="34" charset="0"/>
-                <a:ea typeface="Meiryo" pitchFamily="34" charset="-122"/>
-                <a:cs typeface="Meiryo" pitchFamily="34" charset="-120"/>
+                <a:latin typeface="Yu Gothic" pitchFamily="34" charset="0"/>
+                <a:ea typeface="Yu Gothic" pitchFamily="34" charset="-122"/>
+                <a:cs typeface="Yu Gothic" pitchFamily="34" charset="-120"/>
               </a:rPr>
               <a:t>A契約済み／B高確度／C提案中／D構想。計画数字に入れるのはA・Bのみ。Cの受注確率を過大評価しない。</a:t>
             </a:r>
-            <a:endParaRPr lang="en-US" sz="1100" dirty="0"/>
+            <a:endParaRPr lang="en-US" sz="1050" dirty="0"/>
           </a:p>
         </p:txBody>
       </p:sp>
       <p:sp>
         <p:nvSpPr>
-          <p:cNvPr id="14" name="Shape 12"/>
-          <p:cNvSpPr/>
-          <p:nvPr/>
-        </p:nvSpPr>
-        <p:spPr>
-          <a:xfrm>
-            <a:off x="8174736" y="1371600"/>
-            <a:ext cx="3758184" cy="1965960"/>
+          <p:cNvPr id="12" name="Shape 10"/>
+          <p:cNvSpPr/>
+          <p:nvPr/>
+        </p:nvSpPr>
+        <p:spPr>
+          <a:xfrm>
+            <a:off x="8028432" y="1828800"/>
+            <a:ext cx="3657600" cy="1783080"/>
           </a:xfrm>
           <a:prstGeom prst="roundRect">
             <a:avLst>
-              <a:gd name="adj" fmla="val 2791"/>
+              <a:gd name="adj" fmla="val 6154"/>
             </a:avLst>
           </a:prstGeom>
           <a:solidFill>
-            <a:srgbClr val="F2F4F8"/>
+            <a:srgbClr val="F7F7F9"/>
           </a:solidFill>
-          <a:ln/>
-        </p:spPr>
-      </p:sp>
-      <p:sp>
-        <p:nvSpPr>
-          <p:cNvPr id="15" name="Shape 13"/>
-          <p:cNvSpPr/>
-          <p:nvPr/>
-        </p:nvSpPr>
-        <p:spPr>
-          <a:xfrm>
-            <a:off x="8375904" y="1554480"/>
-            <a:ext cx="384048" cy="384048"/>
-          </a:xfrm>
-          <a:prstGeom prst="ellipse">
-            <a:avLst/>
-          </a:prstGeom>
-          <a:solidFill>
-            <a:srgbClr val="1B2A4A"/>
-          </a:solidFill>
-          <a:ln/>
-        </p:spPr>
-      </p:sp>
-      <p:sp>
-        <p:nvSpPr>
-          <p:cNvPr id="16" name="Text 14"/>
-          <p:cNvSpPr/>
-          <p:nvPr/>
-        </p:nvSpPr>
-        <p:spPr>
-          <a:xfrm>
-            <a:off x="8375904" y="1554480"/>
-            <a:ext cx="384048" cy="384048"/>
-          </a:xfrm>
-          <a:prstGeom prst="rect">
-            <a:avLst/>
-          </a:prstGeom>
-          <a:noFill/>
-          <a:ln/>
-        </p:spPr>
-        <p:txBody>
-          <a:bodyPr wrap="square" lIns="0" tIns="0" rIns="0" bIns="0" rtlCol="0" anchor="ctr"/>
-          <a:lstStyle/>
-          <a:p>
-            <a:pPr algn="ctr" indent="0" marL="0">
-              <a:buNone/>
-            </a:pPr>
-            <a:r>
-              <a:rPr lang="en-US" sz="1500" b="1" dirty="0">
-                <a:solidFill>
-                  <a:srgbClr val="FFFFFF"/>
-                </a:solidFill>
-                <a:latin typeface="Meiryo" pitchFamily="34" charset="0"/>
-                <a:ea typeface="Meiryo" pitchFamily="34" charset="-122"/>
-                <a:cs typeface="Meiryo" pitchFamily="34" charset="-120"/>
-              </a:rPr>
-              <a:t>3</a:t>
-            </a:r>
-            <a:endParaRPr lang="en-US" sz="1500" dirty="0"/>
-          </a:p>
-        </p:txBody>
-      </p:sp>
-      <p:sp>
-        <p:nvSpPr>
-          <p:cNvPr id="17" name="Text 15"/>
-          <p:cNvSpPr/>
-          <p:nvPr/>
-        </p:nvSpPr>
-        <p:spPr>
-          <a:xfrm>
-            <a:off x="8887968" y="1517904"/>
-            <a:ext cx="2862072" cy="777240"/>
+          <a:ln w="12700">
+            <a:solidFill>
+              <a:srgbClr val="D9D9E0"/>
+            </a:solidFill>
+            <a:prstDash val="solid"/>
+          </a:ln>
+        </p:spPr>
+      </p:sp>
+      <p:sp>
+        <p:nvSpPr>
+          <p:cNvPr id="13" name="Text 11"/>
+          <p:cNvSpPr/>
+          <p:nvPr/>
+        </p:nvSpPr>
+        <p:spPr>
+          <a:xfrm>
+            <a:off x="8229600" y="1975104"/>
+            <a:ext cx="3255264" cy="658368"/>
           </a:xfrm>
           <a:prstGeom prst="rect">
             <a:avLst/>
@@ -5273,35 +5643,35 @@
           <a:p>
             <a:pPr indent="0" marL="0">
               <a:lnSpc>
-                <a:spcPct val="110000"/>
+                <a:spcPct val="112000"/>
               </a:lnSpc>
               <a:buNone/>
             </a:pPr>
             <a:r>
-              <a:rPr lang="en-US" sz="1350" b="1" dirty="0">
+              <a:rPr lang="en-US" sz="1250" b="1" dirty="0">
                 <a:solidFill>
-                  <a:srgbClr val="1B2A4A"/>
+                  <a:srgbClr val="3A106E"/>
                 </a:solidFill>
-                <a:latin typeface="Meiryo" pitchFamily="34" charset="0"/>
-                <a:ea typeface="Meiryo" pitchFamily="34" charset="-122"/>
-                <a:cs typeface="Meiryo" pitchFamily="34" charset="-120"/>
+                <a:latin typeface="Yu Gothic" pitchFamily="34" charset="0"/>
+                <a:ea typeface="Yu Gothic" pitchFamily="34" charset="-122"/>
+                <a:cs typeface="Yu Gothic" pitchFamily="34" charset="-120"/>
               </a:rPr>
-              <a:t>既存深耕とTier1開拓を二層で</a:t>
-            </a:r>
-            <a:endParaRPr lang="en-US" sz="1350" dirty="0"/>
+              <a:t>3｜既存深耕とTier1開拓を二層で</a:t>
+            </a:r>
+            <a:endParaRPr lang="en-US" sz="1250" dirty="0"/>
           </a:p>
         </p:txBody>
       </p:sp>
       <p:sp>
         <p:nvSpPr>
-          <p:cNvPr id="18" name="Text 16"/>
-          <p:cNvSpPr/>
-          <p:nvPr/>
-        </p:nvSpPr>
-        <p:spPr>
-          <a:xfrm>
-            <a:off x="8403336" y="2304288"/>
-            <a:ext cx="3300984" cy="914400"/>
+          <p:cNvPr id="14" name="Text 12"/>
+          <p:cNvSpPr/>
+          <p:nvPr/>
+        </p:nvSpPr>
+        <p:spPr>
+          <a:xfrm>
+            <a:off x="8229600" y="2670048"/>
+            <a:ext cx="3255264" cy="868680"/>
           </a:xfrm>
           <a:prstGeom prst="rect">
             <a:avLst/>
@@ -5320,111 +5690,57 @@
               <a:buNone/>
             </a:pPr>
             <a:r>
-              <a:rPr lang="en-US" sz="1100" dirty="0">
+              <a:rPr lang="en-US" sz="1050" dirty="0">
                 <a:solidFill>
-                  <a:srgbClr val="1A1A1A"/>
+                  <a:srgbClr val="262630"/>
                 </a:solidFill>
-                <a:latin typeface="Meiryo" pitchFamily="34" charset="0"/>
-                <a:ea typeface="Meiryo" pitchFamily="34" charset="-122"/>
-                <a:cs typeface="Meiryo" pitchFamily="34" charset="-120"/>
+                <a:latin typeface="Yu Gothic" pitchFamily="34" charset="0"/>
+                <a:ea typeface="Yu Gothic" pitchFamily="34" charset="-122"/>
+                <a:cs typeface="Yu Gothic" pitchFamily="34" charset="-120"/>
               </a:rPr>
               <a:t>短期は既存ライセンシーのSKU・販路・更新率拡大。中期はTier1企業への複合提案。既存増益を土台に大型案件を上乗せ。</a:t>
             </a:r>
-            <a:endParaRPr lang="en-US" sz="1100" dirty="0"/>
+            <a:endParaRPr lang="en-US" sz="1050" dirty="0"/>
           </a:p>
         </p:txBody>
       </p:sp>
       <p:sp>
         <p:nvSpPr>
-          <p:cNvPr id="19" name="Shape 17"/>
-          <p:cNvSpPr/>
-          <p:nvPr/>
-        </p:nvSpPr>
-        <p:spPr>
-          <a:xfrm>
-            <a:off x="457200" y="3566160"/>
-            <a:ext cx="3758184" cy="1965960"/>
+          <p:cNvPr id="15" name="Shape 13"/>
+          <p:cNvSpPr/>
+          <p:nvPr/>
+        </p:nvSpPr>
+        <p:spPr>
+          <a:xfrm>
+            <a:off x="502920" y="3813048"/>
+            <a:ext cx="3657600" cy="1783080"/>
           </a:xfrm>
           <a:prstGeom prst="roundRect">
             <a:avLst>
-              <a:gd name="adj" fmla="val 2791"/>
+              <a:gd name="adj" fmla="val 6154"/>
             </a:avLst>
           </a:prstGeom>
           <a:solidFill>
-            <a:srgbClr val="F2F4F8"/>
+            <a:srgbClr val="F7F7F9"/>
           </a:solidFill>
-          <a:ln/>
-        </p:spPr>
-      </p:sp>
-      <p:sp>
-        <p:nvSpPr>
-          <p:cNvPr id="20" name="Shape 18"/>
-          <p:cNvSpPr/>
-          <p:nvPr/>
-        </p:nvSpPr>
-        <p:spPr>
-          <a:xfrm>
-            <a:off x="658368" y="3749040"/>
-            <a:ext cx="384048" cy="384048"/>
-          </a:xfrm>
-          <a:prstGeom prst="ellipse">
-            <a:avLst/>
-          </a:prstGeom>
-          <a:solidFill>
-            <a:srgbClr val="1B2A4A"/>
-          </a:solidFill>
-          <a:ln/>
-        </p:spPr>
-      </p:sp>
-      <p:sp>
-        <p:nvSpPr>
-          <p:cNvPr id="21" name="Text 19"/>
-          <p:cNvSpPr/>
-          <p:nvPr/>
-        </p:nvSpPr>
-        <p:spPr>
-          <a:xfrm>
-            <a:off x="658368" y="3749040"/>
-            <a:ext cx="384048" cy="384048"/>
-          </a:xfrm>
-          <a:prstGeom prst="rect">
-            <a:avLst/>
-          </a:prstGeom>
-          <a:noFill/>
-          <a:ln/>
-        </p:spPr>
-        <p:txBody>
-          <a:bodyPr wrap="square" lIns="0" tIns="0" rIns="0" bIns="0" rtlCol="0" anchor="ctr"/>
-          <a:lstStyle/>
-          <a:p>
-            <a:pPr algn="ctr" indent="0" marL="0">
-              <a:buNone/>
-            </a:pPr>
-            <a:r>
-              <a:rPr lang="en-US" sz="1500" b="1" dirty="0">
-                <a:solidFill>
-                  <a:srgbClr val="FFFFFF"/>
-                </a:solidFill>
-                <a:latin typeface="Meiryo" pitchFamily="34" charset="0"/>
-                <a:ea typeface="Meiryo" pitchFamily="34" charset="-122"/>
-                <a:cs typeface="Meiryo" pitchFamily="34" charset="-120"/>
-              </a:rPr>
-              <a:t>4</a:t>
-            </a:r>
-            <a:endParaRPr lang="en-US" sz="1500" dirty="0"/>
-          </a:p>
-        </p:txBody>
-      </p:sp>
-      <p:sp>
-        <p:nvSpPr>
-          <p:cNvPr id="22" name="Text 20"/>
-          <p:cNvSpPr/>
-          <p:nvPr/>
-        </p:nvSpPr>
-        <p:spPr>
-          <a:xfrm>
-            <a:off x="1170432" y="3712464"/>
-            <a:ext cx="2862072" cy="777240"/>
+          <a:ln w="12700">
+            <a:solidFill>
+              <a:srgbClr val="D9D9E0"/>
+            </a:solidFill>
+            <a:prstDash val="solid"/>
+          </a:ln>
+        </p:spPr>
+      </p:sp>
+      <p:sp>
+        <p:nvSpPr>
+          <p:cNvPr id="16" name="Text 14"/>
+          <p:cNvSpPr/>
+          <p:nvPr/>
+        </p:nvSpPr>
+        <p:spPr>
+          <a:xfrm>
+            <a:off x="704088" y="3959352"/>
+            <a:ext cx="3255264" cy="658368"/>
           </a:xfrm>
           <a:prstGeom prst="rect">
             <a:avLst/>
@@ -5438,35 +5754,35 @@
           <a:p>
             <a:pPr indent="0" marL="0">
               <a:lnSpc>
-                <a:spcPct val="110000"/>
+                <a:spcPct val="112000"/>
               </a:lnSpc>
               <a:buNone/>
             </a:pPr>
             <a:r>
-              <a:rPr lang="en-US" sz="1350" b="1" dirty="0">
+              <a:rPr lang="en-US" sz="1250" b="1" dirty="0">
                 <a:solidFill>
-                  <a:srgbClr val="1B2A4A"/>
+                  <a:srgbClr val="3A106E"/>
                 </a:solidFill>
-                <a:latin typeface="Meiryo" pitchFamily="34" charset="0"/>
-                <a:ea typeface="Meiryo" pitchFamily="34" charset="-122"/>
-                <a:cs typeface="Meiryo" pitchFamily="34" charset="-120"/>
+                <a:latin typeface="Yu Gothic" pitchFamily="34" charset="0"/>
+                <a:ea typeface="Yu Gothic" pitchFamily="34" charset="-122"/>
+                <a:cs typeface="Yu Gothic" pitchFamily="34" charset="-120"/>
               </a:rPr>
-              <a:t>契約・監修・制作のリードタイム短縮</a:t>
-            </a:r>
-            <a:endParaRPr lang="en-US" sz="1350" dirty="0"/>
+              <a:t>4｜契約・監修・制作のリードタイム短縮</a:t>
+            </a:r>
+            <a:endParaRPr lang="en-US" sz="1250" dirty="0"/>
           </a:p>
         </p:txBody>
       </p:sp>
       <p:sp>
         <p:nvSpPr>
-          <p:cNvPr id="23" name="Text 21"/>
-          <p:cNvSpPr/>
-          <p:nvPr/>
-        </p:nvSpPr>
-        <p:spPr>
-          <a:xfrm>
-            <a:off x="685800" y="4498848"/>
-            <a:ext cx="3300984" cy="914400"/>
+          <p:cNvPr id="17" name="Text 15"/>
+          <p:cNvSpPr/>
+          <p:nvPr/>
+        </p:nvSpPr>
+        <p:spPr>
+          <a:xfrm>
+            <a:off x="704088" y="4654296"/>
+            <a:ext cx="3255264" cy="868680"/>
           </a:xfrm>
           <a:prstGeom prst="rect">
             <a:avLst/>
@@ -5485,111 +5801,57 @@
               <a:buNone/>
             </a:pPr>
             <a:r>
-              <a:rPr lang="en-US" sz="1100" dirty="0">
+              <a:rPr lang="en-US" sz="1050" dirty="0">
                 <a:solidFill>
-                  <a:srgbClr val="1A1A1A"/>
+                  <a:srgbClr val="262630"/>
                 </a:solidFill>
-                <a:latin typeface="Meiryo" pitchFamily="34" charset="0"/>
-                <a:ea typeface="Meiryo" pitchFamily="34" charset="-122"/>
-                <a:cs typeface="Meiryo" pitchFamily="34" charset="-120"/>
+                <a:latin typeface="Yu Gothic" pitchFamily="34" charset="0"/>
+                <a:ea typeface="Yu Gothic" pitchFamily="34" charset="-122"/>
+                <a:cs typeface="Yu Gothic" pitchFamily="34" charset="-120"/>
               </a:rPr>
               <a:t>案件は契約時点では利益ではない。契約審査日数・監修日数・滞留件数・発売延期額を週次で可視化する。</a:t>
             </a:r>
-            <a:endParaRPr lang="en-US" sz="1100" dirty="0"/>
+            <a:endParaRPr lang="en-US" sz="1050" dirty="0"/>
           </a:p>
         </p:txBody>
       </p:sp>
       <p:sp>
         <p:nvSpPr>
-          <p:cNvPr id="24" name="Shape 22"/>
-          <p:cNvSpPr/>
-          <p:nvPr/>
-        </p:nvSpPr>
-        <p:spPr>
-          <a:xfrm>
-            <a:off x="4315968" y="3566160"/>
-            <a:ext cx="3758184" cy="1965960"/>
+          <p:cNvPr id="18" name="Shape 16"/>
+          <p:cNvSpPr/>
+          <p:nvPr/>
+        </p:nvSpPr>
+        <p:spPr>
+          <a:xfrm>
+            <a:off x="4265676" y="3813048"/>
+            <a:ext cx="3657600" cy="1783080"/>
           </a:xfrm>
           <a:prstGeom prst="roundRect">
             <a:avLst>
-              <a:gd name="adj" fmla="val 2791"/>
+              <a:gd name="adj" fmla="val 6154"/>
             </a:avLst>
           </a:prstGeom>
           <a:solidFill>
-            <a:srgbClr val="F2F4F8"/>
+            <a:srgbClr val="F7F7F9"/>
           </a:solidFill>
-          <a:ln/>
-        </p:spPr>
-      </p:sp>
-      <p:sp>
-        <p:nvSpPr>
-          <p:cNvPr id="25" name="Shape 23"/>
-          <p:cNvSpPr/>
-          <p:nvPr/>
-        </p:nvSpPr>
-        <p:spPr>
-          <a:xfrm>
-            <a:off x="4517136" y="3749040"/>
-            <a:ext cx="384048" cy="384048"/>
-          </a:xfrm>
-          <a:prstGeom prst="ellipse">
-            <a:avLst/>
-          </a:prstGeom>
-          <a:solidFill>
-            <a:srgbClr val="1B2A4A"/>
-          </a:solidFill>
-          <a:ln/>
-        </p:spPr>
-      </p:sp>
-      <p:sp>
-        <p:nvSpPr>
-          <p:cNvPr id="26" name="Text 24"/>
-          <p:cNvSpPr/>
-          <p:nvPr/>
-        </p:nvSpPr>
-        <p:spPr>
-          <a:xfrm>
-            <a:off x="4517136" y="3749040"/>
-            <a:ext cx="384048" cy="384048"/>
-          </a:xfrm>
-          <a:prstGeom prst="rect">
-            <a:avLst/>
-          </a:prstGeom>
-          <a:noFill/>
-          <a:ln/>
-        </p:spPr>
-        <p:txBody>
-          <a:bodyPr wrap="square" lIns="0" tIns="0" rIns="0" bIns="0" rtlCol="0" anchor="ctr"/>
-          <a:lstStyle/>
-          <a:p>
-            <a:pPr algn="ctr" indent="0" marL="0">
-              <a:buNone/>
-            </a:pPr>
-            <a:r>
-              <a:rPr lang="en-US" sz="1500" b="1" dirty="0">
-                <a:solidFill>
-                  <a:srgbClr val="FFFFFF"/>
-                </a:solidFill>
-                <a:latin typeface="Meiryo" pitchFamily="34" charset="0"/>
-                <a:ea typeface="Meiryo" pitchFamily="34" charset="-122"/>
-                <a:cs typeface="Meiryo" pitchFamily="34" charset="-120"/>
-              </a:rPr>
-              <a:t>5</a:t>
-            </a:r>
-            <a:endParaRPr lang="en-US" sz="1500" dirty="0"/>
-          </a:p>
-        </p:txBody>
-      </p:sp>
-      <p:sp>
-        <p:nvSpPr>
-          <p:cNvPr id="27" name="Text 25"/>
-          <p:cNvSpPr/>
-          <p:nvPr/>
-        </p:nvSpPr>
-        <p:spPr>
-          <a:xfrm>
-            <a:off x="5029200" y="3712464"/>
-            <a:ext cx="2862072" cy="777240"/>
+          <a:ln w="12700">
+            <a:solidFill>
+              <a:srgbClr val="D9D9E0"/>
+            </a:solidFill>
+            <a:prstDash val="solid"/>
+          </a:ln>
+        </p:spPr>
+      </p:sp>
+      <p:sp>
+        <p:nvSpPr>
+          <p:cNvPr id="19" name="Text 17"/>
+          <p:cNvSpPr/>
+          <p:nvPr/>
+        </p:nvSpPr>
+        <p:spPr>
+          <a:xfrm>
+            <a:off x="4466844" y="3959352"/>
+            <a:ext cx="3255264" cy="658368"/>
           </a:xfrm>
           <a:prstGeom prst="rect">
             <a:avLst/>
@@ -5603,35 +5865,35 @@
           <a:p>
             <a:pPr indent="0" marL="0">
               <a:lnSpc>
-                <a:spcPct val="110000"/>
+                <a:spcPct val="112000"/>
               </a:lnSpc>
               <a:buNone/>
             </a:pPr>
             <a:r>
-              <a:rPr lang="en-US" sz="1350" b="1" dirty="0">
+              <a:rPr lang="en-US" sz="1250" b="1" dirty="0">
                 <a:solidFill>
-                  <a:srgbClr val="1B2A4A"/>
+                  <a:srgbClr val="3A106E"/>
                 </a:solidFill>
-                <a:latin typeface="Meiryo" pitchFamily="34" charset="0"/>
-                <a:ea typeface="Meiryo" pitchFamily="34" charset="-122"/>
-                <a:cs typeface="Meiryo" pitchFamily="34" charset="-120"/>
+                <a:latin typeface="Yu Gothic" pitchFamily="34" charset="0"/>
+                <a:ea typeface="Yu Gothic" pitchFamily="34" charset="-122"/>
+                <a:cs typeface="Yu Gothic" pitchFamily="34" charset="-120"/>
               </a:rPr>
-              <a:t>MD・デジタル・イベントを横断KPIで</a:t>
-            </a:r>
-            <a:endParaRPr lang="en-US" sz="1350" dirty="0"/>
+              <a:t>5｜MD・デジタル・イベントを横断KPIで</a:t>
+            </a:r>
+            <a:endParaRPr lang="en-US" sz="1250" dirty="0"/>
           </a:p>
         </p:txBody>
       </p:sp>
       <p:sp>
         <p:nvSpPr>
-          <p:cNvPr id="28" name="Text 26"/>
-          <p:cNvSpPr/>
-          <p:nvPr/>
-        </p:nvSpPr>
-        <p:spPr>
-          <a:xfrm>
-            <a:off x="4544568" y="4498848"/>
-            <a:ext cx="3300984" cy="914400"/>
+          <p:cNvPr id="20" name="Text 18"/>
+          <p:cNvSpPr/>
+          <p:nvPr/>
+        </p:nvSpPr>
+        <p:spPr>
+          <a:xfrm>
+            <a:off x="4466844" y="4654296"/>
+            <a:ext cx="3255264" cy="868680"/>
           </a:xfrm>
           <a:prstGeom prst="rect">
             <a:avLst/>
@@ -5650,52 +5912,52 @@
               <a:buNone/>
             </a:pPr>
             <a:r>
-              <a:rPr lang="en-US" sz="1100" dirty="0">
+              <a:rPr lang="en-US" sz="1050" dirty="0">
                 <a:solidFill>
-                  <a:srgbClr val="1A1A1A"/>
+                  <a:srgbClr val="262630"/>
                 </a:solidFill>
-                <a:latin typeface="Meiryo" pitchFamily="34" charset="0"/>
-                <a:ea typeface="Meiryo" pitchFamily="34" charset="-122"/>
-                <a:cs typeface="Meiryo" pitchFamily="34" charset="-120"/>
+                <a:latin typeface="Yu Gothic" pitchFamily="34" charset="0"/>
+                <a:ea typeface="Yu Gothic" pitchFamily="34" charset="-122"/>
+                <a:cs typeface="Yu Gothic" pitchFamily="34" charset="-120"/>
               </a:rPr>
               <a:t>単体売上で終わらせず、顧客ID・EC転換・法人提案化・ライセンス横展開への波及まで測定する。</a:t>
             </a:r>
-            <a:endParaRPr lang="en-US" sz="1100" dirty="0"/>
+            <a:endParaRPr lang="en-US" sz="1050" dirty="0"/>
           </a:p>
         </p:txBody>
       </p:sp>
       <p:sp>
         <p:nvSpPr>
-          <p:cNvPr id="29" name="Shape 27"/>
-          <p:cNvSpPr/>
-          <p:nvPr/>
-        </p:nvSpPr>
-        <p:spPr>
-          <a:xfrm>
-            <a:off x="8174736" y="3566160"/>
-            <a:ext cx="3758184" cy="1965960"/>
+          <p:cNvPr id="21" name="Shape 19"/>
+          <p:cNvSpPr/>
+          <p:nvPr/>
+        </p:nvSpPr>
+        <p:spPr>
+          <a:xfrm>
+            <a:off x="8028432" y="3813048"/>
+            <a:ext cx="3657600" cy="1783080"/>
           </a:xfrm>
           <a:prstGeom prst="roundRect">
             <a:avLst>
-              <a:gd name="adj" fmla="val 2791"/>
+              <a:gd name="adj" fmla="val 6154"/>
             </a:avLst>
           </a:prstGeom>
           <a:solidFill>
-            <a:srgbClr val="1B2A4A"/>
+            <a:srgbClr val="7823DC"/>
           </a:solidFill>
           <a:ln/>
         </p:spPr>
       </p:sp>
       <p:sp>
         <p:nvSpPr>
-          <p:cNvPr id="30" name="Text 28"/>
-          <p:cNvSpPr/>
-          <p:nvPr/>
-        </p:nvSpPr>
-        <p:spPr>
-          <a:xfrm>
-            <a:off x="8403336" y="3712464"/>
-            <a:ext cx="3300984" cy="320040"/>
+          <p:cNvPr id="22" name="Text 20"/>
+          <p:cNvSpPr/>
+          <p:nvPr/>
+        </p:nvSpPr>
+        <p:spPr>
+          <a:xfrm>
+            <a:off x="8229600" y="3941064"/>
+            <a:ext cx="3255264" cy="274320"/>
           </a:xfrm>
           <a:prstGeom prst="rect">
             <a:avLst/>
@@ -5711,30 +5973,30 @@
               <a:buNone/>
             </a:pPr>
             <a:r>
-              <a:rPr lang="en-US" sz="1300" b="1" dirty="0">
+              <a:rPr lang="en-US" sz="1250" b="1" dirty="0">
                 <a:solidFill>
-                  <a:srgbClr val="FF7A85"/>
+                  <a:srgbClr val="FFFFFF"/>
                 </a:solidFill>
-                <a:latin typeface="Meiryo" pitchFamily="34" charset="0"/>
-                <a:ea typeface="Meiryo" pitchFamily="34" charset="-122"/>
-                <a:cs typeface="Meiryo" pitchFamily="34" charset="-120"/>
+                <a:latin typeface="Yu Gothic" pitchFamily="34" charset="0"/>
+                <a:ea typeface="Yu Gothic" pitchFamily="34" charset="-122"/>
+                <a:cs typeface="Yu Gothic" pitchFamily="34" charset="-120"/>
               </a:rPr>
               <a:t>毎週の経営管理フォーマット</a:t>
             </a:r>
-            <a:endParaRPr lang="en-US" sz="1300" dirty="0"/>
+            <a:endParaRPr lang="en-US" sz="1250" dirty="0"/>
           </a:p>
         </p:txBody>
       </p:sp>
       <p:sp>
         <p:nvSpPr>
-          <p:cNvPr id="31" name="Text 29"/>
-          <p:cNvSpPr/>
-          <p:nvPr/>
-        </p:nvSpPr>
-        <p:spPr>
-          <a:xfrm>
-            <a:off x="8403336" y="4069080"/>
-            <a:ext cx="3300984" cy="1371600"/>
+          <p:cNvPr id="23" name="Text 21"/>
+          <p:cNvSpPr/>
+          <p:nvPr/>
+        </p:nvSpPr>
+        <p:spPr>
+          <a:xfrm>
+            <a:off x="8229600" y="4251960"/>
+            <a:ext cx="3255264" cy="1280160"/>
           </a:xfrm>
           <a:prstGeom prst="rect">
             <a:avLst/>
@@ -5748,115 +6010,155 @@
           <a:p>
             <a:pPr indent="0" marL="0">
               <a:lnSpc>
-                <a:spcPct val="135000"/>
+                <a:spcPct val="132000"/>
               </a:lnSpc>
               <a:buNone/>
             </a:pPr>
             <a:r>
-              <a:rPr lang="en-US" sz="1050" dirty="0">
+              <a:rPr lang="en-US" sz="1000" dirty="0">
                 <a:solidFill>
                   <a:srgbClr val="FFFFFF"/>
                 </a:solidFill>
-                <a:latin typeface="Meiryo" pitchFamily="34" charset="0"/>
-                <a:ea typeface="Meiryo" pitchFamily="34" charset="-122"/>
-                <a:cs typeface="Meiryo" pitchFamily="34" charset="-120"/>
+                <a:latin typeface="Yu Gothic" pitchFamily="34" charset="0"/>
+                <a:ea typeface="Yu Gothic" pitchFamily="34" charset="-122"/>
+                <a:cs typeface="Yu Gothic" pitchFamily="34" charset="-120"/>
               </a:rPr>
               <a:t>① 営業利益：計画／見込み／差異</a:t>
             </a:r>
-            <a:endParaRPr lang="en-US" sz="1050" dirty="0"/>
+            <a:endParaRPr lang="en-US" sz="1000" dirty="0"/>
           </a:p>
           <a:p>
             <a:pPr indent="0" marL="0">
               <a:lnSpc>
-                <a:spcPct val="135000"/>
+                <a:spcPct val="132000"/>
               </a:lnSpc>
               <a:buNone/>
             </a:pPr>
             <a:r>
-              <a:rPr lang="en-US" sz="1050" dirty="0">
+              <a:rPr lang="en-US" sz="1000" dirty="0">
                 <a:solidFill>
                   <a:srgbClr val="FFFFFF"/>
                 </a:solidFill>
-                <a:latin typeface="Meiryo" pitchFamily="34" charset="0"/>
-                <a:ea typeface="Meiryo" pitchFamily="34" charset="-122"/>
-                <a:cs typeface="Meiryo" pitchFamily="34" charset="-120"/>
+                <a:latin typeface="Yu Gothic" pitchFamily="34" charset="0"/>
+                <a:ea typeface="Yu Gothic" pitchFamily="34" charset="-122"/>
+                <a:cs typeface="Yu Gothic" pitchFamily="34" charset="-120"/>
               </a:rPr>
               <a:t>② A・B案件の利益と計上月</a:t>
             </a:r>
-            <a:endParaRPr lang="en-US" sz="1050" dirty="0"/>
+            <a:endParaRPr lang="en-US" sz="1000" dirty="0"/>
           </a:p>
           <a:p>
             <a:pPr indent="0" marL="0">
               <a:lnSpc>
-                <a:spcPct val="135000"/>
+                <a:spcPct val="132000"/>
               </a:lnSpc>
               <a:buNone/>
             </a:pPr>
             <a:r>
-              <a:rPr lang="en-US" sz="1050" dirty="0">
+              <a:rPr lang="en-US" sz="1000" dirty="0">
                 <a:solidFill>
                   <a:srgbClr val="FFFFFF"/>
                 </a:solidFill>
-                <a:latin typeface="Meiryo" pitchFamily="34" charset="0"/>
-                <a:ea typeface="Meiryo" pitchFamily="34" charset="-122"/>
-                <a:cs typeface="Meiryo" pitchFamily="34" charset="-120"/>
+                <a:latin typeface="Yu Gothic" pitchFamily="34" charset="0"/>
+                <a:ea typeface="Yu Gothic" pitchFamily="34" charset="-122"/>
+                <a:cs typeface="Yu Gothic" pitchFamily="34" charset="-120"/>
               </a:rPr>
               <a:t>③ 先週からの変動と原因</a:t>
             </a:r>
-            <a:endParaRPr lang="en-US" sz="1050" dirty="0"/>
+            <a:endParaRPr lang="en-US" sz="1000" dirty="0"/>
           </a:p>
           <a:p>
             <a:pPr indent="0" marL="0">
               <a:lnSpc>
-                <a:spcPct val="135000"/>
+                <a:spcPct val="132000"/>
               </a:lnSpc>
               <a:buNone/>
             </a:pPr>
             <a:r>
-              <a:rPr lang="en-US" sz="1050" dirty="0">
+              <a:rPr lang="en-US" sz="1000" dirty="0">
                 <a:solidFill>
                   <a:srgbClr val="FFFFFF"/>
                 </a:solidFill>
-                <a:latin typeface="Meiryo" pitchFamily="34" charset="0"/>
-                <a:ea typeface="Meiryo" pitchFamily="34" charset="-122"/>
-                <a:cs typeface="Meiryo" pitchFamily="34" charset="-120"/>
+                <a:latin typeface="Yu Gothic" pitchFamily="34" charset="0"/>
+                <a:ea typeface="Yu Gothic" pitchFamily="34" charset="-122"/>
+                <a:cs typeface="Yu Gothic" pitchFamily="34" charset="-120"/>
               </a:rPr>
               <a:t>④ 契約・監修・制作のボトルネック</a:t>
             </a:r>
-            <a:endParaRPr lang="en-US" sz="1050" dirty="0"/>
+            <a:endParaRPr lang="en-US" sz="1000" dirty="0"/>
           </a:p>
           <a:p>
             <a:pPr indent="0" marL="0">
               <a:lnSpc>
-                <a:spcPct val="135000"/>
+                <a:spcPct val="132000"/>
               </a:lnSpc>
               <a:buNone/>
             </a:pPr>
             <a:r>
-              <a:rPr lang="en-US" sz="1050" dirty="0">
+              <a:rPr lang="en-US" sz="1000" dirty="0">
                 <a:solidFill>
                   <a:srgbClr val="FFFFFF"/>
                 </a:solidFill>
-                <a:latin typeface="Meiryo" pitchFamily="34" charset="0"/>
-                <a:ea typeface="Meiryo" pitchFamily="34" charset="-122"/>
-                <a:cs typeface="Meiryo" pitchFamily="34" charset="-120"/>
+                <a:latin typeface="Yu Gothic" pitchFamily="34" charset="0"/>
+                <a:ea typeface="Yu Gothic" pitchFamily="34" charset="-122"/>
+                <a:cs typeface="Yu Gothic" pitchFamily="34" charset="-120"/>
               </a:rPr>
               <a:t>⑤ 経営判断が必要な事項と期限</a:t>
             </a:r>
-            <a:endParaRPr lang="en-US" sz="1050" dirty="0"/>
+            <a:endParaRPr lang="en-US" sz="1000" dirty="0"/>
           </a:p>
         </p:txBody>
       </p:sp>
       <p:sp>
         <p:nvSpPr>
-          <p:cNvPr id="32" name="Text 30"/>
-          <p:cNvSpPr/>
-          <p:nvPr/>
-        </p:nvSpPr>
-        <p:spPr>
-          <a:xfrm>
-            <a:off x="457200" y="5943600"/>
-            <a:ext cx="11274552" cy="411480"/>
+          <p:cNvPr id="24" name="Shape 22"/>
+          <p:cNvSpPr/>
+          <p:nvPr/>
+        </p:nvSpPr>
+        <p:spPr>
+          <a:xfrm>
+            <a:off x="502920" y="5806440"/>
+            <a:ext cx="11183112" cy="530352"/>
+          </a:xfrm>
+          <a:prstGeom prst="rect">
+            <a:avLst/>
+          </a:prstGeom>
+          <a:solidFill>
+            <a:srgbClr val="F3EFFB"/>
+          </a:solidFill>
+          <a:ln/>
+        </p:spPr>
+      </p:sp>
+      <p:sp>
+        <p:nvSpPr>
+          <p:cNvPr id="25" name="Shape 23"/>
+          <p:cNvSpPr/>
+          <p:nvPr/>
+        </p:nvSpPr>
+        <p:spPr>
+          <a:xfrm>
+            <a:off x="502920" y="5806440"/>
+            <a:ext cx="50292" cy="530352"/>
+          </a:xfrm>
+          <a:prstGeom prst="rect">
+            <a:avLst/>
+          </a:prstGeom>
+          <a:solidFill>
+            <a:srgbClr val="7823DC"/>
+          </a:solidFill>
+          <a:ln/>
+        </p:spPr>
+      </p:sp>
+      <p:sp>
+        <p:nvSpPr>
+          <p:cNvPr id="26" name="Text 24"/>
+          <p:cNvSpPr/>
+          <p:nvPr/>
+        </p:nvSpPr>
+        <p:spPr>
+          <a:xfrm>
+            <a:off x="777240" y="5806440"/>
+            <a:ext cx="10835640" cy="530352"/>
           </a:xfrm>
           <a:prstGeom prst="rect">
             <a:avLst/>
@@ -5872,17 +6174,129 @@
               <a:buNone/>
             </a:pPr>
             <a:r>
-              <a:rPr lang="en-US" sz="1350" b="1" dirty="0">
+              <a:rPr lang="en-US" sz="1250" b="1" dirty="0">
                 <a:solidFill>
-                  <a:srgbClr val="C8102E"/>
+                  <a:srgbClr val="7823DC"/>
                 </a:solidFill>
-                <a:latin typeface="Meiryo" pitchFamily="34" charset="0"/>
-                <a:ea typeface="Meiryo" pitchFamily="34" charset="-122"/>
-                <a:cs typeface="Meiryo" pitchFamily="34" charset="-120"/>
+                <a:latin typeface="Yu Gothic" pitchFamily="34" charset="0"/>
+                <a:ea typeface="Yu Gothic" pitchFamily="34" charset="-122"/>
+                <a:cs typeface="Yu Gothic" pitchFamily="34" charset="-120"/>
+              </a:rPr>
+              <a:t>この場で覚えて帰ってほしいこと　</a:t>
+            </a:r>
+            <a:pPr indent="0" marL="0">
+              <a:buNone/>
+            </a:pPr>
+            <a:r>
+              <a:rPr lang="en-US" sz="1250" dirty="0">
+                <a:solidFill>
+                  <a:srgbClr val="262630"/>
+                </a:solidFill>
+                <a:latin typeface="Yu Gothic" pitchFamily="34" charset="0"/>
+                <a:ea typeface="Yu Gothic" pitchFamily="34" charset="-122"/>
+                <a:cs typeface="Yu Gothic" pitchFamily="34" charset="-120"/>
               </a:rPr>
               <a:t>部長評価は「活動量」ではなく、営業利益・確度・計上時期・継続性・実行速度で行う。</a:t>
             </a:r>
-            <a:endParaRPr lang="en-US" sz="1350" dirty="0"/>
+            <a:endParaRPr lang="en-US" sz="1250" dirty="0"/>
+          </a:p>
+        </p:txBody>
+      </p:sp>
+      <p:sp>
+        <p:nvSpPr>
+          <p:cNvPr id="27" name="Shape 25"/>
+          <p:cNvSpPr/>
+          <p:nvPr/>
+        </p:nvSpPr>
+        <p:spPr>
+          <a:xfrm>
+            <a:off x="502920" y="6473952"/>
+            <a:ext cx="11183112" cy="7315"/>
+          </a:xfrm>
+          <a:prstGeom prst="rect">
+            <a:avLst/>
+          </a:prstGeom>
+          <a:solidFill>
+            <a:srgbClr val="D9D9E0"/>
+          </a:solidFill>
+          <a:ln/>
+        </p:spPr>
+      </p:sp>
+      <p:sp>
+        <p:nvSpPr>
+          <p:cNvPr id="28" name="Text 26"/>
+          <p:cNvSpPr/>
+          <p:nvPr/>
+        </p:nvSpPr>
+        <p:spPr>
+          <a:xfrm>
+            <a:off x="502920" y="6519672"/>
+            <a:ext cx="8229600" cy="256032"/>
+          </a:xfrm>
+          <a:prstGeom prst="rect">
+            <a:avLst/>
+          </a:prstGeom>
+          <a:noFill/>
+          <a:ln/>
+        </p:spPr>
+        <p:txBody>
+          <a:bodyPr wrap="square" lIns="0" tIns="0" rIns="0" bIns="0" rtlCol="0" anchor="ctr"/>
+          <a:lstStyle/>
+          <a:p>
+            <a:pPr indent="0" marL="0">
+              <a:buNone/>
+            </a:pPr>
+            <a:r>
+              <a:rPr lang="en-US" sz="850" dirty="0">
+                <a:solidFill>
+                  <a:srgbClr val="5F5F6E"/>
+                </a:solidFill>
+                <a:latin typeface="Yu Gothic" pitchFamily="34" charset="0"/>
+                <a:ea typeface="Yu Gothic" pitchFamily="34" charset="-122"/>
+                <a:cs typeface="Yu Gothic" pitchFamily="34" charset="-120"/>
+              </a:rPr>
+              <a:t>円谷フィールズホールディングス／円谷プロダクション｜部長会資料（社外秘）</a:t>
+            </a:r>
+            <a:endParaRPr lang="en-US" sz="850" dirty="0"/>
+          </a:p>
+        </p:txBody>
+      </p:sp>
+      <p:sp>
+        <p:nvSpPr>
+          <p:cNvPr id="29" name="Text 27"/>
+          <p:cNvSpPr/>
+          <p:nvPr/>
+        </p:nvSpPr>
+        <p:spPr>
+          <a:xfrm>
+            <a:off x="11247120" y="6519672"/>
+            <a:ext cx="438912" cy="256032"/>
+          </a:xfrm>
+          <a:prstGeom prst="rect">
+            <a:avLst/>
+          </a:prstGeom>
+          <a:noFill/>
+          <a:ln/>
+        </p:spPr>
+        <p:txBody>
+          <a:bodyPr wrap="square" lIns="0" tIns="0" rIns="0" bIns="0" rtlCol="0" anchor="ctr"/>
+          <a:lstStyle/>
+          <a:p>
+            <a:pPr algn="r" indent="0" marL="0">
+              <a:buNone/>
+            </a:pPr>
+            <a:r>
+              <a:rPr lang="en-US" sz="900" dirty="0">
+                <a:solidFill>
+                  <a:srgbClr val="5F5F6E"/>
+                </a:solidFill>
+                <a:latin typeface="Yu Gothic" pitchFamily="34" charset="0"/>
+                <a:ea typeface="Yu Gothic" pitchFamily="34" charset="-122"/>
+                <a:cs typeface="Yu Gothic" pitchFamily="34" charset="-120"/>
+              </a:rPr>
+              <a:t>4</a:t>
+            </a:r>
+            <a:endParaRPr lang="en-US" sz="900" dirty="0"/>
           </a:p>
         </p:txBody>
       </p:sp>
@@ -5926,8 +6340,8 @@
         </p:nvSpPr>
         <p:spPr>
           <a:xfrm>
-            <a:off x="457200" y="320040"/>
-            <a:ext cx="8686800" cy="548640"/>
+            <a:off x="502920" y="274320"/>
+            <a:ext cx="11155680" cy="292608"/>
           </a:xfrm>
           <a:prstGeom prst="rect">
             <a:avLst/>
@@ -5943,17 +6357,17 @@
               <a:buNone/>
             </a:pPr>
             <a:r>
-              <a:rPr lang="en-US" sz="2600" b="1" dirty="0">
+              <a:rPr lang="en-US" sz="1150" b="1" dirty="0">
                 <a:solidFill>
-                  <a:srgbClr val="1B2A4A"/>
+                  <a:srgbClr val="7823DC"/>
                 </a:solidFill>
-                <a:latin typeface="Meiryo" pitchFamily="34" charset="0"/>
-                <a:ea typeface="Meiryo" pitchFamily="34" charset="-122"/>
-                <a:cs typeface="Meiryo" pitchFamily="34" charset="-120"/>
+                <a:latin typeface="Yu Gothic" pitchFamily="34" charset="0"/>
+                <a:ea typeface="Yu Gothic" pitchFamily="34" charset="-122"/>
+                <a:cs typeface="Yu Gothic" pitchFamily="34" charset="-120"/>
               </a:rPr>
-              <a:t>4｜今後90日間の実行計画</a:t>
-            </a:r>
-            <a:endParaRPr lang="en-US" sz="2600" dirty="0"/>
+              <a:t>スケジュール</a:t>
+            </a:r>
+            <a:endParaRPr lang="en-US" sz="1150" dirty="0"/>
           </a:p>
         </p:txBody>
       </p:sp>
@@ -5965,8 +6379,74 @@
         </p:nvSpPr>
         <p:spPr>
           <a:xfrm>
-            <a:off x="457200" y="868680"/>
-            <a:ext cx="10972800" cy="320040"/>
+            <a:off x="502920" y="566928"/>
+            <a:ext cx="11155680" cy="502920"/>
+          </a:xfrm>
+          <a:prstGeom prst="rect">
+            <a:avLst/>
+          </a:prstGeom>
+          <a:noFill/>
+          <a:ln/>
+        </p:spPr>
+        <p:txBody>
+          <a:bodyPr wrap="square" lIns="0" tIns="0" rIns="0" bIns="0" rtlCol="0" anchor="t"/>
+          <a:lstStyle/>
+          <a:p>
+            <a:pPr indent="0" marL="0">
+              <a:buNone/>
+            </a:pPr>
+            <a:r>
+              <a:rPr lang="en-US" sz="2200" b="1" dirty="0">
+                <a:solidFill>
+                  <a:srgbClr val="262630"/>
+                </a:solidFill>
+                <a:latin typeface="Yu Gothic" pitchFamily="34" charset="0"/>
+                <a:ea typeface="Yu Gothic" pitchFamily="34" charset="-122"/>
+                <a:cs typeface="Yu Gothic" pitchFamily="34" charset="-120"/>
+              </a:rPr>
+              <a:t>今後90日間の実行計画――「理解」ではなく「数字が動く状態」をつくる</a:t>
+            </a:r>
+            <a:endParaRPr lang="en-US" sz="2200" dirty="0"/>
+          </a:p>
+        </p:txBody>
+      </p:sp>
+      <p:sp>
+        <p:nvSpPr>
+          <p:cNvPr id="4" name="Shape 2"/>
+          <p:cNvSpPr/>
+          <p:nvPr/>
+        </p:nvSpPr>
+        <p:spPr>
+          <a:xfrm>
+            <a:off x="502920" y="1234440"/>
+            <a:ext cx="3657600" cy="1965960"/>
+          </a:xfrm>
+          <a:prstGeom prst="roundRect">
+            <a:avLst>
+              <a:gd name="adj" fmla="val 5581"/>
+            </a:avLst>
+          </a:prstGeom>
+          <a:solidFill>
+            <a:srgbClr val="F7F7F9"/>
+          </a:solidFill>
+          <a:ln w="12700">
+            <a:solidFill>
+              <a:srgbClr val="D9D9E0"/>
+            </a:solidFill>
+            <a:prstDash val="solid"/>
+          </a:ln>
+        </p:spPr>
+      </p:sp>
+      <p:sp>
+        <p:nvSpPr>
+          <p:cNvPr id="5" name="Text 3"/>
+          <p:cNvSpPr/>
+          <p:nvPr/>
+        </p:nvSpPr>
+        <p:spPr>
+          <a:xfrm>
+            <a:off x="704088" y="1371600"/>
+            <a:ext cx="3255264" cy="347472"/>
           </a:xfrm>
           <a:prstGeom prst="rect">
             <a:avLst/>
@@ -5982,78 +6462,17 @@
               <a:buNone/>
             </a:pPr>
             <a:r>
-              <a:rPr lang="en-US" sz="1250" dirty="0">
+              <a:rPr lang="en-US" sz="1600" b="1" dirty="0">
                 <a:solidFill>
-                  <a:srgbClr val="5A6472"/>
+                  <a:srgbClr val="7823DC"/>
                 </a:solidFill>
-                <a:latin typeface="Meiryo" pitchFamily="34" charset="0"/>
-                <a:ea typeface="Meiryo" pitchFamily="34" charset="-122"/>
-                <a:cs typeface="Meiryo" pitchFamily="34" charset="-120"/>
-              </a:rPr>
-              <a:t>「理解」ではなく「数字が動く状態」をつくる</a:t>
-            </a:r>
-            <a:endParaRPr lang="en-US" sz="1250" dirty="0"/>
-          </a:p>
-        </p:txBody>
-      </p:sp>
-      <p:sp>
-        <p:nvSpPr>
-          <p:cNvPr id="4" name="Shape 2"/>
-          <p:cNvSpPr/>
-          <p:nvPr/>
-        </p:nvSpPr>
-        <p:spPr>
-          <a:xfrm>
-            <a:off x="457200" y="1371600"/>
-            <a:ext cx="3758184" cy="2286000"/>
-          </a:xfrm>
-          <a:prstGeom prst="roundRect">
-            <a:avLst>
-              <a:gd name="adj" fmla="val 2400"/>
-            </a:avLst>
-          </a:prstGeom>
-          <a:solidFill>
-            <a:srgbClr val="F2F4F8"/>
-          </a:solidFill>
-          <a:ln/>
-        </p:spPr>
-      </p:sp>
-      <p:sp>
-        <p:nvSpPr>
-          <p:cNvPr id="5" name="Text 3"/>
-          <p:cNvSpPr/>
-          <p:nvPr/>
-        </p:nvSpPr>
-        <p:spPr>
-          <a:xfrm>
-            <a:off x="685800" y="1536192"/>
-            <a:ext cx="3300984" cy="384048"/>
-          </a:xfrm>
-          <a:prstGeom prst="rect">
-            <a:avLst/>
-          </a:prstGeom>
-          <a:noFill/>
-          <a:ln/>
-        </p:spPr>
-        <p:txBody>
-          <a:bodyPr wrap="square" lIns="0" tIns="0" rIns="0" bIns="0" rtlCol="0" anchor="ctr"/>
-          <a:lstStyle/>
-          <a:p>
-            <a:pPr indent="0" marL="0">
-              <a:buNone/>
-            </a:pPr>
-            <a:r>
-              <a:rPr lang="en-US" sz="1800" b="1" dirty="0">
-                <a:solidFill>
-                  <a:srgbClr val="C8102E"/>
-                </a:solidFill>
-                <a:latin typeface="Meiryo" pitchFamily="34" charset="0"/>
-                <a:ea typeface="Meiryo" pitchFamily="34" charset="-122"/>
-                <a:cs typeface="Meiryo" pitchFamily="34" charset="-120"/>
+                <a:latin typeface="Yu Gothic" pitchFamily="34" charset="0"/>
+                <a:ea typeface="Yu Gothic" pitchFamily="34" charset="-122"/>
+                <a:cs typeface="Yu Gothic" pitchFamily="34" charset="-120"/>
               </a:rPr>
               <a:t>30日以内</a:t>
             </a:r>
-            <a:endParaRPr lang="en-US" sz="1800" dirty="0"/>
+            <a:endParaRPr lang="en-US" sz="1600" dirty="0"/>
           </a:p>
         </p:txBody>
       </p:sp>
@@ -6065,8 +6484,8 @@
         </p:nvSpPr>
         <p:spPr>
           <a:xfrm>
-            <a:off x="685800" y="1993392"/>
-            <a:ext cx="3300984" cy="960120"/>
+            <a:off x="704088" y="1764792"/>
+            <a:ext cx="3255264" cy="868680"/>
           </a:xfrm>
           <a:prstGeom prst="rect">
             <a:avLst/>
@@ -6080,22 +6499,22 @@
           <a:p>
             <a:pPr indent="0" marL="0">
               <a:lnSpc>
-                <a:spcPct val="125000"/>
+                <a:spcPct val="122000"/>
               </a:lnSpc>
               <a:buNone/>
             </a:pPr>
             <a:r>
-              <a:rPr lang="en-US" sz="1150" dirty="0">
+              <a:rPr lang="en-US" sz="1050" dirty="0">
                 <a:solidFill>
-                  <a:srgbClr val="1A1A1A"/>
+                  <a:srgbClr val="262630"/>
                 </a:solidFill>
-                <a:latin typeface="Meiryo" pitchFamily="34" charset="0"/>
-                <a:ea typeface="Meiryo" pitchFamily="34" charset="-122"/>
-                <a:cs typeface="Meiryo" pitchFamily="34" charset="-120"/>
+                <a:latin typeface="Yu Gothic" pitchFamily="34" charset="0"/>
+                <a:ea typeface="Yu Gothic" pitchFamily="34" charset="-122"/>
+                <a:cs typeface="Yu Gothic" pitchFamily="34" charset="-120"/>
               </a:rPr>
               <a:t>上方修正の部門別・案件別分解／A〜D確度分類／一過性と継続性の分離</a:t>
             </a:r>
-            <a:endParaRPr lang="en-US" sz="1150" dirty="0"/>
+            <a:endParaRPr lang="en-US" sz="1050" dirty="0"/>
           </a:p>
         </p:txBody>
       </p:sp>
@@ -6107,8 +6526,8 @@
         </p:nvSpPr>
         <p:spPr>
           <a:xfrm>
-            <a:off x="685800" y="3017520"/>
-            <a:ext cx="3300984" cy="548640"/>
+            <a:off x="704088" y="2651760"/>
+            <a:ext cx="3255264" cy="475488"/>
           </a:xfrm>
           <a:prstGeom prst="rect">
             <a:avLst/>
@@ -6127,13 +6546,13 @@
               <a:buNone/>
             </a:pPr>
             <a:r>
-              <a:rPr lang="en-US" sz="1100" b="1" dirty="0">
+              <a:rPr lang="en-US" sz="1000" b="1" dirty="0">
                 <a:solidFill>
-                  <a:srgbClr val="1B2A4A"/>
+                  <a:srgbClr val="3A106E"/>
                 </a:solidFill>
-                <a:latin typeface="Meiryo" pitchFamily="34" charset="0"/>
-                <a:ea typeface="Meiryo" pitchFamily="34" charset="-122"/>
-                <a:cs typeface="Meiryo" pitchFamily="34" charset="-120"/>
+                <a:latin typeface="Yu Gothic" pitchFamily="34" charset="0"/>
+                <a:ea typeface="Yu Gothic" pitchFamily="34" charset="-122"/>
+                <a:cs typeface="Yu Gothic" pitchFamily="34" charset="-120"/>
               </a:rPr>
               <a:t>アウトプット：</a:t>
             </a:r>
@@ -6144,17 +6563,17 @@
               <a:buNone/>
             </a:pPr>
             <a:r>
-              <a:rPr lang="en-US" sz="1100" dirty="0">
+              <a:rPr lang="en-US" sz="1000" dirty="0">
                 <a:solidFill>
-                  <a:srgbClr val="1B2A4A"/>
+                  <a:srgbClr val="3A106E"/>
                 </a:solidFill>
-                <a:latin typeface="Meiryo" pitchFamily="34" charset="0"/>
-                <a:ea typeface="Meiryo" pitchFamily="34" charset="-122"/>
-                <a:cs typeface="Meiryo" pitchFamily="34" charset="-120"/>
+                <a:latin typeface="Yu Gothic" pitchFamily="34" charset="0"/>
+                <a:ea typeface="Yu Gothic" pitchFamily="34" charset="-122"/>
+                <a:cs typeface="Yu Gothic" pitchFamily="34" charset="-120"/>
               </a:rPr>
               <a:t>部門別営業利益ブリッジ、通期着地見込み</a:t>
             </a:r>
-            <a:endParaRPr lang="en-US" sz="1100" dirty="0"/>
+            <a:endParaRPr lang="en-US" sz="1000" dirty="0"/>
           </a:p>
         </p:txBody>
       </p:sp>
@@ -6166,18 +6585,23 @@
         </p:nvSpPr>
         <p:spPr>
           <a:xfrm>
-            <a:off x="4315968" y="1371600"/>
-            <a:ext cx="3758184" cy="2286000"/>
+            <a:off x="4265676" y="1234440"/>
+            <a:ext cx="3657600" cy="1965960"/>
           </a:xfrm>
           <a:prstGeom prst="roundRect">
             <a:avLst>
-              <a:gd name="adj" fmla="val 2400"/>
+              <a:gd name="adj" fmla="val 5581"/>
             </a:avLst>
           </a:prstGeom>
           <a:solidFill>
-            <a:srgbClr val="F2F4F8"/>
+            <a:srgbClr val="F7F7F9"/>
           </a:solidFill>
-          <a:ln/>
+          <a:ln w="12700">
+            <a:solidFill>
+              <a:srgbClr val="D9D9E0"/>
+            </a:solidFill>
+            <a:prstDash val="solid"/>
+          </a:ln>
         </p:spPr>
       </p:sp>
       <p:sp>
@@ -6188,8 +6612,8 @@
         </p:nvSpPr>
         <p:spPr>
           <a:xfrm>
-            <a:off x="4544568" y="1536192"/>
-            <a:ext cx="3300984" cy="384048"/>
+            <a:off x="4466844" y="1371600"/>
+            <a:ext cx="3255264" cy="347472"/>
           </a:xfrm>
           <a:prstGeom prst="rect">
             <a:avLst/>
@@ -6205,17 +6629,17 @@
               <a:buNone/>
             </a:pPr>
             <a:r>
-              <a:rPr lang="en-US" sz="1800" b="1" dirty="0">
+              <a:rPr lang="en-US" sz="1600" b="1" dirty="0">
                 <a:solidFill>
-                  <a:srgbClr val="C8102E"/>
+                  <a:srgbClr val="7823DC"/>
                 </a:solidFill>
-                <a:latin typeface="Meiryo" pitchFamily="34" charset="0"/>
-                <a:ea typeface="Meiryo" pitchFamily="34" charset="-122"/>
-                <a:cs typeface="Meiryo" pitchFamily="34" charset="-120"/>
+                <a:latin typeface="Yu Gothic" pitchFamily="34" charset="0"/>
+                <a:ea typeface="Yu Gothic" pitchFamily="34" charset="-122"/>
+                <a:cs typeface="Yu Gothic" pitchFamily="34" charset="-120"/>
               </a:rPr>
               <a:t>60日以内</a:t>
             </a:r>
-            <a:endParaRPr lang="en-US" sz="1800" dirty="0"/>
+            <a:endParaRPr lang="en-US" sz="1600" dirty="0"/>
           </a:p>
         </p:txBody>
       </p:sp>
@@ -6227,8 +6651,8 @@
         </p:nvSpPr>
         <p:spPr>
           <a:xfrm>
-            <a:off x="4544568" y="1993392"/>
-            <a:ext cx="3300984" cy="960120"/>
+            <a:off x="4466844" y="1764792"/>
+            <a:ext cx="3255264" cy="868680"/>
           </a:xfrm>
           <a:prstGeom prst="rect">
             <a:avLst/>
@@ -6242,22 +6666,22 @@
           <a:p>
             <a:pPr indent="0" marL="0">
               <a:lnSpc>
-                <a:spcPct val="125000"/>
+                <a:spcPct val="122000"/>
               </a:lnSpc>
               <a:buNone/>
             </a:pPr>
             <a:r>
-              <a:rPr lang="en-US" sz="1150" dirty="0">
+              <a:rPr lang="en-US" sz="1050" dirty="0">
                 <a:solidFill>
-                  <a:srgbClr val="1A1A1A"/>
+                  <a:srgbClr val="262630"/>
                 </a:solidFill>
-                <a:latin typeface="Meiryo" pitchFamily="34" charset="0"/>
-                <a:ea typeface="Meiryo" pitchFamily="34" charset="-122"/>
-                <a:cs typeface="Meiryo" pitchFamily="34" charset="-120"/>
+                <a:latin typeface="Yu Gothic" pitchFamily="34" charset="0"/>
+                <a:ea typeface="Yu Gothic" pitchFamily="34" charset="-122"/>
+                <a:cs typeface="Yu Gothic" pitchFamily="34" charset="-120"/>
               </a:rPr>
               <a:t>重点顧客・重点カテゴリーの確定／既存顧客深耕計画／中国成功施策の国内実証</a:t>
             </a:r>
-            <a:endParaRPr lang="en-US" sz="1150" dirty="0"/>
+            <a:endParaRPr lang="en-US" sz="1050" dirty="0"/>
           </a:p>
         </p:txBody>
       </p:sp>
@@ -6269,8 +6693,8 @@
         </p:nvSpPr>
         <p:spPr>
           <a:xfrm>
-            <a:off x="4544568" y="3017520"/>
-            <a:ext cx="3300984" cy="548640"/>
+            <a:off x="4466844" y="2651760"/>
+            <a:ext cx="3255264" cy="475488"/>
           </a:xfrm>
           <a:prstGeom prst="rect">
             <a:avLst/>
@@ -6289,13 +6713,13 @@
               <a:buNone/>
             </a:pPr>
             <a:r>
-              <a:rPr lang="en-US" sz="1100" b="1" dirty="0">
+              <a:rPr lang="en-US" sz="1000" b="1" dirty="0">
                 <a:solidFill>
-                  <a:srgbClr val="1B2A4A"/>
+                  <a:srgbClr val="3A106E"/>
                 </a:solidFill>
-                <a:latin typeface="Meiryo" pitchFamily="34" charset="0"/>
-                <a:ea typeface="Meiryo" pitchFamily="34" charset="-122"/>
-                <a:cs typeface="Meiryo" pitchFamily="34" charset="-120"/>
+                <a:latin typeface="Yu Gothic" pitchFamily="34" charset="0"/>
+                <a:ea typeface="Yu Gothic" pitchFamily="34" charset="-122"/>
+                <a:cs typeface="Yu Gothic" pitchFamily="34" charset="-120"/>
               </a:rPr>
               <a:t>アウトプット：</a:t>
             </a:r>
@@ -6306,17 +6730,17 @@
               <a:buNone/>
             </a:pPr>
             <a:r>
-              <a:rPr lang="en-US" sz="1100" dirty="0">
+              <a:rPr lang="en-US" sz="1000" dirty="0">
                 <a:solidFill>
-                  <a:srgbClr val="1B2A4A"/>
+                  <a:srgbClr val="3A106E"/>
                 </a:solidFill>
-                <a:latin typeface="Meiryo" pitchFamily="34" charset="0"/>
-                <a:ea typeface="Meiryo" pitchFamily="34" charset="-122"/>
-                <a:cs typeface="Meiryo" pitchFamily="34" charset="-120"/>
+                <a:latin typeface="Yu Gothic" pitchFamily="34" charset="0"/>
+                <a:ea typeface="Yu Gothic" pitchFamily="34" charset="-122"/>
+                <a:cs typeface="Yu Gothic" pitchFamily="34" charset="-120"/>
               </a:rPr>
               <a:t>アカウントプラン、施策別KPI、責任者・期限</a:t>
             </a:r>
-            <a:endParaRPr lang="en-US" sz="1100" dirty="0"/>
+            <a:endParaRPr lang="en-US" sz="1000" dirty="0"/>
           </a:p>
         </p:txBody>
       </p:sp>
@@ -6328,18 +6752,23 @@
         </p:nvSpPr>
         <p:spPr>
           <a:xfrm>
-            <a:off x="8174736" y="1371600"/>
-            <a:ext cx="3758184" cy="2286000"/>
+            <a:off x="8028432" y="1234440"/>
+            <a:ext cx="3657600" cy="1965960"/>
           </a:xfrm>
           <a:prstGeom prst="roundRect">
             <a:avLst>
-              <a:gd name="adj" fmla="val 2400"/>
+              <a:gd name="adj" fmla="val 5581"/>
             </a:avLst>
           </a:prstGeom>
           <a:solidFill>
-            <a:srgbClr val="F2F4F8"/>
+            <a:srgbClr val="F7F7F9"/>
           </a:solidFill>
-          <a:ln/>
+          <a:ln w="12700">
+            <a:solidFill>
+              <a:srgbClr val="D9D9E0"/>
+            </a:solidFill>
+            <a:prstDash val="solid"/>
+          </a:ln>
         </p:spPr>
       </p:sp>
       <p:sp>
@@ -6350,8 +6779,8 @@
         </p:nvSpPr>
         <p:spPr>
           <a:xfrm>
-            <a:off x="8403336" y="1536192"/>
-            <a:ext cx="3300984" cy="384048"/>
+            <a:off x="8229600" y="1371600"/>
+            <a:ext cx="3255264" cy="347472"/>
           </a:xfrm>
           <a:prstGeom prst="rect">
             <a:avLst/>
@@ -6367,17 +6796,17 @@
               <a:buNone/>
             </a:pPr>
             <a:r>
-              <a:rPr lang="en-US" sz="1800" b="1" dirty="0">
+              <a:rPr lang="en-US" sz="1600" b="1" dirty="0">
                 <a:solidFill>
-                  <a:srgbClr val="C8102E"/>
+                  <a:srgbClr val="7823DC"/>
                 </a:solidFill>
-                <a:latin typeface="Meiryo" pitchFamily="34" charset="0"/>
-                <a:ea typeface="Meiryo" pitchFamily="34" charset="-122"/>
-                <a:cs typeface="Meiryo" pitchFamily="34" charset="-120"/>
+                <a:latin typeface="Yu Gothic" pitchFamily="34" charset="0"/>
+                <a:ea typeface="Yu Gothic" pitchFamily="34" charset="-122"/>
+                <a:cs typeface="Yu Gothic" pitchFamily="34" charset="-120"/>
               </a:rPr>
               <a:t>90日以内</a:t>
             </a:r>
-            <a:endParaRPr lang="en-US" sz="1800" dirty="0"/>
+            <a:endParaRPr lang="en-US" sz="1600" dirty="0"/>
           </a:p>
         </p:txBody>
       </p:sp>
@@ -6389,8 +6818,8 @@
         </p:nvSpPr>
         <p:spPr>
           <a:xfrm>
-            <a:off x="8403336" y="1993392"/>
-            <a:ext cx="3300984" cy="960120"/>
+            <a:off x="8229600" y="1764792"/>
+            <a:ext cx="3255264" cy="868680"/>
           </a:xfrm>
           <a:prstGeom prst="rect">
             <a:avLst/>
@@ -6404,22 +6833,22 @@
           <a:p>
             <a:pPr indent="0" marL="0">
               <a:lnSpc>
-                <a:spcPct val="125000"/>
+                <a:spcPct val="122000"/>
               </a:lnSpc>
               <a:buNone/>
             </a:pPr>
             <a:r>
-              <a:rPr lang="en-US" sz="1150" dirty="0">
+              <a:rPr lang="en-US" sz="1050" dirty="0">
                 <a:solidFill>
-                  <a:srgbClr val="1A1A1A"/>
+                  <a:srgbClr val="262630"/>
                 </a:solidFill>
-                <a:latin typeface="Meiryo" pitchFamily="34" charset="0"/>
-                <a:ea typeface="Meiryo" pitchFamily="34" charset="-122"/>
-                <a:cs typeface="Meiryo" pitchFamily="34" charset="-120"/>
+                <a:latin typeface="Yu Gothic" pitchFamily="34" charset="0"/>
+                <a:ea typeface="Yu Gothic" pitchFamily="34" charset="-122"/>
+                <a:cs typeface="Yu Gothic" pitchFamily="34" charset="-120"/>
               </a:rPr>
               <a:t>翌期利益パイプライン可視化／監修・契約ボトルネック改善／開示可能KPIの整備</a:t>
             </a:r>
-            <a:endParaRPr lang="en-US" sz="1150" dirty="0"/>
+            <a:endParaRPr lang="en-US" sz="1050" dirty="0"/>
           </a:p>
         </p:txBody>
       </p:sp>
@@ -6431,8 +6860,8 @@
         </p:nvSpPr>
         <p:spPr>
           <a:xfrm>
-            <a:off x="8403336" y="3017520"/>
-            <a:ext cx="3300984" cy="548640"/>
+            <a:off x="8229600" y="2651760"/>
+            <a:ext cx="3255264" cy="475488"/>
           </a:xfrm>
           <a:prstGeom prst="rect">
             <a:avLst/>
@@ -6451,13 +6880,13 @@
               <a:buNone/>
             </a:pPr>
             <a:r>
-              <a:rPr lang="en-US" sz="1100" b="1" dirty="0">
+              <a:rPr lang="en-US" sz="1000" b="1" dirty="0">
                 <a:solidFill>
-                  <a:srgbClr val="1B2A4A"/>
+                  <a:srgbClr val="3A106E"/>
                 </a:solidFill>
-                <a:latin typeface="Meiryo" pitchFamily="34" charset="0"/>
-                <a:ea typeface="Meiryo" pitchFamily="34" charset="-122"/>
-                <a:cs typeface="Meiryo" pitchFamily="34" charset="-120"/>
+                <a:latin typeface="Yu Gothic" pitchFamily="34" charset="0"/>
+                <a:ea typeface="Yu Gothic" pitchFamily="34" charset="-122"/>
+                <a:cs typeface="Yu Gothic" pitchFamily="34" charset="-120"/>
               </a:rPr>
               <a:t>アウトプット：</a:t>
             </a:r>
@@ -6468,17 +6897,17 @@
               <a:buNone/>
             </a:pPr>
             <a:r>
-              <a:rPr lang="en-US" sz="1100" dirty="0">
+              <a:rPr lang="en-US" sz="1000" dirty="0">
                 <a:solidFill>
-                  <a:srgbClr val="1B2A4A"/>
+                  <a:srgbClr val="3A106E"/>
                 </a:solidFill>
-                <a:latin typeface="Meiryo" pitchFamily="34" charset="0"/>
-                <a:ea typeface="Meiryo" pitchFamily="34" charset="-122"/>
-                <a:cs typeface="Meiryo" pitchFamily="34" charset="-120"/>
+                <a:latin typeface="Yu Gothic" pitchFamily="34" charset="0"/>
+                <a:ea typeface="Yu Gothic" pitchFamily="34" charset="-122"/>
+                <a:cs typeface="Yu Gothic" pitchFamily="34" charset="-120"/>
               </a:rPr>
               <a:t>2028年3月期55億円への利益パイプライン</a:t>
             </a:r>
-            <a:endParaRPr lang="en-US" sz="1100" dirty="0"/>
+            <a:endParaRPr lang="en-US" sz="1000" dirty="0"/>
           </a:p>
         </p:txBody>
       </p:sp>
@@ -6490,8 +6919,8 @@
         </p:nvSpPr>
         <p:spPr>
           <a:xfrm>
-            <a:off x="457200" y="3931920"/>
-            <a:ext cx="7315200" cy="320040"/>
+            <a:off x="502920" y="3429000"/>
+            <a:ext cx="7315200" cy="292608"/>
           </a:xfrm>
           <a:prstGeom prst="rect">
             <a:avLst/>
@@ -6507,17 +6936,17 @@
               <a:buNone/>
             </a:pPr>
             <a:r>
-              <a:rPr lang="en-US" sz="1400" b="1" dirty="0">
+              <a:rPr lang="en-US" sz="1300" b="1" dirty="0">
                 <a:solidFill>
-                  <a:srgbClr val="1B2A4A"/>
+                  <a:srgbClr val="262630"/>
                 </a:solidFill>
-                <a:latin typeface="Meiryo" pitchFamily="34" charset="0"/>
-                <a:ea typeface="Meiryo" pitchFamily="34" charset="-122"/>
-                <a:cs typeface="Meiryo" pitchFamily="34" charset="-120"/>
+                <a:latin typeface="Yu Gothic" pitchFamily="34" charset="0"/>
+                <a:ea typeface="Yu Gothic" pitchFamily="34" charset="-122"/>
+                <a:cs typeface="Yu Gothic" pitchFamily="34" charset="-120"/>
               </a:rPr>
               <a:t>部門別の最優先課題（部長会での報告指標）</a:t>
             </a:r>
-            <a:endParaRPr lang="en-US" sz="1400" dirty="0"/>
+            <a:endParaRPr lang="en-US" sz="1300" dirty="0"/>
           </a:p>
         </p:txBody>
       </p:sp>
@@ -6536,8 +6965,8 @@
           </p:nvPr>
         </p:nvGraphicFramePr>
         <p:xfrm>
-          <a:off x="457200" y="4297680"/>
-          <a:ext cx="11274552" cy="914400"/>
+          <a:off x="502920" y="3749040"/>
+          <a:ext cx="11183112" cy="914400"/>
         </p:xfrm>
         <a:graphic>
           <a:graphicData uri="http://schemas.openxmlformats.org/drawingml/2006/table">
@@ -6545,10 +6974,10 @@
               <a:tblPr/>
               <a:tblGrid>
                 <a:gridCol w="2834640"/>
-                <a:gridCol w="4782312"/>
-                <a:gridCol w="3657600"/>
+                <a:gridCol w="4754880"/>
+                <a:gridCol w="3593592"/>
               </a:tblGrid>
-              <a:tr h="310896">
+              <a:tr h="329184">
                 <a:tc>
                   <a:txBody>
                     <a:bodyPr/>
@@ -6562,23 +6991,23 @@
                           <a:solidFill>
                             <a:srgbClr val="FFFFFF"/>
                           </a:solidFill>
-                          <a:latin typeface="Meiryo" pitchFamily="34" charset="0"/>
-                          <a:ea typeface="Meiryo" pitchFamily="34" charset="-122"/>
-                          <a:cs typeface="Meiryo" pitchFamily="34" charset="-120"/>
+                          <a:latin typeface="Yu Gothic" pitchFamily="34" charset="0"/>
+                          <a:ea typeface="Yu Gothic" pitchFamily="34" charset="-122"/>
+                          <a:cs typeface="Yu Gothic" pitchFamily="34" charset="-120"/>
                         </a:rPr>
                         <a:t>部門</a:t>
                       </a:r>
                       <a:endParaRPr lang="en-US" sz="1050" dirty="0">
-                        <a:latin typeface="Meiryo" charset="0"/>
-                        <a:ea typeface="Meiryo" charset="0"/>
-                        <a:cs typeface="Meiryo" charset="0"/>
+                        <a:latin typeface="Yu Gothic" charset="0"/>
+                        <a:ea typeface="Yu Gothic" charset="0"/>
+                        <a:cs typeface="Yu Gothic" charset="0"/>
                       </a:endParaRPr>
                     </a:p>
                   </a:txBody>
-                  <a:tcPr marL="73152" marR="73152" marT="27432" marB="27432" anchor="ctr">
+                  <a:tcPr marL="91440" marR="91440" marT="36576" marB="36576" anchor="ctr">
                     <a:lnL w="9525" cap="flat" cmpd="sng" algn="ctr">
                       <a:solidFill>
-                        <a:srgbClr val="D5DAE3"/>
+                        <a:srgbClr val="D9D9E0"/>
                       </a:solidFill>
                       <a:prstDash val="solid"/>
                       <a:round/>
@@ -6587,7 +7016,7 @@
                     </a:lnL>
                     <a:lnR w="9525" cap="flat" cmpd="sng" algn="ctr">
                       <a:solidFill>
-                        <a:srgbClr val="D5DAE3"/>
+                        <a:srgbClr val="D9D9E0"/>
                       </a:solidFill>
                       <a:prstDash val="solid"/>
                       <a:round/>
@@ -6596,7 +7025,7 @@
                     </a:lnR>
                     <a:lnT w="9525" cap="flat" cmpd="sng" algn="ctr">
                       <a:solidFill>
-                        <a:srgbClr val="D5DAE3"/>
+                        <a:srgbClr val="D9D9E0"/>
                       </a:solidFill>
                       <a:prstDash val="solid"/>
                       <a:round/>
@@ -6605,7 +7034,7 @@
                     </a:lnT>
                     <a:lnB w="9525" cap="flat" cmpd="sng" algn="ctr">
                       <a:solidFill>
-                        <a:srgbClr val="D5DAE3"/>
+                        <a:srgbClr val="D9D9E0"/>
                       </a:solidFill>
                       <a:prstDash val="solid"/>
                       <a:round/>
@@ -6613,7 +7042,7 @@
                       <a:tailEnd type="none" w="med" len="med"/>
                     </a:lnB>
                     <a:solidFill>
-                      <a:srgbClr val="1B2A4A"/>
+                      <a:srgbClr val="3A106E"/>
                     </a:solidFill>
                   </a:tcPr>
                 </a:tc>
@@ -6630,23 +7059,23 @@
                           <a:solidFill>
                             <a:srgbClr val="FFFFFF"/>
                           </a:solidFill>
-                          <a:latin typeface="Meiryo" pitchFamily="34" charset="0"/>
-                          <a:ea typeface="Meiryo" pitchFamily="34" charset="-122"/>
-                          <a:cs typeface="Meiryo" pitchFamily="34" charset="-120"/>
+                          <a:latin typeface="Yu Gothic" pitchFamily="34" charset="0"/>
+                          <a:ea typeface="Yu Gothic" pitchFamily="34" charset="-122"/>
+                          <a:cs typeface="Yu Gothic" pitchFamily="34" charset="-120"/>
                         </a:rPr>
                         <a:t>最優先課題</a:t>
                       </a:r>
                       <a:endParaRPr lang="en-US" sz="1050" dirty="0">
-                        <a:latin typeface="Meiryo" charset="0"/>
-                        <a:ea typeface="Meiryo" charset="0"/>
-                        <a:cs typeface="Meiryo" charset="0"/>
+                        <a:latin typeface="Yu Gothic" charset="0"/>
+                        <a:ea typeface="Yu Gothic" charset="0"/>
+                        <a:cs typeface="Yu Gothic" charset="0"/>
                       </a:endParaRPr>
                     </a:p>
                   </a:txBody>
-                  <a:tcPr marL="73152" marR="73152" marT="27432" marB="27432" anchor="ctr">
+                  <a:tcPr marL="91440" marR="91440" marT="36576" marB="36576" anchor="ctr">
                     <a:lnL w="9525" cap="flat" cmpd="sng" algn="ctr">
                       <a:solidFill>
-                        <a:srgbClr val="D5DAE3"/>
+                        <a:srgbClr val="D9D9E0"/>
                       </a:solidFill>
                       <a:prstDash val="solid"/>
                       <a:round/>
@@ -6655,7 +7084,7 @@
                     </a:lnL>
                     <a:lnR w="9525" cap="flat" cmpd="sng" algn="ctr">
                       <a:solidFill>
-                        <a:srgbClr val="D5DAE3"/>
+                        <a:srgbClr val="D9D9E0"/>
                       </a:solidFill>
                       <a:prstDash val="solid"/>
                       <a:round/>
@@ -6664,7 +7093,7 @@
                     </a:lnR>
                     <a:lnT w="9525" cap="flat" cmpd="sng" algn="ctr">
                       <a:solidFill>
-                        <a:srgbClr val="D5DAE3"/>
+                        <a:srgbClr val="D9D9E0"/>
                       </a:solidFill>
                       <a:prstDash val="solid"/>
                       <a:round/>
@@ -6673,7 +7102,7 @@
                     </a:lnT>
                     <a:lnB w="9525" cap="flat" cmpd="sng" algn="ctr">
                       <a:solidFill>
-                        <a:srgbClr val="D5DAE3"/>
+                        <a:srgbClr val="D9D9E0"/>
                       </a:solidFill>
                       <a:prstDash val="solid"/>
                       <a:round/>
@@ -6681,7 +7110,7 @@
                       <a:tailEnd type="none" w="med" len="med"/>
                     </a:lnB>
                     <a:solidFill>
-                      <a:srgbClr val="1B2A4A"/>
+                      <a:srgbClr val="3A106E"/>
                     </a:solidFill>
                   </a:tcPr>
                 </a:tc>
@@ -6698,23 +7127,23 @@
                           <a:solidFill>
                             <a:srgbClr val="FFFFFF"/>
                           </a:solidFill>
-                          <a:latin typeface="Meiryo" pitchFamily="34" charset="0"/>
-                          <a:ea typeface="Meiryo" pitchFamily="34" charset="-122"/>
-                          <a:cs typeface="Meiryo" pitchFamily="34" charset="-120"/>
+                          <a:latin typeface="Yu Gothic" pitchFamily="34" charset="0"/>
+                          <a:ea typeface="Yu Gothic" pitchFamily="34" charset="-122"/>
+                          <a:cs typeface="Yu Gothic" pitchFamily="34" charset="-120"/>
                         </a:rPr>
                         <a:t>報告指標</a:t>
                       </a:r>
                       <a:endParaRPr lang="en-US" sz="1050" dirty="0">
-                        <a:latin typeface="Meiryo" charset="0"/>
-                        <a:ea typeface="Meiryo" charset="0"/>
-                        <a:cs typeface="Meiryo" charset="0"/>
+                        <a:latin typeface="Yu Gothic" charset="0"/>
+                        <a:ea typeface="Yu Gothic" charset="0"/>
+                        <a:cs typeface="Yu Gothic" charset="0"/>
                       </a:endParaRPr>
                     </a:p>
                   </a:txBody>
-                  <a:tcPr marL="73152" marR="73152" marT="27432" marB="27432" anchor="ctr">
+                  <a:tcPr marL="91440" marR="91440" marT="36576" marB="36576" anchor="ctr">
                     <a:lnL w="9525" cap="flat" cmpd="sng" algn="ctr">
                       <a:solidFill>
-                        <a:srgbClr val="D5DAE3"/>
+                        <a:srgbClr val="D9D9E0"/>
                       </a:solidFill>
                       <a:prstDash val="solid"/>
                       <a:round/>
@@ -6723,7 +7152,7 @@
                     </a:lnL>
                     <a:lnR w="9525" cap="flat" cmpd="sng" algn="ctr">
                       <a:solidFill>
-                        <a:srgbClr val="D5DAE3"/>
+                        <a:srgbClr val="D9D9E0"/>
                       </a:solidFill>
                       <a:prstDash val="solid"/>
                       <a:round/>
@@ -6732,7 +7161,7 @@
                     </a:lnR>
                     <a:lnT w="9525" cap="flat" cmpd="sng" algn="ctr">
                       <a:solidFill>
-                        <a:srgbClr val="D5DAE3"/>
+                        <a:srgbClr val="D9D9E0"/>
                       </a:solidFill>
                       <a:prstDash val="solid"/>
                       <a:round/>
@@ -6741,7 +7170,7 @@
                     </a:lnT>
                     <a:lnB w="9525" cap="flat" cmpd="sng" algn="ctr">
                       <a:solidFill>
-                        <a:srgbClr val="D5DAE3"/>
+                        <a:srgbClr val="D9D9E0"/>
                       </a:solidFill>
                       <a:prstDash val="solid"/>
                       <a:round/>
@@ -6749,12 +7178,12 @@
                       <a:tailEnd type="none" w="med" len="med"/>
                     </a:lnB>
                     <a:solidFill>
-                      <a:srgbClr val="1B2A4A"/>
+                      <a:srgbClr val="3A106E"/>
                     </a:solidFill>
                   </a:tcPr>
                 </a:tc>
               </a:tr>
-              <a:tr h="310896">
+              <a:tr h="329184">
                 <a:tc>
                   <a:txBody>
                     <a:bodyPr/>
@@ -6764,27 +7193,27 @@
                         <a:buNone/>
                       </a:pPr>
                       <a:r>
-                        <a:rPr lang="en-US" sz="1050" dirty="0">
+                        <a:rPr lang="en-US" sz="1050" b="1" dirty="0">
                           <a:solidFill>
-                            <a:srgbClr val="1A1A1A"/>
+                            <a:srgbClr val="3A106E"/>
                           </a:solidFill>
-                          <a:latin typeface="Meiryo" pitchFamily="34" charset="0"/>
-                          <a:ea typeface="Meiryo" pitchFamily="34" charset="-122"/>
-                          <a:cs typeface="Meiryo" pitchFamily="34" charset="-120"/>
+                          <a:latin typeface="Yu Gothic" pitchFamily="34" charset="0"/>
+                          <a:ea typeface="Yu Gothic" pitchFamily="34" charset="-122"/>
+                          <a:cs typeface="Yu Gothic" pitchFamily="34" charset="-120"/>
                         </a:rPr>
                         <a:t>国内ライセンス／法人営業</a:t>
                       </a:r>
                       <a:endParaRPr lang="en-US" sz="1050" dirty="0">
-                        <a:latin typeface="Meiryo" charset="0"/>
-                        <a:ea typeface="Meiryo" charset="0"/>
-                        <a:cs typeface="Meiryo" charset="0"/>
+                        <a:latin typeface="Yu Gothic" charset="0"/>
+                        <a:ea typeface="Yu Gothic" charset="0"/>
+                        <a:cs typeface="Yu Gothic" charset="0"/>
                       </a:endParaRPr>
                     </a:p>
                   </a:txBody>
-                  <a:tcPr marL="73152" marR="73152" marT="27432" marB="27432" anchor="ctr">
+                  <a:tcPr marL="91440" marR="91440" marT="36576" marB="36576" anchor="ctr">
                     <a:lnL w="9525" cap="flat" cmpd="sng" algn="ctr">
                       <a:solidFill>
-                        <a:srgbClr val="D5DAE3"/>
+                        <a:srgbClr val="D9D9E0"/>
                       </a:solidFill>
                       <a:prstDash val="solid"/>
                       <a:round/>
@@ -6793,7 +7222,7 @@
                     </a:lnL>
                     <a:lnR w="9525" cap="flat" cmpd="sng" algn="ctr">
                       <a:solidFill>
-                        <a:srgbClr val="D5DAE3"/>
+                        <a:srgbClr val="D9D9E0"/>
                       </a:solidFill>
                       <a:prstDash val="solid"/>
                       <a:round/>
@@ -6802,7 +7231,7 @@
                     </a:lnR>
                     <a:lnT w="9525" cap="flat" cmpd="sng" algn="ctr">
                       <a:solidFill>
-                        <a:srgbClr val="D5DAE3"/>
+                        <a:srgbClr val="D9D9E0"/>
                       </a:solidFill>
                       <a:prstDash val="solid"/>
                       <a:round/>
@@ -6811,7 +7240,7 @@
                     </a:lnT>
                     <a:lnB w="9525" cap="flat" cmpd="sng" algn="ctr">
                       <a:solidFill>
-                        <a:srgbClr val="D5DAE3"/>
+                        <a:srgbClr val="D9D9E0"/>
                       </a:solidFill>
                       <a:prstDash val="solid"/>
                       <a:round/>
@@ -6834,25 +7263,25 @@
                       <a:r>
                         <a:rPr lang="en-US" sz="1050" dirty="0">
                           <a:solidFill>
-                            <a:srgbClr val="1A1A1A"/>
+                            <a:srgbClr val="262630"/>
                           </a:solidFill>
-                          <a:latin typeface="Meiryo" pitchFamily="34" charset="0"/>
-                          <a:ea typeface="Meiryo" pitchFamily="34" charset="-122"/>
-                          <a:cs typeface="Meiryo" pitchFamily="34" charset="-120"/>
+                          <a:latin typeface="Yu Gothic" pitchFamily="34" charset="0"/>
+                          <a:ea typeface="Yu Gothic" pitchFamily="34" charset="-122"/>
+                          <a:cs typeface="Yu Gothic" pitchFamily="34" charset="-120"/>
                         </a:rPr>
                         <a:t>既存深耕・新規開拓／Tier1の複合・年間契約化</a:t>
                       </a:r>
                       <a:endParaRPr lang="en-US" sz="1050" dirty="0">
-                        <a:latin typeface="Meiryo" charset="0"/>
-                        <a:ea typeface="Meiryo" charset="0"/>
-                        <a:cs typeface="Meiryo" charset="0"/>
+                        <a:latin typeface="Yu Gothic" charset="0"/>
+                        <a:ea typeface="Yu Gothic" charset="0"/>
+                        <a:cs typeface="Yu Gothic" charset="0"/>
                       </a:endParaRPr>
                     </a:p>
                   </a:txBody>
-                  <a:tcPr marL="73152" marR="73152" marT="27432" marB="27432" anchor="ctr">
+                  <a:tcPr marL="91440" marR="91440" marT="36576" marB="36576" anchor="ctr">
                     <a:lnL w="9525" cap="flat" cmpd="sng" algn="ctr">
                       <a:solidFill>
-                        <a:srgbClr val="D5DAE3"/>
+                        <a:srgbClr val="D9D9E0"/>
                       </a:solidFill>
                       <a:prstDash val="solid"/>
                       <a:round/>
@@ -6861,7 +7290,7 @@
                     </a:lnL>
                     <a:lnR w="9525" cap="flat" cmpd="sng" algn="ctr">
                       <a:solidFill>
-                        <a:srgbClr val="D5DAE3"/>
+                        <a:srgbClr val="D9D9E0"/>
                       </a:solidFill>
                       <a:prstDash val="solid"/>
                       <a:round/>
@@ -6870,7 +7299,7 @@
                     </a:lnR>
                     <a:lnT w="9525" cap="flat" cmpd="sng" algn="ctr">
                       <a:solidFill>
-                        <a:srgbClr val="D5DAE3"/>
+                        <a:srgbClr val="D9D9E0"/>
                       </a:solidFill>
                       <a:prstDash val="solid"/>
                       <a:round/>
@@ -6879,7 +7308,7 @@
                     </a:lnT>
                     <a:lnB w="9525" cap="flat" cmpd="sng" algn="ctr">
                       <a:solidFill>
-                        <a:srgbClr val="D5DAE3"/>
+                        <a:srgbClr val="D9D9E0"/>
                       </a:solidFill>
                       <a:prstDash val="solid"/>
                       <a:round/>
@@ -6902,25 +7331,25 @@
                       <a:r>
                         <a:rPr lang="en-US" sz="1050" dirty="0">
                           <a:solidFill>
-                            <a:srgbClr val="1A1A1A"/>
+                            <a:srgbClr val="262630"/>
                           </a:solidFill>
-                          <a:latin typeface="Meiryo" pitchFamily="34" charset="0"/>
-                          <a:ea typeface="Meiryo" pitchFamily="34" charset="-122"/>
-                          <a:cs typeface="Meiryo" pitchFamily="34" charset="-120"/>
+                          <a:latin typeface="Yu Gothic" pitchFamily="34" charset="0"/>
+                          <a:ea typeface="Yu Gothic" pitchFamily="34" charset="-122"/>
+                          <a:cs typeface="Yu Gothic" pitchFamily="34" charset="-120"/>
                         </a:rPr>
                         <a:t>既存増収額、更新率、確度別利益</a:t>
                       </a:r>
                       <a:endParaRPr lang="en-US" sz="1050" dirty="0">
-                        <a:latin typeface="Meiryo" charset="0"/>
-                        <a:ea typeface="Meiryo" charset="0"/>
-                        <a:cs typeface="Meiryo" charset="0"/>
+                        <a:latin typeface="Yu Gothic" charset="0"/>
+                        <a:ea typeface="Yu Gothic" charset="0"/>
+                        <a:cs typeface="Yu Gothic" charset="0"/>
                       </a:endParaRPr>
                     </a:p>
                   </a:txBody>
-                  <a:tcPr marL="73152" marR="73152" marT="27432" marB="27432" anchor="ctr">
+                  <a:tcPr marL="91440" marR="91440" marT="36576" marB="36576" anchor="ctr">
                     <a:lnL w="9525" cap="flat" cmpd="sng" algn="ctr">
                       <a:solidFill>
-                        <a:srgbClr val="D5DAE3"/>
+                        <a:srgbClr val="D9D9E0"/>
                       </a:solidFill>
                       <a:prstDash val="solid"/>
                       <a:round/>
@@ -6929,7 +7358,7 @@
                     </a:lnL>
                     <a:lnR w="9525" cap="flat" cmpd="sng" algn="ctr">
                       <a:solidFill>
-                        <a:srgbClr val="D5DAE3"/>
+                        <a:srgbClr val="D9D9E0"/>
                       </a:solidFill>
                       <a:prstDash val="solid"/>
                       <a:round/>
@@ -6938,7 +7367,7 @@
                     </a:lnR>
                     <a:lnT w="9525" cap="flat" cmpd="sng" algn="ctr">
                       <a:solidFill>
-                        <a:srgbClr val="D5DAE3"/>
+                        <a:srgbClr val="D9D9E0"/>
                       </a:solidFill>
                       <a:prstDash val="solid"/>
                       <a:round/>
@@ -6947,7 +7376,7 @@
                     </a:lnT>
                     <a:lnB w="9525" cap="flat" cmpd="sng" algn="ctr">
                       <a:solidFill>
-                        <a:srgbClr val="D5DAE3"/>
+                        <a:srgbClr val="D9D9E0"/>
                       </a:solidFill>
                       <a:prstDash val="solid"/>
                       <a:round/>
@@ -6960,7 +7389,75 @@
                   </a:tcPr>
                 </a:tc>
               </a:tr>
-              <a:tr h="310896">
+              <a:tr h="329184">
+                <a:tc>
+                  <a:txBody>
+                    <a:bodyPr/>
+                    <a:lstStyle/>
+                    <a:p>
+                      <a:pPr algn="l" indent="0" marL="0">
+                        <a:buNone/>
+                      </a:pPr>
+                      <a:r>
+                        <a:rPr lang="en-US" sz="1050" b="1" dirty="0">
+                          <a:solidFill>
+                            <a:srgbClr val="3A106E"/>
+                          </a:solidFill>
+                          <a:latin typeface="Yu Gothic" pitchFamily="34" charset="0"/>
+                          <a:ea typeface="Yu Gothic" pitchFamily="34" charset="-122"/>
+                          <a:cs typeface="Yu Gothic" pitchFamily="34" charset="-120"/>
+                        </a:rPr>
+                        <a:t>自社MD／デジタル／イベント</a:t>
+                      </a:r>
+                      <a:endParaRPr lang="en-US" sz="1050" dirty="0">
+                        <a:latin typeface="Yu Gothic" charset="0"/>
+                        <a:ea typeface="Yu Gothic" charset="0"/>
+                        <a:cs typeface="Yu Gothic" charset="0"/>
+                      </a:endParaRPr>
+                    </a:p>
+                  </a:txBody>
+                  <a:tcPr marL="91440" marR="91440" marT="36576" marB="36576" anchor="ctr">
+                    <a:lnL w="9525" cap="flat" cmpd="sng" algn="ctr">
+                      <a:solidFill>
+                        <a:srgbClr val="D9D9E0"/>
+                      </a:solidFill>
+                      <a:prstDash val="solid"/>
+                      <a:round/>
+                      <a:headEnd type="none" w="med" len="med"/>
+                      <a:tailEnd type="none" w="med" len="med"/>
+                    </a:lnL>
+                    <a:lnR w="9525" cap="flat" cmpd="sng" algn="ctr">
+                      <a:solidFill>
+                        <a:srgbClr val="D9D9E0"/>
+                      </a:solidFill>
+                      <a:prstDash val="solid"/>
+                      <a:round/>
+                      <a:headEnd type="none" w="med" len="med"/>
+                      <a:tailEnd type="none" w="med" len="med"/>
+                    </a:lnR>
+                    <a:lnT w="9525" cap="flat" cmpd="sng" algn="ctr">
+                      <a:solidFill>
+                        <a:srgbClr val="D9D9E0"/>
+                      </a:solidFill>
+                      <a:prstDash val="solid"/>
+                      <a:round/>
+                      <a:headEnd type="none" w="med" len="med"/>
+                      <a:tailEnd type="none" w="med" len="med"/>
+                    </a:lnT>
+                    <a:lnB w="9525" cap="flat" cmpd="sng" algn="ctr">
+                      <a:solidFill>
+                        <a:srgbClr val="D9D9E0"/>
+                      </a:solidFill>
+                      <a:prstDash val="solid"/>
+                      <a:round/>
+                      <a:headEnd type="none" w="med" len="med"/>
+                      <a:tailEnd type="none" w="med" len="med"/>
+                    </a:lnB>
+                    <a:solidFill>
+                      <a:srgbClr val="F7F7F9"/>
+                    </a:solidFill>
+                  </a:tcPr>
+                </a:tc>
                 <a:tc>
                   <a:txBody>
                     <a:bodyPr/>
@@ -6972,25 +7469,25 @@
                       <a:r>
                         <a:rPr lang="en-US" sz="1050" dirty="0">
                           <a:solidFill>
-                            <a:srgbClr val="1A1A1A"/>
+                            <a:srgbClr val="262630"/>
                           </a:solidFill>
-                          <a:latin typeface="Meiryo" pitchFamily="34" charset="0"/>
-                          <a:ea typeface="Meiryo" pitchFamily="34" charset="-122"/>
-                          <a:cs typeface="Meiryo" pitchFamily="34" charset="-120"/>
+                          <a:latin typeface="Yu Gothic" pitchFamily="34" charset="0"/>
+                          <a:ea typeface="Yu Gothic" pitchFamily="34" charset="-122"/>
+                          <a:cs typeface="Yu Gothic" pitchFamily="34" charset="-120"/>
                         </a:rPr>
-                        <a:t>自社MD／デジタル／イベント</a:t>
+                        <a:t>原宿から全国・ECへ展開／ファン接点を購買へ転換</a:t>
                       </a:r>
                       <a:endParaRPr lang="en-US" sz="1050" dirty="0">
-                        <a:latin typeface="Meiryo" charset="0"/>
-                        <a:ea typeface="Meiryo" charset="0"/>
-                        <a:cs typeface="Meiryo" charset="0"/>
+                        <a:latin typeface="Yu Gothic" charset="0"/>
+                        <a:ea typeface="Yu Gothic" charset="0"/>
+                        <a:cs typeface="Yu Gothic" charset="0"/>
                       </a:endParaRPr>
                     </a:p>
                   </a:txBody>
-                  <a:tcPr marL="73152" marR="73152" marT="27432" marB="27432" anchor="ctr">
+                  <a:tcPr marL="91440" marR="91440" marT="36576" marB="36576" anchor="ctr">
                     <a:lnL w="9525" cap="flat" cmpd="sng" algn="ctr">
                       <a:solidFill>
-                        <a:srgbClr val="D5DAE3"/>
+                        <a:srgbClr val="D9D9E0"/>
                       </a:solidFill>
                       <a:prstDash val="solid"/>
                       <a:round/>
@@ -6999,7 +7496,7 @@
                     </a:lnL>
                     <a:lnR w="9525" cap="flat" cmpd="sng" algn="ctr">
                       <a:solidFill>
-                        <a:srgbClr val="D5DAE3"/>
+                        <a:srgbClr val="D9D9E0"/>
                       </a:solidFill>
                       <a:prstDash val="solid"/>
                       <a:round/>
@@ -7008,7 +7505,7 @@
                     </a:lnR>
                     <a:lnT w="9525" cap="flat" cmpd="sng" algn="ctr">
                       <a:solidFill>
-                        <a:srgbClr val="D5DAE3"/>
+                        <a:srgbClr val="D9D9E0"/>
                       </a:solidFill>
                       <a:prstDash val="solid"/>
                       <a:round/>
@@ -7017,7 +7514,145 @@
                     </a:lnT>
                     <a:lnB w="9525" cap="flat" cmpd="sng" algn="ctr">
                       <a:solidFill>
-                        <a:srgbClr val="D5DAE3"/>
+                        <a:srgbClr val="D9D9E0"/>
+                      </a:solidFill>
+                      <a:prstDash val="solid"/>
+                      <a:round/>
+                      <a:headEnd type="none" w="med" len="med"/>
+                      <a:tailEnd type="none" w="med" len="med"/>
+                    </a:lnB>
+                    <a:solidFill>
+                      <a:srgbClr val="F7F7F9"/>
+                    </a:solidFill>
+                  </a:tcPr>
+                </a:tc>
+                <a:tc>
+                  <a:txBody>
+                    <a:bodyPr/>
+                    <a:lstStyle/>
+                    <a:p>
+                      <a:pPr algn="l" indent="0" marL="0">
+                        <a:buNone/>
+                      </a:pPr>
+                      <a:r>
+                        <a:rPr lang="en-US" sz="1050" dirty="0">
+                          <a:solidFill>
+                            <a:srgbClr val="262630"/>
+                          </a:solidFill>
+                          <a:latin typeface="Yu Gothic" pitchFamily="34" charset="0"/>
+                          <a:ea typeface="Yu Gothic" pitchFamily="34" charset="-122"/>
+                          <a:cs typeface="Yu Gothic" pitchFamily="34" charset="-120"/>
+                        </a:rPr>
+                        <a:t>粗利率、再購買、ID、EC転換率</a:t>
+                      </a:r>
+                      <a:endParaRPr lang="en-US" sz="1050" dirty="0">
+                        <a:latin typeface="Yu Gothic" charset="0"/>
+                        <a:ea typeface="Yu Gothic" charset="0"/>
+                        <a:cs typeface="Yu Gothic" charset="0"/>
+                      </a:endParaRPr>
+                    </a:p>
+                  </a:txBody>
+                  <a:tcPr marL="91440" marR="91440" marT="36576" marB="36576" anchor="ctr">
+                    <a:lnL w="9525" cap="flat" cmpd="sng" algn="ctr">
+                      <a:solidFill>
+                        <a:srgbClr val="D9D9E0"/>
+                      </a:solidFill>
+                      <a:prstDash val="solid"/>
+                      <a:round/>
+                      <a:headEnd type="none" w="med" len="med"/>
+                      <a:tailEnd type="none" w="med" len="med"/>
+                    </a:lnL>
+                    <a:lnR w="9525" cap="flat" cmpd="sng" algn="ctr">
+                      <a:solidFill>
+                        <a:srgbClr val="D9D9E0"/>
+                      </a:solidFill>
+                      <a:prstDash val="solid"/>
+                      <a:round/>
+                      <a:headEnd type="none" w="med" len="med"/>
+                      <a:tailEnd type="none" w="med" len="med"/>
+                    </a:lnR>
+                    <a:lnT w="9525" cap="flat" cmpd="sng" algn="ctr">
+                      <a:solidFill>
+                        <a:srgbClr val="D9D9E0"/>
+                      </a:solidFill>
+                      <a:prstDash val="solid"/>
+                      <a:round/>
+                      <a:headEnd type="none" w="med" len="med"/>
+                      <a:tailEnd type="none" w="med" len="med"/>
+                    </a:lnT>
+                    <a:lnB w="9525" cap="flat" cmpd="sng" algn="ctr">
+                      <a:solidFill>
+                        <a:srgbClr val="D9D9E0"/>
+                      </a:solidFill>
+                      <a:prstDash val="solid"/>
+                      <a:round/>
+                      <a:headEnd type="none" w="med" len="med"/>
+                      <a:tailEnd type="none" w="med" len="med"/>
+                    </a:lnB>
+                    <a:solidFill>
+                      <a:srgbClr val="F7F7F9"/>
+                    </a:solidFill>
+                  </a:tcPr>
+                </a:tc>
+              </a:tr>
+              <a:tr h="329184">
+                <a:tc>
+                  <a:txBody>
+                    <a:bodyPr/>
+                    <a:lstStyle/>
+                    <a:p>
+                      <a:pPr algn="l" indent="0" marL="0">
+                        <a:buNone/>
+                      </a:pPr>
+                      <a:r>
+                        <a:rPr lang="en-US" sz="1050" b="1" dirty="0">
+                          <a:solidFill>
+                            <a:srgbClr val="3A106E"/>
+                          </a:solidFill>
+                          <a:latin typeface="Yu Gothic" pitchFamily="34" charset="0"/>
+                          <a:ea typeface="Yu Gothic" pitchFamily="34" charset="-122"/>
+                          <a:cs typeface="Yu Gothic" pitchFamily="34" charset="-120"/>
+                        </a:rPr>
+                        <a:t>中国・海外</a:t>
+                      </a:r>
+                      <a:endParaRPr lang="en-US" sz="1050" dirty="0">
+                        <a:latin typeface="Yu Gothic" charset="0"/>
+                        <a:ea typeface="Yu Gothic" charset="0"/>
+                        <a:cs typeface="Yu Gothic" charset="0"/>
+                      </a:endParaRPr>
+                    </a:p>
+                  </a:txBody>
+                  <a:tcPr marL="91440" marR="91440" marT="36576" marB="36576" anchor="ctr">
+                    <a:lnL w="9525" cap="flat" cmpd="sng" algn="ctr">
+                      <a:solidFill>
+                        <a:srgbClr val="D9D9E0"/>
+                      </a:solidFill>
+                      <a:prstDash val="solid"/>
+                      <a:round/>
+                      <a:headEnd type="none" w="med" len="med"/>
+                      <a:tailEnd type="none" w="med" len="med"/>
+                    </a:lnL>
+                    <a:lnR w="9525" cap="flat" cmpd="sng" algn="ctr">
+                      <a:solidFill>
+                        <a:srgbClr val="D9D9E0"/>
+                      </a:solidFill>
+                      <a:prstDash val="solid"/>
+                      <a:round/>
+                      <a:headEnd type="none" w="med" len="med"/>
+                      <a:tailEnd type="none" w="med" len="med"/>
+                    </a:lnR>
+                    <a:lnT w="9525" cap="flat" cmpd="sng" algn="ctr">
+                      <a:solidFill>
+                        <a:srgbClr val="D9D9E0"/>
+                      </a:solidFill>
+                      <a:prstDash val="solid"/>
+                      <a:round/>
+                      <a:headEnd type="none" w="med" len="med"/>
+                      <a:tailEnd type="none" w="med" len="med"/>
+                    </a:lnT>
+                    <a:lnB w="9525" cap="flat" cmpd="sng" algn="ctr">
+                      <a:solidFill>
+                        <a:srgbClr val="D9D9E0"/>
                       </a:solidFill>
                       <a:prstDash val="solid"/>
                       <a:round/>
@@ -7040,25 +7675,25 @@
                       <a:r>
                         <a:rPr lang="en-US" sz="1050" dirty="0">
                           <a:solidFill>
-                            <a:srgbClr val="1A1A1A"/>
+                            <a:srgbClr val="262630"/>
                           </a:solidFill>
-                          <a:latin typeface="Meiryo" pitchFamily="34" charset="0"/>
-                          <a:ea typeface="Meiryo" pitchFamily="34" charset="-122"/>
-                          <a:cs typeface="Meiryo" pitchFamily="34" charset="-120"/>
+                          <a:latin typeface="Yu Gothic" pitchFamily="34" charset="0"/>
+                          <a:ea typeface="Yu Gothic" pitchFamily="34" charset="-122"/>
+                          <a:cs typeface="Yu Gothic" pitchFamily="34" charset="-120"/>
                         </a:rPr>
-                        <a:t>原宿から全国・ECへ展開／ファン接点を購買へ転換</a:t>
+                        <a:t>パートナー分散と成功施策の国内移植</a:t>
                       </a:r>
                       <a:endParaRPr lang="en-US" sz="1050" dirty="0">
-                        <a:latin typeface="Meiryo" charset="0"/>
-                        <a:ea typeface="Meiryo" charset="0"/>
-                        <a:cs typeface="Meiryo" charset="0"/>
+                        <a:latin typeface="Yu Gothic" charset="0"/>
+                        <a:ea typeface="Yu Gothic" charset="0"/>
+                        <a:cs typeface="Yu Gothic" charset="0"/>
                       </a:endParaRPr>
                     </a:p>
                   </a:txBody>
-                  <a:tcPr marL="73152" marR="73152" marT="27432" marB="27432" anchor="ctr">
+                  <a:tcPr marL="91440" marR="91440" marT="36576" marB="36576" anchor="ctr">
                     <a:lnL w="9525" cap="flat" cmpd="sng" algn="ctr">
                       <a:solidFill>
-                        <a:srgbClr val="D5DAE3"/>
+                        <a:srgbClr val="D9D9E0"/>
                       </a:solidFill>
                       <a:prstDash val="solid"/>
                       <a:round/>
@@ -7067,7 +7702,7 @@
                     </a:lnL>
                     <a:lnR w="9525" cap="flat" cmpd="sng" algn="ctr">
                       <a:solidFill>
-                        <a:srgbClr val="D5DAE3"/>
+                        <a:srgbClr val="D9D9E0"/>
                       </a:solidFill>
                       <a:prstDash val="solid"/>
                       <a:round/>
@@ -7076,7 +7711,7 @@
                     </a:lnR>
                     <a:lnT w="9525" cap="flat" cmpd="sng" algn="ctr">
                       <a:solidFill>
-                        <a:srgbClr val="D5DAE3"/>
+                        <a:srgbClr val="D9D9E0"/>
                       </a:solidFill>
                       <a:prstDash val="solid"/>
                       <a:round/>
@@ -7085,7 +7720,7 @@
                     </a:lnT>
                     <a:lnB w="9525" cap="flat" cmpd="sng" algn="ctr">
                       <a:solidFill>
-                        <a:srgbClr val="D5DAE3"/>
+                        <a:srgbClr val="D9D9E0"/>
                       </a:solidFill>
                       <a:prstDash val="solid"/>
                       <a:round/>
@@ -7108,25 +7743,25 @@
                       <a:r>
                         <a:rPr lang="en-US" sz="1050" dirty="0">
                           <a:solidFill>
-                            <a:srgbClr val="1A1A1A"/>
+                            <a:srgbClr val="262630"/>
                           </a:solidFill>
-                          <a:latin typeface="Meiryo" pitchFamily="34" charset="0"/>
-                          <a:ea typeface="Meiryo" pitchFamily="34" charset="-122"/>
-                          <a:cs typeface="Meiryo" pitchFamily="34" charset="-120"/>
+                          <a:latin typeface="Yu Gothic" pitchFamily="34" charset="0"/>
+                          <a:ea typeface="Yu Gothic" pitchFamily="34" charset="-122"/>
+                          <a:cs typeface="Yu Gothic" pitchFamily="34" charset="-120"/>
                         </a:rPr>
-                        <a:t>粗利率、再購買、ID、EC転換率</a:t>
+                        <a:t>新規ライセンシー、国内実装数</a:t>
                       </a:r>
                       <a:endParaRPr lang="en-US" sz="1050" dirty="0">
-                        <a:latin typeface="Meiryo" charset="0"/>
-                        <a:ea typeface="Meiryo" charset="0"/>
-                        <a:cs typeface="Meiryo" charset="0"/>
+                        <a:latin typeface="Yu Gothic" charset="0"/>
+                        <a:ea typeface="Yu Gothic" charset="0"/>
+                        <a:cs typeface="Yu Gothic" charset="0"/>
                       </a:endParaRPr>
                     </a:p>
                   </a:txBody>
-                  <a:tcPr marL="73152" marR="73152" marT="27432" marB="27432" anchor="ctr">
+                  <a:tcPr marL="91440" marR="91440" marT="36576" marB="36576" anchor="ctr">
                     <a:lnL w="9525" cap="flat" cmpd="sng" algn="ctr">
                       <a:solidFill>
-                        <a:srgbClr val="D5DAE3"/>
+                        <a:srgbClr val="D9D9E0"/>
                       </a:solidFill>
                       <a:prstDash val="solid"/>
                       <a:round/>
@@ -7135,7 +7770,7 @@
                     </a:lnL>
                     <a:lnR w="9525" cap="flat" cmpd="sng" algn="ctr">
                       <a:solidFill>
-                        <a:srgbClr val="D5DAE3"/>
+                        <a:srgbClr val="D9D9E0"/>
                       </a:solidFill>
                       <a:prstDash val="solid"/>
                       <a:round/>
@@ -7144,7 +7779,7 @@
                     </a:lnR>
                     <a:lnT w="9525" cap="flat" cmpd="sng" algn="ctr">
                       <a:solidFill>
-                        <a:srgbClr val="D5DAE3"/>
+                        <a:srgbClr val="D9D9E0"/>
                       </a:solidFill>
                       <a:prstDash val="solid"/>
                       <a:round/>
@@ -7153,7 +7788,7 @@
                     </a:lnT>
                     <a:lnB w="9525" cap="flat" cmpd="sng" algn="ctr">
                       <a:solidFill>
-                        <a:srgbClr val="D5DAE3"/>
+                        <a:srgbClr val="D9D9E0"/>
                       </a:solidFill>
                       <a:prstDash val="solid"/>
                       <a:round/>
@@ -7166,7 +7801,7 @@
                   </a:tcPr>
                 </a:tc>
               </a:tr>
-              <a:tr h="310896">
+              <a:tr h="329184">
                 <a:tc>
                   <a:txBody>
                     <a:bodyPr/>
@@ -7176,27 +7811,27 @@
                         <a:buNone/>
                       </a:pPr>
                       <a:r>
-                        <a:rPr lang="en-US" sz="1050" dirty="0">
+                        <a:rPr lang="en-US" sz="1050" b="1" dirty="0">
                           <a:solidFill>
-                            <a:srgbClr val="1A1A1A"/>
+                            <a:srgbClr val="3A106E"/>
                           </a:solidFill>
-                          <a:latin typeface="Meiryo" pitchFamily="34" charset="0"/>
-                          <a:ea typeface="Meiryo" pitchFamily="34" charset="-122"/>
-                          <a:cs typeface="Meiryo" pitchFamily="34" charset="-120"/>
+                          <a:latin typeface="Yu Gothic" pitchFamily="34" charset="0"/>
+                          <a:ea typeface="Yu Gothic" pitchFamily="34" charset="-122"/>
+                          <a:cs typeface="Yu Gothic" pitchFamily="34" charset="-120"/>
                         </a:rPr>
-                        <a:t>中国・海外</a:t>
+                        <a:t>監修・制作・法務／財務</a:t>
                       </a:r>
                       <a:endParaRPr lang="en-US" sz="1050" dirty="0">
-                        <a:latin typeface="Meiryo" charset="0"/>
-                        <a:ea typeface="Meiryo" charset="0"/>
-                        <a:cs typeface="Meiryo" charset="0"/>
+                        <a:latin typeface="Yu Gothic" charset="0"/>
+                        <a:ea typeface="Yu Gothic" charset="0"/>
+                        <a:cs typeface="Yu Gothic" charset="0"/>
                       </a:endParaRPr>
                     </a:p>
                   </a:txBody>
-                  <a:tcPr marL="73152" marR="73152" marT="27432" marB="27432" anchor="ctr">
+                  <a:tcPr marL="91440" marR="91440" marT="36576" marB="36576" anchor="ctr">
                     <a:lnL w="9525" cap="flat" cmpd="sng" algn="ctr">
                       <a:solidFill>
-                        <a:srgbClr val="D5DAE3"/>
+                        <a:srgbClr val="D9D9E0"/>
                       </a:solidFill>
                       <a:prstDash val="solid"/>
                       <a:round/>
@@ -7205,7 +7840,7 @@
                     </a:lnL>
                     <a:lnR w="9525" cap="flat" cmpd="sng" algn="ctr">
                       <a:solidFill>
-                        <a:srgbClr val="D5DAE3"/>
+                        <a:srgbClr val="D9D9E0"/>
                       </a:solidFill>
                       <a:prstDash val="solid"/>
                       <a:round/>
@@ -7214,7 +7849,7 @@
                     </a:lnR>
                     <a:lnT w="9525" cap="flat" cmpd="sng" algn="ctr">
                       <a:solidFill>
-                        <a:srgbClr val="D5DAE3"/>
+                        <a:srgbClr val="D9D9E0"/>
                       </a:solidFill>
                       <a:prstDash val="solid"/>
                       <a:round/>
@@ -7223,7 +7858,7 @@
                     </a:lnT>
                     <a:lnB w="9525" cap="flat" cmpd="sng" algn="ctr">
                       <a:solidFill>
-                        <a:srgbClr val="D5DAE3"/>
+                        <a:srgbClr val="D9D9E0"/>
                       </a:solidFill>
                       <a:prstDash val="solid"/>
                       <a:round/>
@@ -7231,7 +7866,7 @@
                       <a:tailEnd type="none" w="med" len="med"/>
                     </a:lnB>
                     <a:solidFill>
-                      <a:srgbClr val="FFFFFF"/>
+                      <a:srgbClr val="F7F7F9"/>
                     </a:solidFill>
                   </a:tcPr>
                 </a:tc>
@@ -7246,25 +7881,25 @@
                       <a:r>
                         <a:rPr lang="en-US" sz="1050" dirty="0">
                           <a:solidFill>
-                            <a:srgbClr val="1A1A1A"/>
+                            <a:srgbClr val="262630"/>
                           </a:solidFill>
-                          <a:latin typeface="Meiryo" pitchFamily="34" charset="0"/>
-                          <a:ea typeface="Meiryo" pitchFamily="34" charset="-122"/>
-                          <a:cs typeface="Meiryo" pitchFamily="34" charset="-120"/>
+                          <a:latin typeface="Yu Gothic" pitchFamily="34" charset="0"/>
+                          <a:ea typeface="Yu Gothic" pitchFamily="34" charset="-122"/>
+                          <a:cs typeface="Yu Gothic" pitchFamily="34" charset="-120"/>
                         </a:rPr>
-                        <a:t>パートナー分散と成功施策の国内移植</a:t>
+                        <a:t>収益化リードタイム短縮／予測精度と利益品質</a:t>
                       </a:r>
                       <a:endParaRPr lang="en-US" sz="1050" dirty="0">
-                        <a:latin typeface="Meiryo" charset="0"/>
-                        <a:ea typeface="Meiryo" charset="0"/>
-                        <a:cs typeface="Meiryo" charset="0"/>
+                        <a:latin typeface="Yu Gothic" charset="0"/>
+                        <a:ea typeface="Yu Gothic" charset="0"/>
+                        <a:cs typeface="Yu Gothic" charset="0"/>
                       </a:endParaRPr>
                     </a:p>
                   </a:txBody>
-                  <a:tcPr marL="73152" marR="73152" marT="27432" marB="27432" anchor="ctr">
+                  <a:tcPr marL="91440" marR="91440" marT="36576" marB="36576" anchor="ctr">
                     <a:lnL w="9525" cap="flat" cmpd="sng" algn="ctr">
                       <a:solidFill>
-                        <a:srgbClr val="D5DAE3"/>
+                        <a:srgbClr val="D9D9E0"/>
                       </a:solidFill>
                       <a:prstDash val="solid"/>
                       <a:round/>
@@ -7273,7 +7908,7 @@
                     </a:lnL>
                     <a:lnR w="9525" cap="flat" cmpd="sng" algn="ctr">
                       <a:solidFill>
-                        <a:srgbClr val="D5DAE3"/>
+                        <a:srgbClr val="D9D9E0"/>
                       </a:solidFill>
                       <a:prstDash val="solid"/>
                       <a:round/>
@@ -7282,7 +7917,7 @@
                     </a:lnR>
                     <a:lnT w="9525" cap="flat" cmpd="sng" algn="ctr">
                       <a:solidFill>
-                        <a:srgbClr val="D5DAE3"/>
+                        <a:srgbClr val="D9D9E0"/>
                       </a:solidFill>
                       <a:prstDash val="solid"/>
                       <a:round/>
@@ -7291,7 +7926,7 @@
                     </a:lnT>
                     <a:lnB w="9525" cap="flat" cmpd="sng" algn="ctr">
                       <a:solidFill>
-                        <a:srgbClr val="D5DAE3"/>
+                        <a:srgbClr val="D9D9E0"/>
                       </a:solidFill>
                       <a:prstDash val="solid"/>
                       <a:round/>
@@ -7299,7 +7934,7 @@
                       <a:tailEnd type="none" w="med" len="med"/>
                     </a:lnB>
                     <a:solidFill>
-                      <a:srgbClr val="FFFFFF"/>
+                      <a:srgbClr val="F7F7F9"/>
                     </a:solidFill>
                   </a:tcPr>
                 </a:tc>
@@ -7314,231 +7949,25 @@
                       <a:r>
                         <a:rPr lang="en-US" sz="1050" dirty="0">
                           <a:solidFill>
-                            <a:srgbClr val="1A1A1A"/>
+                            <a:srgbClr val="262630"/>
                           </a:solidFill>
-                          <a:latin typeface="Meiryo" pitchFamily="34" charset="0"/>
-                          <a:ea typeface="Meiryo" pitchFamily="34" charset="-122"/>
-                          <a:cs typeface="Meiryo" pitchFamily="34" charset="-120"/>
-                        </a:rPr>
-                        <a:t>新規ライセンシー、国内実装数</a:t>
-                      </a:r>
-                      <a:endParaRPr lang="en-US" sz="1050" dirty="0">
-                        <a:latin typeface="Meiryo" charset="0"/>
-                        <a:ea typeface="Meiryo" charset="0"/>
-                        <a:cs typeface="Meiryo" charset="0"/>
-                      </a:endParaRPr>
-                    </a:p>
-                  </a:txBody>
-                  <a:tcPr marL="73152" marR="73152" marT="27432" marB="27432" anchor="ctr">
-                    <a:lnL w="9525" cap="flat" cmpd="sng" algn="ctr">
-                      <a:solidFill>
-                        <a:srgbClr val="D5DAE3"/>
-                      </a:solidFill>
-                      <a:prstDash val="solid"/>
-                      <a:round/>
-                      <a:headEnd type="none" w="med" len="med"/>
-                      <a:tailEnd type="none" w="med" len="med"/>
-                    </a:lnL>
-                    <a:lnR w="9525" cap="flat" cmpd="sng" algn="ctr">
-                      <a:solidFill>
-                        <a:srgbClr val="D5DAE3"/>
-                      </a:solidFill>
-                      <a:prstDash val="solid"/>
-                      <a:round/>
-                      <a:headEnd type="none" w="med" len="med"/>
-                      <a:tailEnd type="none" w="med" len="med"/>
-                    </a:lnR>
-                    <a:lnT w="9525" cap="flat" cmpd="sng" algn="ctr">
-                      <a:solidFill>
-                        <a:srgbClr val="D5DAE3"/>
-                      </a:solidFill>
-                      <a:prstDash val="solid"/>
-                      <a:round/>
-                      <a:headEnd type="none" w="med" len="med"/>
-                      <a:tailEnd type="none" w="med" len="med"/>
-                    </a:lnT>
-                    <a:lnB w="9525" cap="flat" cmpd="sng" algn="ctr">
-                      <a:solidFill>
-                        <a:srgbClr val="D5DAE3"/>
-                      </a:solidFill>
-                      <a:prstDash val="solid"/>
-                      <a:round/>
-                      <a:headEnd type="none" w="med" len="med"/>
-                      <a:tailEnd type="none" w="med" len="med"/>
-                    </a:lnB>
-                    <a:solidFill>
-                      <a:srgbClr val="FFFFFF"/>
-                    </a:solidFill>
-                  </a:tcPr>
-                </a:tc>
-              </a:tr>
-              <a:tr h="310896">
-                <a:tc>
-                  <a:txBody>
-                    <a:bodyPr/>
-                    <a:lstStyle/>
-                    <a:p>
-                      <a:pPr algn="l" indent="0" marL="0">
-                        <a:buNone/>
-                      </a:pPr>
-                      <a:r>
-                        <a:rPr lang="en-US" sz="1050" dirty="0">
-                          <a:solidFill>
-                            <a:srgbClr val="1A1A1A"/>
-                          </a:solidFill>
-                          <a:latin typeface="Meiryo" pitchFamily="34" charset="0"/>
-                          <a:ea typeface="Meiryo" pitchFamily="34" charset="-122"/>
-                          <a:cs typeface="Meiryo" pitchFamily="34" charset="-120"/>
-                        </a:rPr>
-                        <a:t>監修・制作・法務／財務</a:t>
-                      </a:r>
-                      <a:endParaRPr lang="en-US" sz="1050" dirty="0">
-                        <a:latin typeface="Meiryo" charset="0"/>
-                        <a:ea typeface="Meiryo" charset="0"/>
-                        <a:cs typeface="Meiryo" charset="0"/>
-                      </a:endParaRPr>
-                    </a:p>
-                  </a:txBody>
-                  <a:tcPr marL="73152" marR="73152" marT="27432" marB="27432" anchor="ctr">
-                    <a:lnL w="9525" cap="flat" cmpd="sng" algn="ctr">
-                      <a:solidFill>
-                        <a:srgbClr val="D5DAE3"/>
-                      </a:solidFill>
-                      <a:prstDash val="solid"/>
-                      <a:round/>
-                      <a:headEnd type="none" w="med" len="med"/>
-                      <a:tailEnd type="none" w="med" len="med"/>
-                    </a:lnL>
-                    <a:lnR w="9525" cap="flat" cmpd="sng" algn="ctr">
-                      <a:solidFill>
-                        <a:srgbClr val="D5DAE3"/>
-                      </a:solidFill>
-                      <a:prstDash val="solid"/>
-                      <a:round/>
-                      <a:headEnd type="none" w="med" len="med"/>
-                      <a:tailEnd type="none" w="med" len="med"/>
-                    </a:lnR>
-                    <a:lnT w="9525" cap="flat" cmpd="sng" algn="ctr">
-                      <a:solidFill>
-                        <a:srgbClr val="D5DAE3"/>
-                      </a:solidFill>
-                      <a:prstDash val="solid"/>
-                      <a:round/>
-                      <a:headEnd type="none" w="med" len="med"/>
-                      <a:tailEnd type="none" w="med" len="med"/>
-                    </a:lnT>
-                    <a:lnB w="9525" cap="flat" cmpd="sng" algn="ctr">
-                      <a:solidFill>
-                        <a:srgbClr val="D5DAE3"/>
-                      </a:solidFill>
-                      <a:prstDash val="solid"/>
-                      <a:round/>
-                      <a:headEnd type="none" w="med" len="med"/>
-                      <a:tailEnd type="none" w="med" len="med"/>
-                    </a:lnB>
-                    <a:solidFill>
-                      <a:srgbClr val="FFFFFF"/>
-                    </a:solidFill>
-                  </a:tcPr>
-                </a:tc>
-                <a:tc>
-                  <a:txBody>
-                    <a:bodyPr/>
-                    <a:lstStyle/>
-                    <a:p>
-                      <a:pPr algn="l" indent="0" marL="0">
-                        <a:buNone/>
-                      </a:pPr>
-                      <a:r>
-                        <a:rPr lang="en-US" sz="1050" dirty="0">
-                          <a:solidFill>
-                            <a:srgbClr val="1A1A1A"/>
-                          </a:solidFill>
-                          <a:latin typeface="Meiryo" pitchFamily="34" charset="0"/>
-                          <a:ea typeface="Meiryo" pitchFamily="34" charset="-122"/>
-                          <a:cs typeface="Meiryo" pitchFamily="34" charset="-120"/>
-                        </a:rPr>
-                        <a:t>収益化リードタイム短縮／予測精度と利益品質</a:t>
-                      </a:r>
-                      <a:endParaRPr lang="en-US" sz="1050" dirty="0">
-                        <a:latin typeface="Meiryo" charset="0"/>
-                        <a:ea typeface="Meiryo" charset="0"/>
-                        <a:cs typeface="Meiryo" charset="0"/>
-                      </a:endParaRPr>
-                    </a:p>
-                  </a:txBody>
-                  <a:tcPr marL="73152" marR="73152" marT="27432" marB="27432" anchor="ctr">
-                    <a:lnL w="9525" cap="flat" cmpd="sng" algn="ctr">
-                      <a:solidFill>
-                        <a:srgbClr val="D5DAE3"/>
-                      </a:solidFill>
-                      <a:prstDash val="solid"/>
-                      <a:round/>
-                      <a:headEnd type="none" w="med" len="med"/>
-                      <a:tailEnd type="none" w="med" len="med"/>
-                    </a:lnL>
-                    <a:lnR w="9525" cap="flat" cmpd="sng" algn="ctr">
-                      <a:solidFill>
-                        <a:srgbClr val="D5DAE3"/>
-                      </a:solidFill>
-                      <a:prstDash val="solid"/>
-                      <a:round/>
-                      <a:headEnd type="none" w="med" len="med"/>
-                      <a:tailEnd type="none" w="med" len="med"/>
-                    </a:lnR>
-                    <a:lnT w="9525" cap="flat" cmpd="sng" algn="ctr">
-                      <a:solidFill>
-                        <a:srgbClr val="D5DAE3"/>
-                      </a:solidFill>
-                      <a:prstDash val="solid"/>
-                      <a:round/>
-                      <a:headEnd type="none" w="med" len="med"/>
-                      <a:tailEnd type="none" w="med" len="med"/>
-                    </a:lnT>
-                    <a:lnB w="9525" cap="flat" cmpd="sng" algn="ctr">
-                      <a:solidFill>
-                        <a:srgbClr val="D5DAE3"/>
-                      </a:solidFill>
-                      <a:prstDash val="solid"/>
-                      <a:round/>
-                      <a:headEnd type="none" w="med" len="med"/>
-                      <a:tailEnd type="none" w="med" len="med"/>
-                    </a:lnB>
-                    <a:solidFill>
-                      <a:srgbClr val="FFFFFF"/>
-                    </a:solidFill>
-                  </a:tcPr>
-                </a:tc>
-                <a:tc>
-                  <a:txBody>
-                    <a:bodyPr/>
-                    <a:lstStyle/>
-                    <a:p>
-                      <a:pPr algn="l" indent="0" marL="0">
-                        <a:buNone/>
-                      </a:pPr>
-                      <a:r>
-                        <a:rPr lang="en-US" sz="1050" dirty="0">
-                          <a:solidFill>
-                            <a:srgbClr val="1A1A1A"/>
-                          </a:solidFill>
-                          <a:latin typeface="Meiryo" pitchFamily="34" charset="0"/>
-                          <a:ea typeface="Meiryo" pitchFamily="34" charset="-122"/>
-                          <a:cs typeface="Meiryo" pitchFamily="34" charset="-120"/>
+                          <a:latin typeface="Yu Gothic" pitchFamily="34" charset="0"/>
+                          <a:ea typeface="Yu Gothic" pitchFamily="34" charset="-122"/>
+                          <a:cs typeface="Yu Gothic" pitchFamily="34" charset="-120"/>
                         </a:rPr>
                         <a:t>平均日数、滞留件数、着地誤差</a:t>
                       </a:r>
                       <a:endParaRPr lang="en-US" sz="1050" dirty="0">
-                        <a:latin typeface="Meiryo" charset="0"/>
-                        <a:ea typeface="Meiryo" charset="0"/>
-                        <a:cs typeface="Meiryo" charset="0"/>
+                        <a:latin typeface="Yu Gothic" charset="0"/>
+                        <a:ea typeface="Yu Gothic" charset="0"/>
+                        <a:cs typeface="Yu Gothic" charset="0"/>
                       </a:endParaRPr>
                     </a:p>
                   </a:txBody>
-                  <a:tcPr marL="73152" marR="73152" marT="27432" marB="27432" anchor="ctr">
+                  <a:tcPr marL="91440" marR="91440" marT="36576" marB="36576" anchor="ctr">
                     <a:lnL w="9525" cap="flat" cmpd="sng" algn="ctr">
                       <a:solidFill>
-                        <a:srgbClr val="D5DAE3"/>
+                        <a:srgbClr val="D9D9E0"/>
                       </a:solidFill>
                       <a:prstDash val="solid"/>
                       <a:round/>
@@ -7547,7 +7976,7 @@
                     </a:lnL>
                     <a:lnR w="9525" cap="flat" cmpd="sng" algn="ctr">
                       <a:solidFill>
-                        <a:srgbClr val="D5DAE3"/>
+                        <a:srgbClr val="D9D9E0"/>
                       </a:solidFill>
                       <a:prstDash val="solid"/>
                       <a:round/>
@@ -7556,7 +7985,7 @@
                     </a:lnR>
                     <a:lnT w="9525" cap="flat" cmpd="sng" algn="ctr">
                       <a:solidFill>
-                        <a:srgbClr val="D5DAE3"/>
+                        <a:srgbClr val="D9D9E0"/>
                       </a:solidFill>
                       <a:prstDash val="solid"/>
                       <a:round/>
@@ -7565,7 +7994,7 @@
                     </a:lnT>
                     <a:lnB w="9525" cap="flat" cmpd="sng" algn="ctr">
                       <a:solidFill>
-                        <a:srgbClr val="D5DAE3"/>
+                        <a:srgbClr val="D9D9E0"/>
                       </a:solidFill>
                       <a:prstDash val="solid"/>
                       <a:round/>
@@ -7573,7 +8002,7 @@
                       <a:tailEnd type="none" w="med" len="med"/>
                     </a:lnB>
                     <a:solidFill>
-                      <a:srgbClr val="FFFFFF"/>
+                      <a:srgbClr val="F7F7F9"/>
                     </a:solidFill>
                   </a:tcPr>
                 </a:tc>
@@ -7590,30 +8019,48 @@
         </p:nvSpPr>
         <p:spPr>
           <a:xfrm>
-            <a:off x="457200" y="6035040"/>
-            <a:ext cx="11274552" cy="566928"/>
-          </a:xfrm>
-          <a:prstGeom prst="roundRect">
-            <a:avLst>
-              <a:gd name="adj" fmla="val 9677"/>
-            </a:avLst>
+            <a:off x="502920" y="5806440"/>
+            <a:ext cx="11183112" cy="530352"/>
+          </a:xfrm>
+          <a:prstGeom prst="rect">
+            <a:avLst/>
           </a:prstGeom>
           <a:solidFill>
-            <a:srgbClr val="1B2A4A"/>
+            <a:srgbClr val="F3EFFB"/>
           </a:solidFill>
           <a:ln/>
         </p:spPr>
       </p:sp>
       <p:sp>
         <p:nvSpPr>
-          <p:cNvPr id="19" name="Text 16"/>
-          <p:cNvSpPr/>
-          <p:nvPr/>
-        </p:nvSpPr>
-        <p:spPr>
-          <a:xfrm>
-            <a:off x="777240" y="6035040"/>
-            <a:ext cx="10698480" cy="566928"/>
+          <p:cNvPr id="19" name="Shape 16"/>
+          <p:cNvSpPr/>
+          <p:nvPr/>
+        </p:nvSpPr>
+        <p:spPr>
+          <a:xfrm>
+            <a:off x="502920" y="5806440"/>
+            <a:ext cx="50292" cy="530352"/>
+          </a:xfrm>
+          <a:prstGeom prst="rect">
+            <a:avLst/>
+          </a:prstGeom>
+          <a:solidFill>
+            <a:srgbClr val="7823DC"/>
+          </a:solidFill>
+          <a:ln/>
+        </p:spPr>
+      </p:sp>
+      <p:sp>
+        <p:nvSpPr>
+          <p:cNvPr id="20" name="Text 17"/>
+          <p:cNvSpPr/>
+          <p:nvPr/>
+        </p:nvSpPr>
+        <p:spPr>
+          <a:xfrm>
+            <a:off x="777240" y="5806440"/>
+            <a:ext cx="10835640" cy="530352"/>
           </a:xfrm>
           <a:prstGeom prst="rect">
             <a:avLst/>
@@ -7629,17 +8076,129 @@
               <a:buNone/>
             </a:pPr>
             <a:r>
-              <a:rPr lang="en-US" sz="1350" b="1" dirty="0">
+              <a:rPr lang="en-US" sz="1250" b="1" dirty="0">
                 <a:solidFill>
-                  <a:srgbClr val="FFFFFF"/>
+                  <a:srgbClr val="7823DC"/>
                 </a:solidFill>
-                <a:latin typeface="Meiryo" pitchFamily="34" charset="0"/>
-                <a:ea typeface="Meiryo" pitchFamily="34" charset="-122"/>
-                <a:cs typeface="Meiryo" pitchFamily="34" charset="-120"/>
+                <a:latin typeface="Yu Gothic" pitchFamily="34" charset="0"/>
+                <a:ea typeface="Yu Gothic" pitchFamily="34" charset="-122"/>
+                <a:cs typeface="Yu Gothic" pitchFamily="34" charset="-120"/>
+              </a:rPr>
+              <a:t>最後に残す一文　</a:t>
+            </a:r>
+            <a:pPr indent="0" marL="0">
+              <a:buNone/>
+            </a:pPr>
+            <a:r>
+              <a:rPr lang="en-US" sz="1250" dirty="0">
+                <a:solidFill>
+                  <a:srgbClr val="262630"/>
+                </a:solidFill>
+                <a:latin typeface="Yu Gothic" pitchFamily="34" charset="0"/>
+                <a:ea typeface="Yu Gothic" pitchFamily="34" charset="-122"/>
+                <a:cs typeface="Yu Gothic" pitchFamily="34" charset="-120"/>
               </a:rPr>
               <a:t>今回の上方修正は、改革が完成した結果ではない。改革を本物にする責任を、私たちが負ったということである。</a:t>
             </a:r>
-            <a:endParaRPr lang="en-US" sz="1350" dirty="0"/>
+            <a:endParaRPr lang="en-US" sz="1250" dirty="0"/>
+          </a:p>
+        </p:txBody>
+      </p:sp>
+      <p:sp>
+        <p:nvSpPr>
+          <p:cNvPr id="21" name="Shape 18"/>
+          <p:cNvSpPr/>
+          <p:nvPr/>
+        </p:nvSpPr>
+        <p:spPr>
+          <a:xfrm>
+            <a:off x="502920" y="6473952"/>
+            <a:ext cx="11183112" cy="7315"/>
+          </a:xfrm>
+          <a:prstGeom prst="rect">
+            <a:avLst/>
+          </a:prstGeom>
+          <a:solidFill>
+            <a:srgbClr val="D9D9E0"/>
+          </a:solidFill>
+          <a:ln/>
+        </p:spPr>
+      </p:sp>
+      <p:sp>
+        <p:nvSpPr>
+          <p:cNvPr id="22" name="Text 19"/>
+          <p:cNvSpPr/>
+          <p:nvPr/>
+        </p:nvSpPr>
+        <p:spPr>
+          <a:xfrm>
+            <a:off x="502920" y="6519672"/>
+            <a:ext cx="8229600" cy="256032"/>
+          </a:xfrm>
+          <a:prstGeom prst="rect">
+            <a:avLst/>
+          </a:prstGeom>
+          <a:noFill/>
+          <a:ln/>
+        </p:spPr>
+        <p:txBody>
+          <a:bodyPr wrap="square" lIns="0" tIns="0" rIns="0" bIns="0" rtlCol="0" anchor="ctr"/>
+          <a:lstStyle/>
+          <a:p>
+            <a:pPr indent="0" marL="0">
+              <a:buNone/>
+            </a:pPr>
+            <a:r>
+              <a:rPr lang="en-US" sz="850" dirty="0">
+                <a:solidFill>
+                  <a:srgbClr val="5F5F6E"/>
+                </a:solidFill>
+                <a:latin typeface="Yu Gothic" pitchFamily="34" charset="0"/>
+                <a:ea typeface="Yu Gothic" pitchFamily="34" charset="-122"/>
+                <a:cs typeface="Yu Gothic" pitchFamily="34" charset="-120"/>
+              </a:rPr>
+              <a:t>円谷フィールズホールディングス／円谷プロダクション｜部長会資料（社外秘）</a:t>
+            </a:r>
+            <a:endParaRPr lang="en-US" sz="850" dirty="0"/>
+          </a:p>
+        </p:txBody>
+      </p:sp>
+      <p:sp>
+        <p:nvSpPr>
+          <p:cNvPr id="23" name="Text 20"/>
+          <p:cNvSpPr/>
+          <p:nvPr/>
+        </p:nvSpPr>
+        <p:spPr>
+          <a:xfrm>
+            <a:off x="11247120" y="6519672"/>
+            <a:ext cx="438912" cy="256032"/>
+          </a:xfrm>
+          <a:prstGeom prst="rect">
+            <a:avLst/>
+          </a:prstGeom>
+          <a:noFill/>
+          <a:ln/>
+        </p:spPr>
+        <p:txBody>
+          <a:bodyPr wrap="square" lIns="0" tIns="0" rIns="0" bIns="0" rtlCol="0" anchor="ctr"/>
+          <a:lstStyle/>
+          <a:p>
+            <a:pPr algn="r" indent="0" marL="0">
+              <a:buNone/>
+            </a:pPr>
+            <a:r>
+              <a:rPr lang="en-US" sz="900" dirty="0">
+                <a:solidFill>
+                  <a:srgbClr val="5F5F6E"/>
+                </a:solidFill>
+                <a:latin typeface="Yu Gothic" pitchFamily="34" charset="0"/>
+                <a:ea typeface="Yu Gothic" pitchFamily="34" charset="-122"/>
+                <a:cs typeface="Yu Gothic" pitchFamily="34" charset="-120"/>
+              </a:rPr>
+              <a:t>5</a:t>
+            </a:r>
+            <a:endParaRPr lang="en-US" sz="900" dirty="0"/>
           </a:p>
         </p:txBody>
       </p:sp>
